--- a/output/Crownsmen_Partners_Campaign_Performance_Report__CS_67_-_Equify_Financial.pptx
+++ b/output/Crownsmen_Partners_Campaign_Performance_Report__CS_67_-_Equify_Financial.pptx
@@ -3409,82 +3409,37 @@
           <a:p>
             <a:pPr>
               <a:spcBef>
-                <a:spcPts val="600"/>
+                <a:spcPts val="400"/>
               </a:spcBef>
-              <a:defRPr sz="1300">
+              <a:defRPr sz="1200">
                 <a:solidFill>
                   <a:srgbClr val="333333"/>
                 </a:solidFill>
               </a:defRPr>
             </a:pPr>
             <a:r>
-              <a:t>✓  Main YouTube episode reached 52,894 views</a:t>
+              <a:t>✓  Main episode: 52,900 video views</a:t>
             </a:r>
           </a:p>
           <a:p>
             <a:pPr>
               <a:spcBef>
-                <a:spcPts val="600"/>
+                <a:spcPts val="400"/>
               </a:spcBef>
-              <a:defRPr sz="1300">
+              <a:defRPr sz="1200">
                 <a:solidFill>
                   <a:srgbClr val="333333"/>
                 </a:solidFill>
               </a:defRPr>
             </a:pPr>
             <a:r>
-              <a:t>✓  Combined YouTube content: 56,615 total views</a:t>
-            </a:r>
-          </a:p>
-          <a:p>
-            <a:pPr>
-              <a:spcBef>
-                <a:spcPts val="600"/>
-              </a:spcBef>
-              <a:defRPr sz="1300">
-                <a:solidFill>
-                  <a:srgbClr val="333333"/>
-                </a:solidFill>
-              </a:defRPr>
-            </a:pPr>
-            <a:r>
-              <a:t>✓  LinkedIn posts generated 26 reactions</a:t>
-            </a:r>
-          </a:p>
-          <a:p>
-            <a:pPr>
-              <a:spcBef>
-                <a:spcPts val="600"/>
-              </a:spcBef>
-              <a:defRPr sz="1300">
-                <a:solidFill>
-                  <a:srgbClr val="333333"/>
-                </a:solidFill>
-              </a:defRPr>
-            </a:pPr>
-            <a:r>
-              <a:t>✓  2 promotional clips extending episode reach</a:t>
-            </a:r>
-          </a:p>
-          <a:p>
-            <a:pPr>
-              <a:spcBef>
-                <a:spcPts val="600"/>
-              </a:spcBef>
-              <a:defRPr sz="1300">
-                <a:solidFill>
-                  <a:srgbClr val="333333"/>
-                </a:solidFill>
-              </a:defRPr>
-            </a:pPr>
-            <a:r>
-              <a:t>✓  Multi-platform distribution across 10+ channels</a:t>
+              <a:t>✓  LinkedIn reactions: 26</a:t>
             </a:r>
           </a:p>
           <a:p>
             <a:br/>
             <a:pPr>
-              <a:defRPr sz="1400" b="1">
+              <a:defRPr sz="1300" b="1">
                 <a:solidFill>
                   <a:srgbClr val="1A2B4A"/>
                 </a:solidFill>
@@ -3496,77 +3451,74 @@
           </a:p>
           <a:p>
             <a:pPr>
-              <a:spcBef>
-                <a:spcPts val="300"/>
-              </a:spcBef>
-              <a:defRPr sz="1000">
+              <a:defRPr sz="900">
                 <a:solidFill>
                   <a:srgbClr val="666666"/>
                 </a:solidFill>
               </a:defRPr>
             </a:pPr>
             <a:r>
-              <a:t>• YouTube likes/comments for https://youtu.be/RZMgRG6HlB4</a:t>
+              <a:t>• YouTube Analytics: Average Percentage Viewed (YouTube Analytics API / Zapie...</a:t>
             </a:r>
           </a:p>
           <a:p>
             <a:pPr>
-              <a:spcBef>
-                <a:spcPts val="300"/>
-              </a:spcBef>
-              <a:defRPr sz="1000">
+              <a:defRPr sz="900">
                 <a:solidFill>
                   <a:srgbClr val="666666"/>
                 </a:solidFill>
               </a:defRPr>
             </a:pPr>
             <a:r>
-              <a:t>• YouTube likes/comments for https://youtu.be/-y_KlhcE80k</a:t>
+              <a:t>• YouTube Analytics: Average View Duration (YouTube Analytics API / Zapier)</a:t>
             </a:r>
           </a:p>
           <a:p>
             <a:pPr>
-              <a:spcBef>
-                <a:spcPts val="300"/>
-              </a:spcBef>
-              <a:defRPr sz="1000">
+              <a:defRPr sz="900">
                 <a:solidFill>
                   <a:srgbClr val="666666"/>
                 </a:solidFill>
               </a:defRPr>
             </a:pPr>
             <a:r>
-              <a:t>• YouTube likes/comments for https://youtu.be/cb6VcOTrP0w</a:t>
+              <a:t>• YouTube Analytics: Watch Time Hours (YouTube Analytics API / Zapier)</a:t>
             </a:r>
           </a:p>
           <a:p>
             <a:pPr>
-              <a:spcBef>
-                <a:spcPts val="300"/>
-              </a:spcBef>
-              <a:defRPr sz="1000">
+              <a:defRPr sz="900">
                 <a:solidFill>
                   <a:srgbClr val="666666"/>
                 </a:solidFill>
               </a:defRPr>
             </a:pPr>
             <a:r>
-              <a:t>• Facebook (Crownsmen Partners): reactions, comments, shares, reach (Facebook Grap...</a:t>
+              <a:t>• YouTube Analytics: % viewers watching 25% or more (YouTube Analytics API / ...</a:t>
             </a:r>
           </a:p>
           <a:p>
             <a:pPr>
-              <a:spcBef>
-                <a:spcPts val="300"/>
-              </a:spcBef>
-              <a:defRPr sz="1000">
+              <a:defRPr sz="900">
                 <a:solidFill>
                   <a:srgbClr val="666666"/>
                 </a:solidFill>
               </a:defRPr>
             </a:pPr>
             <a:r>
-              <a:t>• Instagram (@crownsmenp): likes, comments, reach, saves (Instagram Graph API)</a:t>
+              <a:t>• YouTube Analytics: % viewers watching 50% or more (YouTube Analytics API / ...</a:t>
+            </a:r>
+          </a:p>
+          <a:p>
+            <a:pPr>
+              <a:defRPr sz="900">
+                <a:solidFill>
+                  <a:srgbClr val="666666"/>
+                </a:solidFill>
+              </a:defRPr>
+            </a:pPr>
+            <a:r>
+              <a:t>• YouTube Analytics: % viewers watching 90% or more (YouTube Analytics API / ...</a:t>
             </a:r>
           </a:p>
         </p:txBody>
@@ -3580,7 +3532,7 @@
         <p:spPr>
           <a:xfrm>
             <a:off x="5760720" y="1463040"/>
-            <a:ext cx="2926080" cy="914400"/>
+            <a:ext cx="2926080" cy="822960"/>
           </a:xfrm>
           <a:prstGeom prst="rect">
             <a:avLst/>
@@ -3624,8 +3576,8 @@
         </p:nvSpPr>
         <p:spPr>
           <a:xfrm>
-            <a:off x="5897880" y="1554480"/>
-            <a:ext cx="2651760" cy="731520"/>
+            <a:off x="5870448" y="1536192"/>
+            <a:ext cx="2706624" cy="676656"/>
           </a:xfrm>
           <a:prstGeom prst="rect">
             <a:avLst/>
@@ -3639,26 +3591,26 @@
           <a:lstStyle/>
           <a:p>
             <a:pPr>
-              <a:defRPr sz="1100">
+              <a:defRPr sz="1000">
                 <a:solidFill>
                   <a:srgbClr val="1A2B4A"/>
                 </a:solidFill>
               </a:defRPr>
             </a:pPr>
             <a:r>
-              <a:t>Total YouTube Views</a:t>
+              <a:t>Video Views</a:t>
             </a:r>
           </a:p>
           <a:p>
             <a:pPr>
-              <a:defRPr sz="2200" b="1">
+              <a:defRPr sz="2000" b="1">
                 <a:solidFill>
                   <a:srgbClr val="1A2B4A"/>
                 </a:solidFill>
               </a:defRPr>
             </a:pPr>
             <a:r>
-              <a:t>56,615</a:t>
+              <a:t>52,900</a:t>
             </a:r>
           </a:p>
         </p:txBody>
@@ -3671,8 +3623,8 @@
         </p:nvSpPr>
         <p:spPr>
           <a:xfrm>
-            <a:off x="5760720" y="2560320"/>
-            <a:ext cx="2926080" cy="914400"/>
+            <a:off x="5760720" y="2468880"/>
+            <a:ext cx="2926080" cy="822960"/>
           </a:xfrm>
           <a:prstGeom prst="rect">
             <a:avLst/>
@@ -3716,8 +3668,8 @@
         </p:nvSpPr>
         <p:spPr>
           <a:xfrm>
-            <a:off x="5897880" y="2651760"/>
-            <a:ext cx="2651760" cy="731520"/>
+            <a:off x="5870448" y="2542032"/>
+            <a:ext cx="2706624" cy="676656"/>
           </a:xfrm>
           <a:prstGeom prst="rect">
             <a:avLst/>
@@ -3731,26 +3683,26 @@
           <a:lstStyle/>
           <a:p>
             <a:pPr>
-              <a:defRPr sz="1100">
+              <a:defRPr sz="1000">
                 <a:solidFill>
                   <a:srgbClr val="666666"/>
                 </a:solidFill>
               </a:defRPr>
             </a:pPr>
             <a:r>
-              <a:t>LinkedIn Reactions</a:t>
+              <a:t>Watch Time (hrs)</a:t>
             </a:r>
           </a:p>
           <a:p>
             <a:pPr>
-              <a:defRPr sz="1800" b="1">
+              <a:defRPr sz="1600" b="1">
                 <a:solidFill>
                   <a:srgbClr val="1A2B4A"/>
                 </a:solidFill>
               </a:defRPr>
             </a:pPr>
             <a:r>
-              <a:t>26</a:t>
+              <a:t>[TBD]</a:t>
             </a:r>
           </a:p>
         </p:txBody>
@@ -3763,8 +3715,8 @@
         </p:nvSpPr>
         <p:spPr>
           <a:xfrm>
-            <a:off x="5760720" y="3657600"/>
-            <a:ext cx="2926080" cy="914400"/>
+            <a:off x="5760720" y="3474720"/>
+            <a:ext cx="2926080" cy="822960"/>
           </a:xfrm>
           <a:prstGeom prst="rect">
             <a:avLst/>
@@ -3808,8 +3760,8 @@
         </p:nvSpPr>
         <p:spPr>
           <a:xfrm>
-            <a:off x="5897880" y="3749040"/>
-            <a:ext cx="2651760" cy="731520"/>
+            <a:off x="5870448" y="3547872"/>
+            <a:ext cx="2706624" cy="676656"/>
           </a:xfrm>
           <a:prstGeom prst="rect">
             <a:avLst/>
@@ -3823,19 +3775,19 @@
           <a:lstStyle/>
           <a:p>
             <a:pPr>
-              <a:defRPr sz="1100">
+              <a:defRPr sz="1000">
                 <a:solidFill>
                   <a:srgbClr val="666666"/>
                 </a:solidFill>
               </a:defRPr>
             </a:pPr>
             <a:r>
-              <a:t>Email Open Rate</a:t>
+              <a:t>Email Opens</a:t>
             </a:r>
           </a:p>
           <a:p>
             <a:pPr>
-              <a:defRPr sz="1800" b="1">
+              <a:defRPr sz="1600" b="1">
                 <a:solidFill>
                   <a:srgbClr val="1A2B4A"/>
                 </a:solidFill>
@@ -3855,8 +3807,8 @@
         </p:nvSpPr>
         <p:spPr>
           <a:xfrm>
-            <a:off x="5760720" y="4754880"/>
-            <a:ext cx="2926080" cy="914400"/>
+            <a:off x="5760720" y="4480560"/>
+            <a:ext cx="2926080" cy="822960"/>
           </a:xfrm>
           <a:prstGeom prst="rect">
             <a:avLst/>
@@ -3900,8 +3852,8 @@
         </p:nvSpPr>
         <p:spPr>
           <a:xfrm>
-            <a:off x="5897880" y="4846320"/>
-            <a:ext cx="2651760" cy="731520"/>
+            <a:off x="5870448" y="4553712"/>
+            <a:ext cx="2706624" cy="676656"/>
           </a:xfrm>
           <a:prstGeom prst="rect">
             <a:avLst/>
@@ -3915,19 +3867,19 @@
           <a:lstStyle/>
           <a:p>
             <a:pPr>
-              <a:defRPr sz="1100">
+              <a:defRPr sz="1000">
                 <a:solidFill>
                   <a:srgbClr val="666666"/>
                 </a:solidFill>
               </a:defRPr>
             </a:pPr>
             <a:r>
-              <a:t>Landing Page Sessions</a:t>
+              <a:t>Google Ads Clicks</a:t>
             </a:r>
           </a:p>
           <a:p>
             <a:pPr>
-              <a:defRPr sz="1800" b="1">
+              <a:defRPr sz="1600" b="1">
                 <a:solidFill>
                   <a:srgbClr val="1A2B4A"/>
                 </a:solidFill>
@@ -4122,7 +4074,7 @@
         <p:spPr>
           <a:xfrm>
             <a:off x="457200" y="1280160"/>
-            <a:ext cx="1920240" cy="1005840"/>
+            <a:ext cx="1920240" cy="914400"/>
           </a:xfrm>
           <a:prstGeom prst="rect">
             <a:avLst/>
@@ -4166,8 +4118,8 @@
         </p:nvSpPr>
         <p:spPr>
           <a:xfrm>
-            <a:off x="594360" y="1371600"/>
-            <a:ext cx="1645920" cy="822960"/>
+            <a:off x="566928" y="1353312"/>
+            <a:ext cx="1700784" cy="768096"/>
           </a:xfrm>
           <a:prstGeom prst="rect">
             <a:avLst/>
@@ -4181,26 +4133,26 @@
           <a:lstStyle/>
           <a:p>
             <a:pPr>
-              <a:defRPr sz="1100">
+              <a:defRPr sz="1000">
                 <a:solidFill>
                   <a:srgbClr val="1A2B4A"/>
                 </a:solidFill>
               </a:defRPr>
             </a:pPr>
             <a:r>
-              <a:t>Total YouTube Views</a:t>
+              <a:t>Video Views</a:t>
             </a:r>
           </a:p>
           <a:p>
             <a:pPr>
-              <a:defRPr sz="2200" b="1">
+              <a:defRPr sz="2000" b="1">
                 <a:solidFill>
                   <a:srgbClr val="1A2B4A"/>
                 </a:solidFill>
               </a:defRPr>
             </a:pPr>
             <a:r>
-              <a:t>56,615</a:t>
+              <a:t>52,900</a:t>
             </a:r>
           </a:p>
         </p:txBody>
@@ -4214,7 +4166,7 @@
         <p:spPr>
           <a:xfrm>
             <a:off x="2560320" y="1280160"/>
-            <a:ext cx="1920240" cy="1005840"/>
+            <a:ext cx="1920240" cy="914400"/>
           </a:xfrm>
           <a:prstGeom prst="rect">
             <a:avLst/>
@@ -4258,8 +4210,8 @@
         </p:nvSpPr>
         <p:spPr>
           <a:xfrm>
-            <a:off x="2697480" y="1371600"/>
-            <a:ext cx="1645920" cy="822960"/>
+            <a:off x="2670048" y="1353312"/>
+            <a:ext cx="1700784" cy="768096"/>
           </a:xfrm>
           <a:prstGeom prst="rect">
             <a:avLst/>
@@ -4273,26 +4225,26 @@
           <a:lstStyle/>
           <a:p>
             <a:pPr>
-              <a:defRPr sz="1100">
+              <a:defRPr sz="1000">
                 <a:solidFill>
                   <a:srgbClr val="666666"/>
                 </a:solidFill>
               </a:defRPr>
             </a:pPr>
             <a:r>
-              <a:t>Main Episode Views</a:t>
+              <a:t>Watch Time (hrs)</a:t>
             </a:r>
           </a:p>
           <a:p>
             <a:pPr>
-              <a:defRPr sz="1800" b="1">
+              <a:defRPr sz="1600" b="1">
                 <a:solidFill>
                   <a:srgbClr val="1A2B4A"/>
                 </a:solidFill>
               </a:defRPr>
             </a:pPr>
             <a:r>
-              <a:t>52,894</a:t>
+              <a:t>[TBD]</a:t>
             </a:r>
           </a:p>
         </p:txBody>
@@ -4306,7 +4258,7 @@
         <p:spPr>
           <a:xfrm>
             <a:off x="4663440" y="1280160"/>
-            <a:ext cx="1920240" cy="1005840"/>
+            <a:ext cx="1920240" cy="914400"/>
           </a:xfrm>
           <a:prstGeom prst="rect">
             <a:avLst/>
@@ -4350,8 +4302,8 @@
         </p:nvSpPr>
         <p:spPr>
           <a:xfrm>
-            <a:off x="4800600" y="1371600"/>
-            <a:ext cx="1645920" cy="822960"/>
+            <a:off x="4773168" y="1353312"/>
+            <a:ext cx="1700784" cy="768096"/>
           </a:xfrm>
           <a:prstGeom prst="rect">
             <a:avLst/>
@@ -4365,26 +4317,26 @@
           <a:lstStyle/>
           <a:p>
             <a:pPr>
-              <a:defRPr sz="1100">
+              <a:defRPr sz="1000">
                 <a:solidFill>
                   <a:srgbClr val="666666"/>
                 </a:solidFill>
               </a:defRPr>
             </a:pPr>
             <a:r>
-              <a:t>LinkedIn Reactions</a:t>
+              <a:t>Avg % Viewed</a:t>
             </a:r>
           </a:p>
           <a:p>
             <a:pPr>
-              <a:defRPr sz="1800" b="1">
+              <a:defRPr sz="1600" b="1">
                 <a:solidFill>
                   <a:srgbClr val="1A2B4A"/>
                 </a:solidFill>
               </a:defRPr>
             </a:pPr>
             <a:r>
-              <a:t>26</a:t>
+              <a:t>[TBD]</a:t>
             </a:r>
           </a:p>
         </p:txBody>
@@ -4398,7 +4350,7 @@
         <p:spPr>
           <a:xfrm>
             <a:off x="6766560" y="1280160"/>
-            <a:ext cx="1920240" cy="1005840"/>
+            <a:ext cx="1920240" cy="914400"/>
           </a:xfrm>
           <a:prstGeom prst="rect">
             <a:avLst/>
@@ -4442,8 +4394,8 @@
         </p:nvSpPr>
         <p:spPr>
           <a:xfrm>
-            <a:off x="6903720" y="1371600"/>
-            <a:ext cx="1645920" cy="822960"/>
+            <a:off x="6876288" y="1353312"/>
+            <a:ext cx="1700784" cy="768096"/>
           </a:xfrm>
           <a:prstGeom prst="rect">
             <a:avLst/>
@@ -4457,7 +4409,7 @@
           <a:lstStyle/>
           <a:p>
             <a:pPr>
-              <a:defRPr sz="1100">
+              <a:defRPr sz="1000">
                 <a:solidFill>
                   <a:srgbClr val="666666"/>
                 </a:solidFill>
@@ -4469,7 +4421,7 @@
           </a:p>
           <a:p>
             <a:pPr>
-              <a:defRPr sz="1800" b="1">
+              <a:defRPr sz="1600" b="1">
                 <a:solidFill>
                   <a:srgbClr val="1A2B4A"/>
                 </a:solidFill>
@@ -4489,8 +4441,8 @@
         </p:nvSpPr>
         <p:spPr>
           <a:xfrm>
-            <a:off x="457200" y="2468880"/>
-            <a:ext cx="1920240" cy="1005840"/>
+            <a:off x="457200" y="2377440"/>
+            <a:ext cx="1920240" cy="914400"/>
           </a:xfrm>
           <a:prstGeom prst="rect">
             <a:avLst/>
@@ -4534,8 +4486,8 @@
         </p:nvSpPr>
         <p:spPr>
           <a:xfrm>
-            <a:off x="594360" y="2560320"/>
-            <a:ext cx="1645920" cy="822960"/>
+            <a:off x="566928" y="2450592"/>
+            <a:ext cx="1700784" cy="768096"/>
           </a:xfrm>
           <a:prstGeom prst="rect">
             <a:avLst/>
@@ -4549,19 +4501,19 @@
           <a:lstStyle/>
           <a:p>
             <a:pPr>
-              <a:defRPr sz="1100">
+              <a:defRPr sz="1000">
                 <a:solidFill>
                   <a:srgbClr val="666666"/>
                 </a:solidFill>
               </a:defRPr>
             </a:pPr>
             <a:r>
-              <a:t>Email Sends</a:t>
+              <a:t>Email Opens</a:t>
             </a:r>
           </a:p>
           <a:p>
             <a:pPr>
-              <a:defRPr sz="1800" b="1">
+              <a:defRPr sz="1600" b="1">
                 <a:solidFill>
                   <a:srgbClr val="1A2B4A"/>
                 </a:solidFill>
@@ -4581,8 +4533,8 @@
         </p:nvSpPr>
         <p:spPr>
           <a:xfrm>
-            <a:off x="2560320" y="2468880"/>
-            <a:ext cx="1920240" cy="1005840"/>
+            <a:off x="2560320" y="2377440"/>
+            <a:ext cx="1920240" cy="914400"/>
           </a:xfrm>
           <a:prstGeom prst="rect">
             <a:avLst/>
@@ -4626,8 +4578,8 @@
         </p:nvSpPr>
         <p:spPr>
           <a:xfrm>
-            <a:off x="2697480" y="2560320"/>
-            <a:ext cx="1645920" cy="822960"/>
+            <a:off x="2670048" y="2450592"/>
+            <a:ext cx="1700784" cy="768096"/>
           </a:xfrm>
           <a:prstGeom prst="rect">
             <a:avLst/>
@@ -4641,7 +4593,7 @@
           <a:lstStyle/>
           <a:p>
             <a:pPr>
-              <a:defRPr sz="1100">
+              <a:defRPr sz="1000">
                 <a:solidFill>
                   <a:srgbClr val="666666"/>
                 </a:solidFill>
@@ -4653,7 +4605,7 @@
           </a:p>
           <a:p>
             <a:pPr>
-              <a:defRPr sz="1800" b="1">
+              <a:defRPr sz="1600" b="1">
                 <a:solidFill>
                   <a:srgbClr val="1A2B4A"/>
                 </a:solidFill>
@@ -4673,8 +4625,8 @@
         </p:nvSpPr>
         <p:spPr>
           <a:xfrm>
-            <a:off x="4663440" y="2468880"/>
-            <a:ext cx="1920240" cy="1005840"/>
+            <a:off x="4663440" y="2377440"/>
+            <a:ext cx="1920240" cy="914400"/>
           </a:xfrm>
           <a:prstGeom prst="rect">
             <a:avLst/>
@@ -4718,8 +4670,8 @@
         </p:nvSpPr>
         <p:spPr>
           <a:xfrm>
-            <a:off x="4800600" y="2560320"/>
-            <a:ext cx="1645920" cy="822960"/>
+            <a:off x="4773168" y="2450592"/>
+            <a:ext cx="1700784" cy="768096"/>
           </a:xfrm>
           <a:prstGeom prst="rect">
             <a:avLst/>
@@ -4733,26 +4685,26 @@
           <a:lstStyle/>
           <a:p>
             <a:pPr>
-              <a:defRPr sz="1100">
+              <a:defRPr sz="1000">
                 <a:solidFill>
                   <a:srgbClr val="666666"/>
                 </a:solidFill>
               </a:defRPr>
             </a:pPr>
             <a:r>
-              <a:t>Landing Page Sessions</a:t>
+              <a:t>LinkedIn Reactions</a:t>
             </a:r>
           </a:p>
           <a:p>
             <a:pPr>
-              <a:defRPr sz="1800" b="1">
+              <a:defRPr sz="1600" b="1">
                 <a:solidFill>
                   <a:srgbClr val="1A2B4A"/>
                 </a:solidFill>
               </a:defRPr>
             </a:pPr>
             <a:r>
-              <a:t>[TBD]</a:t>
+              <a:t>26</a:t>
             </a:r>
           </a:p>
         </p:txBody>
@@ -4765,8 +4717,8 @@
         </p:nvSpPr>
         <p:spPr>
           <a:xfrm>
-            <a:off x="6766560" y="2468880"/>
-            <a:ext cx="1920240" cy="1005840"/>
+            <a:off x="6766560" y="2377440"/>
+            <a:ext cx="1920240" cy="914400"/>
           </a:xfrm>
           <a:prstGeom prst="rect">
             <a:avLst/>
@@ -4810,8 +4762,8 @@
         </p:nvSpPr>
         <p:spPr>
           <a:xfrm>
-            <a:off x="6903720" y="2560320"/>
-            <a:ext cx="1645920" cy="822960"/>
+            <a:off x="6876288" y="2450592"/>
+            <a:ext cx="1700784" cy="768096"/>
           </a:xfrm>
           <a:prstGeom prst="rect">
             <a:avLst/>
@@ -4825,19 +4777,19 @@
           <a:lstStyle/>
           <a:p>
             <a:pPr>
-              <a:defRPr sz="1100">
+              <a:defRPr sz="1000">
                 <a:solidFill>
                   <a:srgbClr val="666666"/>
                 </a:solidFill>
               </a:defRPr>
             </a:pPr>
             <a:r>
-              <a:t>UTM Clicks</a:t>
+              <a:t>Google Ads Clicks</a:t>
             </a:r>
           </a:p>
           <a:p>
             <a:pPr>
-              <a:defRPr sz="1800" b="1">
+              <a:defRPr sz="1600" b="1">
                 <a:solidFill>
                   <a:srgbClr val="1A2B4A"/>
                 </a:solidFill>
@@ -4857,8 +4809,8 @@
         </p:nvSpPr>
         <p:spPr>
           <a:xfrm>
-            <a:off x="457200" y="3749039"/>
-            <a:ext cx="8229600" cy="2286000"/>
+            <a:off x="457200" y="3566160"/>
+            <a:ext cx="8229600" cy="2560320"/>
           </a:xfrm>
           <a:prstGeom prst="rect">
             <a:avLst/>
@@ -4872,7 +4824,7 @@
           <a:lstStyle/>
           <a:p>
             <a:pPr>
-              <a:defRPr sz="1600" b="1">
+              <a:defRPr sz="1400" b="1">
                 <a:solidFill>
                   <a:srgbClr val="1A2B4A"/>
                 </a:solidFill>
@@ -4884,77 +4836,38 @@
           </a:p>
           <a:p>
             <a:pPr>
-              <a:spcBef>
-                <a:spcPts val="400"/>
-              </a:spcBef>
-              <a:defRPr sz="1200">
+              <a:defRPr sz="1100">
                 <a:solidFill>
                   <a:srgbClr val="333333"/>
                 </a:solidFill>
               </a:defRPr>
             </a:pPr>
             <a:r>
-              <a:t>• Full episode published across YouTube, podcast platforms, and social channels</a:t>
+              <a:t>• Full episode + clips on YouTube; syndicated to podcast and social channels</a:t>
             </a:r>
           </a:p>
           <a:p>
             <a:pPr>
-              <a:spcBef>
-                <a:spcPts val="400"/>
-              </a:spcBef>
-              <a:defRPr sz="1200">
+              <a:defRPr sz="1100">
                 <a:solidFill>
                   <a:srgbClr val="333333"/>
                 </a:solidFill>
               </a:defRPr>
             </a:pPr>
             <a:r>
-              <a:t>• 2 promotional clips distributed on YouTube</a:t>
+              <a:t>• Email via Constant Contact; paid promotion via Google Ads</a:t>
             </a:r>
           </a:p>
           <a:p>
             <a:pPr>
-              <a:spcBef>
-                <a:spcPts val="400"/>
-              </a:spcBef>
-              <a:defRPr sz="1200">
+              <a:defRPr sz="1100">
                 <a:solidFill>
                   <a:srgbClr val="333333"/>
                 </a:solidFill>
               </a:defRPr>
             </a:pPr>
             <a:r>
-              <a:t>• Social promotion on LinkedIn, Facebook, Instagram, Threads, and X</a:t>
-            </a:r>
-          </a:p>
-          <a:p>
-            <a:pPr>
-              <a:spcBef>
-                <a:spcPts val="400"/>
-              </a:spcBef>
-              <a:defRPr sz="1200">
-                <a:solidFill>
-                  <a:srgbClr val="333333"/>
-                </a:solidFill>
-              </a:defRPr>
-            </a:pPr>
-            <a:r>
-              <a:t>• Email campaign via Constant Contact to industry subscriber list</a:t>
-            </a:r>
-          </a:p>
-          <a:p>
-            <a:pPr>
-              <a:spcBef>
-                <a:spcPts val="400"/>
-              </a:spcBef>
-              <a:defRPr sz="1200">
-                <a:solidFill>
-                  <a:srgbClr val="333333"/>
-                </a:solidFill>
-              </a:defRPr>
-            </a:pPr>
-            <a:r>
-              <a:t>• Dedicated landing page: crownsmen.com/equify-financial-construction-equipment-financing/</a:t>
+              <a:t>• Landing page: crownsmen.com/equify-financial-construction-equipment-financing/</a:t>
             </a:r>
           </a:p>
         </p:txBody>
@@ -5093,7 +5006,7 @@
               </a:defRPr>
             </a:pPr>
             <a:r>
-              <a:t>YouTube Performance</a:t>
+              <a:t>YouTube — Video Views</a:t>
             </a:r>
           </a:p>
         </p:txBody>
@@ -5143,7 +5056,7 @@
         </p:nvGraphicFramePr>
         <p:xfrm>
           <a:off x="365760" y="1188720"/>
-          <a:ext cx="7132320" cy="1280160"/>
+          <a:ext cx="7498080" cy="1170432"/>
         </p:xfrm>
         <a:graphic>
           <a:graphicData uri="http://schemas.openxmlformats.org/drawingml/2006/table">
@@ -5152,21 +5065,18 @@
                 <a:tableStyleId>{5C22544A-7EE6-4342-B048-85BDC9FD1C3A}</a:tableStyleId>
               </a:tblPr>
               <a:tblGrid>
-                <a:gridCol w="3200400"/>
-                <a:gridCol w="731520"/>
-                <a:gridCol w="914400"/>
-                <a:gridCol w="731520"/>
-                <a:gridCol w="822960"/>
-                <a:gridCol w="731520"/>
+                <a:gridCol w="5029200"/>
+                <a:gridCol w="1097280"/>
+                <a:gridCol w="1371600"/>
               </a:tblGrid>
-              <a:tr h="320040">
+              <a:tr h="292608">
                 <a:tc>
                   <a:txBody>
                     <a:bodyPr/>
                     <a:lstStyle/>
                     <a:p>
                       <a:pPr>
-                        <a:defRPr sz="1000" b="1">
+                        <a:defRPr sz="900" b="1">
                           <a:solidFill>
                             <a:srgbClr val="FFFFFF"/>
                           </a:solidFill>
@@ -5189,7 +5099,7 @@
                     <a:lstStyle/>
                     <a:p>
                       <a:pPr>
-                        <a:defRPr sz="1000" b="1">
+                        <a:defRPr sz="900" b="1">
                           <a:solidFill>
                             <a:srgbClr val="FFFFFF"/>
                           </a:solidFill>
@@ -5212,83 +5122,14 @@
                     <a:lstStyle/>
                     <a:p>
                       <a:pPr>
-                        <a:defRPr sz="1000" b="1">
+                        <a:defRPr sz="900" b="1">
                           <a:solidFill>
                             <a:srgbClr val="FFFFFF"/>
                           </a:solidFill>
                         </a:defRPr>
                       </a:pPr>
                       <a:r>
-                        <a:t>Views</a:t>
-                      </a:r>
-                    </a:p>
-                  </a:txBody>
-                  <a:tcPr>
-                    <a:solidFill>
-                      <a:srgbClr val="1A2B4A"/>
-                    </a:solidFill>
-                  </a:tcPr>
-                </a:tc>
-                <a:tc>
-                  <a:txBody>
-                    <a:bodyPr/>
-                    <a:lstStyle/>
-                    <a:p>
-                      <a:pPr>
-                        <a:defRPr sz="1000" b="1">
-                          <a:solidFill>
-                            <a:srgbClr val="FFFFFF"/>
-                          </a:solidFill>
-                        </a:defRPr>
-                      </a:pPr>
-                      <a:r>
-                        <a:t>Likes</a:t>
-                      </a:r>
-                    </a:p>
-                  </a:txBody>
-                  <a:tcPr>
-                    <a:solidFill>
-                      <a:srgbClr val="1A2B4A"/>
-                    </a:solidFill>
-                  </a:tcPr>
-                </a:tc>
-                <a:tc>
-                  <a:txBody>
-                    <a:bodyPr/>
-                    <a:lstStyle/>
-                    <a:p>
-                      <a:pPr>
-                        <a:defRPr sz="1000" b="1">
-                          <a:solidFill>
-                            <a:srgbClr val="FFFFFF"/>
-                          </a:solidFill>
-                        </a:defRPr>
-                      </a:pPr>
-                      <a:r>
-                        <a:t>Comments</a:t>
-                      </a:r>
-                    </a:p>
-                  </a:txBody>
-                  <a:tcPr>
-                    <a:solidFill>
-                      <a:srgbClr val="1A2B4A"/>
-                    </a:solidFill>
-                  </a:tcPr>
-                </a:tc>
-                <a:tc>
-                  <a:txBody>
-                    <a:bodyPr/>
-                    <a:lstStyle/>
-                    <a:p>
-                      <a:pPr>
-                        <a:defRPr sz="1000" b="1">
-                          <a:solidFill>
-                            <a:srgbClr val="FFFFFF"/>
-                          </a:solidFill>
-                        </a:defRPr>
-                      </a:pPr>
-                      <a:r>
-                        <a:t>Duration</a:t>
+                        <a:t>Video Views</a:t>
                       </a:r>
                     </a:p>
                   </a:txBody>
@@ -5299,21 +5140,21 @@
                   </a:tcPr>
                 </a:tc>
               </a:tr>
-              <a:tr h="320040">
+              <a:tr h="292608">
                 <a:tc>
                   <a:txBody>
                     <a:bodyPr/>
                     <a:lstStyle/>
                     <a:p>
                       <a:pPr>
-                        <a:defRPr sz="1000">
+                        <a:defRPr sz="900">
                           <a:solidFill>
                             <a:srgbClr val="333333"/>
                           </a:solidFill>
                         </a:defRPr>
                       </a:pPr>
                       <a:r>
-                        <a:t>Equify Financial: The Hidden Cash Inside Your...</a:t>
+                        <a:t>Equify Financial: The Hidden Cash Inside Your Equi</a:t>
                       </a:r>
                     </a:p>
                   </a:txBody>
@@ -5325,7 +5166,7 @@
                     <a:lstStyle/>
                     <a:p>
                       <a:pPr>
-                        <a:defRPr sz="1000">
+                        <a:defRPr sz="900">
                           <a:solidFill>
                             <a:srgbClr val="333333"/>
                           </a:solidFill>
@@ -5344,92 +5185,35 @@
                     <a:lstStyle/>
                     <a:p>
                       <a:pPr>
-                        <a:defRPr sz="1000">
+                        <a:defRPr sz="900">
                           <a:solidFill>
                             <a:srgbClr val="333333"/>
                           </a:solidFill>
                         </a:defRPr>
                       </a:pPr>
                       <a:r>
-                        <a:t>52,894</a:t>
+                        <a:t>52,900</a:t>
                       </a:r>
                     </a:p>
                   </a:txBody>
                   <a:tcPr/>
                 </a:tc>
+              </a:tr>
+              <a:tr h="292608">
                 <a:tc>
                   <a:txBody>
                     <a:bodyPr/>
                     <a:lstStyle/>
                     <a:p>
                       <a:pPr>
-                        <a:defRPr sz="1000">
+                        <a:defRPr sz="900">
                           <a:solidFill>
                             <a:srgbClr val="333333"/>
                           </a:solidFill>
                         </a:defRPr>
                       </a:pPr>
                       <a:r>
-                        <a:t>[TBD]</a:t>
-                      </a:r>
-                    </a:p>
-                  </a:txBody>
-                  <a:tcPr/>
-                </a:tc>
-                <a:tc>
-                  <a:txBody>
-                    <a:bodyPr/>
-                    <a:lstStyle/>
-                    <a:p>
-                      <a:pPr>
-                        <a:defRPr sz="1000">
-                          <a:solidFill>
-                            <a:srgbClr val="333333"/>
-                          </a:solidFill>
-                        </a:defRPr>
-                      </a:pPr>
-                      <a:r>
-                        <a:t>[TBD]</a:t>
-                      </a:r>
-                    </a:p>
-                  </a:txBody>
-                  <a:tcPr/>
-                </a:tc>
-                <a:tc>
-                  <a:txBody>
-                    <a:bodyPr/>
-                    <a:lstStyle/>
-                    <a:p>
-                      <a:pPr>
-                        <a:defRPr sz="1000">
-                          <a:solidFill>
-                            <a:srgbClr val="333333"/>
-                          </a:solidFill>
-                        </a:defRPr>
-                      </a:pPr>
-                      <a:r>
-                        <a:t>[TBD]</a:t>
-                      </a:r>
-                    </a:p>
-                  </a:txBody>
-                  <a:tcPr/>
-                </a:tc>
-              </a:tr>
-              <a:tr h="320040">
-                <a:tc>
-                  <a:txBody>
-                    <a:bodyPr/>
-                    <a:lstStyle/>
-                    <a:p>
-                      <a:pPr>
-                        <a:defRPr sz="1000">
-                          <a:solidFill>
-                            <a:srgbClr val="333333"/>
-                          </a:solidFill>
-                        </a:defRPr>
-                      </a:pPr>
-                      <a:r>
-                        <a:t>Equify Financial Shares Why Renting Equipment...</a:t>
+                        <a:t>Equify Financial Shares Why Renting Equipment Firs</a:t>
                       </a:r>
                     </a:p>
                   </a:txBody>
@@ -5445,7 +5229,7 @@
                     <a:lstStyle/>
                     <a:p>
                       <a:pPr>
-                        <a:defRPr sz="1000">
+                        <a:defRPr sz="900">
                           <a:solidFill>
                             <a:srgbClr val="333333"/>
                           </a:solidFill>
@@ -5468,7 +5252,7 @@
                     <a:lstStyle/>
                     <a:p>
                       <a:pPr>
-                        <a:defRPr sz="1000">
+                        <a:defRPr sz="900">
                           <a:solidFill>
                             <a:srgbClr val="333333"/>
                           </a:solidFill>
@@ -5485,91 +5269,22 @@
                     </a:solidFill>
                   </a:tcPr>
                 </a:tc>
+              </a:tr>
+              <a:tr h="292608">
                 <a:tc>
                   <a:txBody>
                     <a:bodyPr/>
                     <a:lstStyle/>
                     <a:p>
                       <a:pPr>
-                        <a:defRPr sz="1000">
+                        <a:defRPr sz="900">
                           <a:solidFill>
                             <a:srgbClr val="333333"/>
                           </a:solidFill>
                         </a:defRPr>
                       </a:pPr>
                       <a:r>
-                        <a:t>[TBD]</a:t>
-                      </a:r>
-                    </a:p>
-                  </a:txBody>
-                  <a:tcPr>
-                    <a:solidFill>
-                      <a:srgbClr val="F5F5F5"/>
-                    </a:solidFill>
-                  </a:tcPr>
-                </a:tc>
-                <a:tc>
-                  <a:txBody>
-                    <a:bodyPr/>
-                    <a:lstStyle/>
-                    <a:p>
-                      <a:pPr>
-                        <a:defRPr sz="1000">
-                          <a:solidFill>
-                            <a:srgbClr val="333333"/>
-                          </a:solidFill>
-                        </a:defRPr>
-                      </a:pPr>
-                      <a:r>
-                        <a:t>[TBD]</a:t>
-                      </a:r>
-                    </a:p>
-                  </a:txBody>
-                  <a:tcPr>
-                    <a:solidFill>
-                      <a:srgbClr val="F5F5F5"/>
-                    </a:solidFill>
-                  </a:tcPr>
-                </a:tc>
-                <a:tc>
-                  <a:txBody>
-                    <a:bodyPr/>
-                    <a:lstStyle/>
-                    <a:p>
-                      <a:pPr>
-                        <a:defRPr sz="1000">
-                          <a:solidFill>
-                            <a:srgbClr val="333333"/>
-                          </a:solidFill>
-                        </a:defRPr>
-                      </a:pPr>
-                      <a:r>
-                        <a:t>[TBD]</a:t>
-                      </a:r>
-                    </a:p>
-                  </a:txBody>
-                  <a:tcPr>
-                    <a:solidFill>
-                      <a:srgbClr val="F5F5F5"/>
-                    </a:solidFill>
-                  </a:tcPr>
-                </a:tc>
-              </a:tr>
-              <a:tr h="320040">
-                <a:tc>
-                  <a:txBody>
-                    <a:bodyPr/>
-                    <a:lstStyle/>
-                    <a:p>
-                      <a:pPr>
-                        <a:defRPr sz="1000">
-                          <a:solidFill>
-                            <a:srgbClr val="333333"/>
-                          </a:solidFill>
-                        </a:defRPr>
-                      </a:pPr>
-                      <a:r>
-                        <a:t>Equify Financial Talks About Equipment Financ...</a:t>
+                        <a:t>Equify Financial Talks About Equipment Financing M</a:t>
                       </a:r>
                     </a:p>
                   </a:txBody>
@@ -5581,7 +5296,7 @@
                     <a:lstStyle/>
                     <a:p>
                       <a:pPr>
-                        <a:defRPr sz="1000">
+                        <a:defRPr sz="900">
                           <a:solidFill>
                             <a:srgbClr val="333333"/>
                           </a:solidFill>
@@ -5600,7 +5315,7 @@
                     <a:lstStyle/>
                     <a:p>
                       <a:pPr>
-                        <a:defRPr sz="1000">
+                        <a:defRPr sz="900">
                           <a:solidFill>
                             <a:srgbClr val="333333"/>
                           </a:solidFill>
@@ -5613,63 +5328,6 @@
                   </a:txBody>
                   <a:tcPr/>
                 </a:tc>
-                <a:tc>
-                  <a:txBody>
-                    <a:bodyPr/>
-                    <a:lstStyle/>
-                    <a:p>
-                      <a:pPr>
-                        <a:defRPr sz="1000">
-                          <a:solidFill>
-                            <a:srgbClr val="333333"/>
-                          </a:solidFill>
-                        </a:defRPr>
-                      </a:pPr>
-                      <a:r>
-                        <a:t>[TBD]</a:t>
-                      </a:r>
-                    </a:p>
-                  </a:txBody>
-                  <a:tcPr/>
-                </a:tc>
-                <a:tc>
-                  <a:txBody>
-                    <a:bodyPr/>
-                    <a:lstStyle/>
-                    <a:p>
-                      <a:pPr>
-                        <a:defRPr sz="1000">
-                          <a:solidFill>
-                            <a:srgbClr val="333333"/>
-                          </a:solidFill>
-                        </a:defRPr>
-                      </a:pPr>
-                      <a:r>
-                        <a:t>[TBD]</a:t>
-                      </a:r>
-                    </a:p>
-                  </a:txBody>
-                  <a:tcPr/>
-                </a:tc>
-                <a:tc>
-                  <a:txBody>
-                    <a:bodyPr/>
-                    <a:lstStyle/>
-                    <a:p>
-                      <a:pPr>
-                        <a:defRPr sz="1000">
-                          <a:solidFill>
-                            <a:srgbClr val="333333"/>
-                          </a:solidFill>
-                        </a:defRPr>
-                      </a:pPr>
-                      <a:r>
-                        <a:t>[TBD]</a:t>
-                      </a:r>
-                    </a:p>
-                  </a:txBody>
-                  <a:tcPr/>
-                </a:tc>
               </a:tr>
             </a:tbl>
           </a:graphicData>
@@ -5677,14 +5335,59 @@
       </p:graphicFrame>
       <p:sp>
         <p:nvSpPr>
-          <p:cNvPr id="6" name="TextBox 5"/>
+          <p:cNvPr id="6" name="Rectangle 5"/>
+          <p:cNvSpPr/>
+          <p:nvPr/>
+        </p:nvSpPr>
+        <p:spPr>
+          <a:xfrm>
+            <a:off x="457200" y="3840480"/>
+            <a:ext cx="2560320" cy="914400"/>
+          </a:xfrm>
+          <a:prstGeom prst="rect">
+            <a:avLst/>
+          </a:prstGeom>
+          <a:solidFill>
+            <a:srgbClr val="C9A227"/>
+          </a:solidFill>
+          <a:ln>
+            <a:solidFill>
+              <a:srgbClr val="C9A227"/>
+            </a:solidFill>
+          </a:ln>
+        </p:spPr>
+        <p:style>
+          <a:lnRef idx="1">
+            <a:schemeClr val="accent1"/>
+          </a:lnRef>
+          <a:fillRef idx="3">
+            <a:schemeClr val="accent1"/>
+          </a:fillRef>
+          <a:effectRef idx="2">
+            <a:schemeClr val="accent1"/>
+          </a:effectRef>
+          <a:fontRef idx="minor">
+            <a:schemeClr val="lt1"/>
+          </a:fontRef>
+        </p:style>
+        <p:txBody>
+          <a:bodyPr rtlCol="0" anchor="ctr"/>
+          <a:lstStyle/>
+          <a:p>
+            <a:pPr algn="ctr"/>
+          </a:p>
+        </p:txBody>
+      </p:sp>
+      <p:sp>
+        <p:nvSpPr>
+          <p:cNvPr id="7" name="TextBox 6"/>
           <p:cNvSpPr txBox="1"/>
           <p:nvPr/>
         </p:nvSpPr>
         <p:spPr>
           <a:xfrm>
-            <a:off x="457200" y="4114800"/>
-            <a:ext cx="8229600" cy="1828800"/>
+            <a:off x="566928" y="3913632"/>
+            <a:ext cx="2340864" cy="768096"/>
           </a:xfrm>
           <a:prstGeom prst="rect">
             <a:avLst/>
@@ -5692,63 +5395,131 @@
           <a:noFill/>
         </p:spPr>
         <p:txBody>
-          <a:bodyPr wrap="none">
+          <a:bodyPr wrap="square">
             <a:spAutoFit/>
           </a:bodyPr>
           <a:lstStyle/>
           <a:p>
             <a:pPr>
-              <a:defRPr sz="1400" b="1">
+              <a:defRPr sz="1000">
                 <a:solidFill>
                   <a:srgbClr val="1A2B4A"/>
                 </a:solidFill>
               </a:defRPr>
             </a:pPr>
             <a:r>
-              <a:t>YouTube Highlights</a:t>
+              <a:t>Main Episode Views</a:t>
             </a:r>
           </a:p>
           <a:p>
             <a:pPr>
-              <a:defRPr sz="1200">
-                <a:solidFill>
-                  <a:srgbClr val="333333"/>
+              <a:defRPr sz="2000" b="1">
+                <a:solidFill>
+                  <a:srgbClr val="1A2B4A"/>
                 </a:solidFill>
               </a:defRPr>
             </a:pPr>
             <a:r>
-              <a:t>• Main episode: 52,894 views</a:t>
-            </a:r>
-          </a:p>
+              <a:t>52,900</a:t>
+            </a:r>
+          </a:p>
+        </p:txBody>
+      </p:sp>
+      <p:sp>
+        <p:nvSpPr>
+          <p:cNvPr id="8" name="Rectangle 7"/>
+          <p:cNvSpPr/>
+          <p:nvPr/>
+        </p:nvSpPr>
+        <p:spPr>
+          <a:xfrm>
+            <a:off x="3200400" y="3840480"/>
+            <a:ext cx="2560320" cy="914400"/>
+          </a:xfrm>
+          <a:prstGeom prst="rect">
+            <a:avLst/>
+          </a:prstGeom>
+          <a:solidFill>
+            <a:srgbClr val="F5F5F5"/>
+          </a:solidFill>
+          <a:ln>
+            <a:solidFill>
+              <a:srgbClr val="DDDDDD"/>
+            </a:solidFill>
+          </a:ln>
+        </p:spPr>
+        <p:style>
+          <a:lnRef idx="1">
+            <a:schemeClr val="accent1"/>
+          </a:lnRef>
+          <a:fillRef idx="3">
+            <a:schemeClr val="accent1"/>
+          </a:fillRef>
+          <a:effectRef idx="2">
+            <a:schemeClr val="accent1"/>
+          </a:effectRef>
+          <a:fontRef idx="minor">
+            <a:schemeClr val="lt1"/>
+          </a:fontRef>
+        </p:style>
+        <p:txBody>
+          <a:bodyPr rtlCol="0" anchor="ctr"/>
+          <a:lstStyle/>
+          <a:p>
+            <a:pPr algn="ctr"/>
+          </a:p>
+        </p:txBody>
+      </p:sp>
+      <p:sp>
+        <p:nvSpPr>
+          <p:cNvPr id="9" name="TextBox 8"/>
+          <p:cNvSpPr txBox="1"/>
+          <p:nvPr/>
+        </p:nvSpPr>
+        <p:spPr>
+          <a:xfrm>
+            <a:off x="3310128" y="3913632"/>
+            <a:ext cx="2340864" cy="768096"/>
+          </a:xfrm>
+          <a:prstGeom prst="rect">
+            <a:avLst/>
+          </a:prstGeom>
+          <a:noFill/>
+        </p:spPr>
+        <p:txBody>
+          <a:bodyPr wrap="square">
+            <a:spAutoFit/>
+          </a:bodyPr>
+          <a:lstStyle/>
           <a:p>
             <a:pPr>
-              <a:defRPr sz="1200">
-                <a:solidFill>
-                  <a:srgbClr val="333333"/>
+              <a:defRPr sz="1000">
+                <a:solidFill>
+                  <a:srgbClr val="666666"/>
                 </a:solidFill>
               </a:defRPr>
             </a:pPr>
             <a:r>
-              <a:t>• Promotional clips combined: 3,721 views</a:t>
+              <a:t>Total YouTube Views</a:t>
             </a:r>
           </a:p>
           <a:p>
             <a:pPr>
-              <a:defRPr sz="1200">
-                <a:solidFill>
-                  <a:srgbClr val="333333"/>
+              <a:defRPr sz="1600" b="1">
+                <a:solidFill>
+                  <a:srgbClr val="1A2B4A"/>
                 </a:solidFill>
               </a:defRPr>
             </a:pPr>
             <a:r>
-              <a:t>• Total YouTube reach: 56,615 views</a:t>
-            </a:r>
-          </a:p>
-        </p:txBody>
-      </p:sp>
-      <p:sp>
-        <p:nvSpPr>
-          <p:cNvPr id="7" name="TextBox 6"/>
+              <a:t>56,621</a:t>
+            </a:r>
+          </a:p>
+        </p:txBody>
+      </p:sp>
+      <p:sp>
+        <p:nvSpPr>
+          <p:cNvPr id="10" name="TextBox 9"/>
           <p:cNvSpPr txBox="1"/>
           <p:nvPr/>
         </p:nvSpPr>
@@ -5880,7 +5651,7 @@
               </a:defRPr>
             </a:pPr>
             <a:r>
-              <a:t>Social Media — LinkedIn</a:t>
+              <a:t>YouTube Analytics &amp; Retention</a:t>
             </a:r>
           </a:p>
         </p:txBody>
@@ -5915,22 +5686,666 @@
               </a:defRPr>
             </a:pPr>
             <a:r>
-              <a:t>Organic Posts</a:t>
+              <a:t>Equify Financial: The Hidden Cash Inside Your Equipment Flee</a:t>
+            </a:r>
+          </a:p>
+        </p:txBody>
+      </p:sp>
+      <p:sp>
+        <p:nvSpPr>
+          <p:cNvPr id="5" name="Rectangle 4"/>
+          <p:cNvSpPr/>
+          <p:nvPr/>
+        </p:nvSpPr>
+        <p:spPr>
+          <a:xfrm>
+            <a:off x="365760" y="1188720"/>
+            <a:ext cx="2011680" cy="914400"/>
+          </a:xfrm>
+          <a:prstGeom prst="rect">
+            <a:avLst/>
+          </a:prstGeom>
+          <a:solidFill>
+            <a:srgbClr val="C9A227"/>
+          </a:solidFill>
+          <a:ln>
+            <a:solidFill>
+              <a:srgbClr val="C9A227"/>
+            </a:solidFill>
+          </a:ln>
+        </p:spPr>
+        <p:style>
+          <a:lnRef idx="1">
+            <a:schemeClr val="accent1"/>
+          </a:lnRef>
+          <a:fillRef idx="3">
+            <a:schemeClr val="accent1"/>
+          </a:fillRef>
+          <a:effectRef idx="2">
+            <a:schemeClr val="accent1"/>
+          </a:effectRef>
+          <a:fontRef idx="minor">
+            <a:schemeClr val="lt1"/>
+          </a:fontRef>
+        </p:style>
+        <p:txBody>
+          <a:bodyPr rtlCol="0" anchor="ctr"/>
+          <a:lstStyle/>
+          <a:p>
+            <a:pPr algn="ctr"/>
+          </a:p>
+        </p:txBody>
+      </p:sp>
+      <p:sp>
+        <p:nvSpPr>
+          <p:cNvPr id="6" name="TextBox 5"/>
+          <p:cNvSpPr txBox="1"/>
+          <p:nvPr/>
+        </p:nvSpPr>
+        <p:spPr>
+          <a:xfrm>
+            <a:off x="475488" y="1261872"/>
+            <a:ext cx="1792224" cy="768096"/>
+          </a:xfrm>
+          <a:prstGeom prst="rect">
+            <a:avLst/>
+          </a:prstGeom>
+          <a:noFill/>
+        </p:spPr>
+        <p:txBody>
+          <a:bodyPr wrap="square">
+            <a:spAutoFit/>
+          </a:bodyPr>
+          <a:lstStyle/>
+          <a:p>
+            <a:pPr>
+              <a:defRPr sz="1000">
+                <a:solidFill>
+                  <a:srgbClr val="1A2B4A"/>
+                </a:solidFill>
+              </a:defRPr>
+            </a:pPr>
+            <a:r>
+              <a:t>Video Views</a:t>
+            </a:r>
+          </a:p>
+          <a:p>
+            <a:pPr>
+              <a:defRPr sz="2000" b="1">
+                <a:solidFill>
+                  <a:srgbClr val="1A2B4A"/>
+                </a:solidFill>
+              </a:defRPr>
+            </a:pPr>
+            <a:r>
+              <a:t>52,900</a:t>
+            </a:r>
+          </a:p>
+        </p:txBody>
+      </p:sp>
+      <p:sp>
+        <p:nvSpPr>
+          <p:cNvPr id="7" name="Rectangle 6"/>
+          <p:cNvSpPr/>
+          <p:nvPr/>
+        </p:nvSpPr>
+        <p:spPr>
+          <a:xfrm>
+            <a:off x="2560320" y="1188720"/>
+            <a:ext cx="2011680" cy="914400"/>
+          </a:xfrm>
+          <a:prstGeom prst="rect">
+            <a:avLst/>
+          </a:prstGeom>
+          <a:solidFill>
+            <a:srgbClr val="F5F5F5"/>
+          </a:solidFill>
+          <a:ln>
+            <a:solidFill>
+              <a:srgbClr val="DDDDDD"/>
+            </a:solidFill>
+          </a:ln>
+        </p:spPr>
+        <p:style>
+          <a:lnRef idx="1">
+            <a:schemeClr val="accent1"/>
+          </a:lnRef>
+          <a:fillRef idx="3">
+            <a:schemeClr val="accent1"/>
+          </a:fillRef>
+          <a:effectRef idx="2">
+            <a:schemeClr val="accent1"/>
+          </a:effectRef>
+          <a:fontRef idx="minor">
+            <a:schemeClr val="lt1"/>
+          </a:fontRef>
+        </p:style>
+        <p:txBody>
+          <a:bodyPr rtlCol="0" anchor="ctr"/>
+          <a:lstStyle/>
+          <a:p>
+            <a:pPr algn="ctr"/>
+          </a:p>
+        </p:txBody>
+      </p:sp>
+      <p:sp>
+        <p:nvSpPr>
+          <p:cNvPr id="8" name="TextBox 7"/>
+          <p:cNvSpPr txBox="1"/>
+          <p:nvPr/>
+        </p:nvSpPr>
+        <p:spPr>
+          <a:xfrm>
+            <a:off x="2670048" y="1261872"/>
+            <a:ext cx="1792224" cy="768096"/>
+          </a:xfrm>
+          <a:prstGeom prst="rect">
+            <a:avLst/>
+          </a:prstGeom>
+          <a:noFill/>
+        </p:spPr>
+        <p:txBody>
+          <a:bodyPr wrap="square">
+            <a:spAutoFit/>
+          </a:bodyPr>
+          <a:lstStyle/>
+          <a:p>
+            <a:pPr>
+              <a:defRPr sz="1000">
+                <a:solidFill>
+                  <a:srgbClr val="666666"/>
+                </a:solidFill>
+              </a:defRPr>
+            </a:pPr>
+            <a:r>
+              <a:t>Avg % Viewed</a:t>
+            </a:r>
+          </a:p>
+          <a:p>
+            <a:pPr>
+              <a:defRPr sz="1600" b="1">
+                <a:solidFill>
+                  <a:srgbClr val="1A2B4A"/>
+                </a:solidFill>
+              </a:defRPr>
+            </a:pPr>
+            <a:r>
+              <a:t>[TBD]</a:t>
+            </a:r>
+          </a:p>
+        </p:txBody>
+      </p:sp>
+      <p:sp>
+        <p:nvSpPr>
+          <p:cNvPr id="9" name="Rectangle 8"/>
+          <p:cNvSpPr/>
+          <p:nvPr/>
+        </p:nvSpPr>
+        <p:spPr>
+          <a:xfrm>
+            <a:off x="4754880" y="1188720"/>
+            <a:ext cx="2011680" cy="914400"/>
+          </a:xfrm>
+          <a:prstGeom prst="rect">
+            <a:avLst/>
+          </a:prstGeom>
+          <a:solidFill>
+            <a:srgbClr val="F5F5F5"/>
+          </a:solidFill>
+          <a:ln>
+            <a:solidFill>
+              <a:srgbClr val="DDDDDD"/>
+            </a:solidFill>
+          </a:ln>
+        </p:spPr>
+        <p:style>
+          <a:lnRef idx="1">
+            <a:schemeClr val="accent1"/>
+          </a:lnRef>
+          <a:fillRef idx="3">
+            <a:schemeClr val="accent1"/>
+          </a:fillRef>
+          <a:effectRef idx="2">
+            <a:schemeClr val="accent1"/>
+          </a:effectRef>
+          <a:fontRef idx="minor">
+            <a:schemeClr val="lt1"/>
+          </a:fontRef>
+        </p:style>
+        <p:txBody>
+          <a:bodyPr rtlCol="0" anchor="ctr"/>
+          <a:lstStyle/>
+          <a:p>
+            <a:pPr algn="ctr"/>
+          </a:p>
+        </p:txBody>
+      </p:sp>
+      <p:sp>
+        <p:nvSpPr>
+          <p:cNvPr id="10" name="TextBox 9"/>
+          <p:cNvSpPr txBox="1"/>
+          <p:nvPr/>
+        </p:nvSpPr>
+        <p:spPr>
+          <a:xfrm>
+            <a:off x="4864608" y="1261872"/>
+            <a:ext cx="1792224" cy="768096"/>
+          </a:xfrm>
+          <a:prstGeom prst="rect">
+            <a:avLst/>
+          </a:prstGeom>
+          <a:noFill/>
+        </p:spPr>
+        <p:txBody>
+          <a:bodyPr wrap="square">
+            <a:spAutoFit/>
+          </a:bodyPr>
+          <a:lstStyle/>
+          <a:p>
+            <a:pPr>
+              <a:defRPr sz="1000">
+                <a:solidFill>
+                  <a:srgbClr val="666666"/>
+                </a:solidFill>
+              </a:defRPr>
+            </a:pPr>
+            <a:r>
+              <a:t>Avg View Duration</a:t>
+            </a:r>
+          </a:p>
+          <a:p>
+            <a:pPr>
+              <a:defRPr sz="1600" b="1">
+                <a:solidFill>
+                  <a:srgbClr val="1A2B4A"/>
+                </a:solidFill>
+              </a:defRPr>
+            </a:pPr>
+            <a:r>
+              <a:t>[TBD]</a:t>
+            </a:r>
+          </a:p>
+        </p:txBody>
+      </p:sp>
+      <p:sp>
+        <p:nvSpPr>
+          <p:cNvPr id="11" name="Rectangle 10"/>
+          <p:cNvSpPr/>
+          <p:nvPr/>
+        </p:nvSpPr>
+        <p:spPr>
+          <a:xfrm>
+            <a:off x="6949440" y="1188720"/>
+            <a:ext cx="1828800" cy="914400"/>
+          </a:xfrm>
+          <a:prstGeom prst="rect">
+            <a:avLst/>
+          </a:prstGeom>
+          <a:solidFill>
+            <a:srgbClr val="F5F5F5"/>
+          </a:solidFill>
+          <a:ln>
+            <a:solidFill>
+              <a:srgbClr val="DDDDDD"/>
+            </a:solidFill>
+          </a:ln>
+        </p:spPr>
+        <p:style>
+          <a:lnRef idx="1">
+            <a:schemeClr val="accent1"/>
+          </a:lnRef>
+          <a:fillRef idx="3">
+            <a:schemeClr val="accent1"/>
+          </a:fillRef>
+          <a:effectRef idx="2">
+            <a:schemeClr val="accent1"/>
+          </a:effectRef>
+          <a:fontRef idx="minor">
+            <a:schemeClr val="lt1"/>
+          </a:fontRef>
+        </p:style>
+        <p:txBody>
+          <a:bodyPr rtlCol="0" anchor="ctr"/>
+          <a:lstStyle/>
+          <a:p>
+            <a:pPr algn="ctr"/>
+          </a:p>
+        </p:txBody>
+      </p:sp>
+      <p:sp>
+        <p:nvSpPr>
+          <p:cNvPr id="12" name="TextBox 11"/>
+          <p:cNvSpPr txBox="1"/>
+          <p:nvPr/>
+        </p:nvSpPr>
+        <p:spPr>
+          <a:xfrm>
+            <a:off x="7059168" y="1261872"/>
+            <a:ext cx="1609344" cy="768096"/>
+          </a:xfrm>
+          <a:prstGeom prst="rect">
+            <a:avLst/>
+          </a:prstGeom>
+          <a:noFill/>
+        </p:spPr>
+        <p:txBody>
+          <a:bodyPr wrap="square">
+            <a:spAutoFit/>
+          </a:bodyPr>
+          <a:lstStyle/>
+          <a:p>
+            <a:pPr>
+              <a:defRPr sz="1000">
+                <a:solidFill>
+                  <a:srgbClr val="666666"/>
+                </a:solidFill>
+              </a:defRPr>
+            </a:pPr>
+            <a:r>
+              <a:t>Watch Time (hrs)</a:t>
+            </a:r>
+          </a:p>
+          <a:p>
+            <a:pPr>
+              <a:defRPr sz="1600" b="1">
+                <a:solidFill>
+                  <a:srgbClr val="1A2B4A"/>
+                </a:solidFill>
+              </a:defRPr>
+            </a:pPr>
+            <a:r>
+              <a:t>[TBD]</a:t>
+            </a:r>
+          </a:p>
+        </p:txBody>
+      </p:sp>
+      <p:sp>
+        <p:nvSpPr>
+          <p:cNvPr id="13" name="Rectangle 12"/>
+          <p:cNvSpPr/>
+          <p:nvPr/>
+        </p:nvSpPr>
+        <p:spPr>
+          <a:xfrm>
+            <a:off x="365760" y="2286000"/>
+            <a:ext cx="2560320" cy="914400"/>
+          </a:xfrm>
+          <a:prstGeom prst="rect">
+            <a:avLst/>
+          </a:prstGeom>
+          <a:solidFill>
+            <a:srgbClr val="F5F5F5"/>
+          </a:solidFill>
+          <a:ln>
+            <a:solidFill>
+              <a:srgbClr val="DDDDDD"/>
+            </a:solidFill>
+          </a:ln>
+        </p:spPr>
+        <p:style>
+          <a:lnRef idx="1">
+            <a:schemeClr val="accent1"/>
+          </a:lnRef>
+          <a:fillRef idx="3">
+            <a:schemeClr val="accent1"/>
+          </a:fillRef>
+          <a:effectRef idx="2">
+            <a:schemeClr val="accent1"/>
+          </a:effectRef>
+          <a:fontRef idx="minor">
+            <a:schemeClr val="lt1"/>
+          </a:fontRef>
+        </p:style>
+        <p:txBody>
+          <a:bodyPr rtlCol="0" anchor="ctr"/>
+          <a:lstStyle/>
+          <a:p>
+            <a:pPr algn="ctr"/>
+          </a:p>
+        </p:txBody>
+      </p:sp>
+      <p:sp>
+        <p:nvSpPr>
+          <p:cNvPr id="14" name="TextBox 13"/>
+          <p:cNvSpPr txBox="1"/>
+          <p:nvPr/>
+        </p:nvSpPr>
+        <p:spPr>
+          <a:xfrm>
+            <a:off x="475488" y="2359152"/>
+            <a:ext cx="2340864" cy="768096"/>
+          </a:xfrm>
+          <a:prstGeom prst="rect">
+            <a:avLst/>
+          </a:prstGeom>
+          <a:noFill/>
+        </p:spPr>
+        <p:txBody>
+          <a:bodyPr wrap="square">
+            <a:spAutoFit/>
+          </a:bodyPr>
+          <a:lstStyle/>
+          <a:p>
+            <a:pPr>
+              <a:defRPr sz="1000">
+                <a:solidFill>
+                  <a:srgbClr val="666666"/>
+                </a:solidFill>
+              </a:defRPr>
+            </a:pPr>
+            <a:r>
+              <a:t>≥25% Watched</a:t>
+            </a:r>
+          </a:p>
+          <a:p>
+            <a:pPr>
+              <a:defRPr sz="1600" b="1">
+                <a:solidFill>
+                  <a:srgbClr val="1A2B4A"/>
+                </a:solidFill>
+              </a:defRPr>
+            </a:pPr>
+            <a:r>
+              <a:t>[TBD]</a:t>
+            </a:r>
+          </a:p>
+        </p:txBody>
+      </p:sp>
+      <p:sp>
+        <p:nvSpPr>
+          <p:cNvPr id="15" name="Rectangle 14"/>
+          <p:cNvSpPr/>
+          <p:nvPr/>
+        </p:nvSpPr>
+        <p:spPr>
+          <a:xfrm>
+            <a:off x="3108960" y="2286000"/>
+            <a:ext cx="2560320" cy="914400"/>
+          </a:xfrm>
+          <a:prstGeom prst="rect">
+            <a:avLst/>
+          </a:prstGeom>
+          <a:solidFill>
+            <a:srgbClr val="F5F5F5"/>
+          </a:solidFill>
+          <a:ln>
+            <a:solidFill>
+              <a:srgbClr val="DDDDDD"/>
+            </a:solidFill>
+          </a:ln>
+        </p:spPr>
+        <p:style>
+          <a:lnRef idx="1">
+            <a:schemeClr val="accent1"/>
+          </a:lnRef>
+          <a:fillRef idx="3">
+            <a:schemeClr val="accent1"/>
+          </a:fillRef>
+          <a:effectRef idx="2">
+            <a:schemeClr val="accent1"/>
+          </a:effectRef>
+          <a:fontRef idx="minor">
+            <a:schemeClr val="lt1"/>
+          </a:fontRef>
+        </p:style>
+        <p:txBody>
+          <a:bodyPr rtlCol="0" anchor="ctr"/>
+          <a:lstStyle/>
+          <a:p>
+            <a:pPr algn="ctr"/>
+          </a:p>
+        </p:txBody>
+      </p:sp>
+      <p:sp>
+        <p:nvSpPr>
+          <p:cNvPr id="16" name="TextBox 15"/>
+          <p:cNvSpPr txBox="1"/>
+          <p:nvPr/>
+        </p:nvSpPr>
+        <p:spPr>
+          <a:xfrm>
+            <a:off x="3218688" y="2359152"/>
+            <a:ext cx="2340864" cy="768096"/>
+          </a:xfrm>
+          <a:prstGeom prst="rect">
+            <a:avLst/>
+          </a:prstGeom>
+          <a:noFill/>
+        </p:spPr>
+        <p:txBody>
+          <a:bodyPr wrap="square">
+            <a:spAutoFit/>
+          </a:bodyPr>
+          <a:lstStyle/>
+          <a:p>
+            <a:pPr>
+              <a:defRPr sz="1000">
+                <a:solidFill>
+                  <a:srgbClr val="666666"/>
+                </a:solidFill>
+              </a:defRPr>
+            </a:pPr>
+            <a:r>
+              <a:t>≥50% Watched</a:t>
+            </a:r>
+          </a:p>
+          <a:p>
+            <a:pPr>
+              <a:defRPr sz="1600" b="1">
+                <a:solidFill>
+                  <a:srgbClr val="1A2B4A"/>
+                </a:solidFill>
+              </a:defRPr>
+            </a:pPr>
+            <a:r>
+              <a:t>[TBD]</a:t>
+            </a:r>
+          </a:p>
+        </p:txBody>
+      </p:sp>
+      <p:sp>
+        <p:nvSpPr>
+          <p:cNvPr id="17" name="Rectangle 16"/>
+          <p:cNvSpPr/>
+          <p:nvPr/>
+        </p:nvSpPr>
+        <p:spPr>
+          <a:xfrm>
+            <a:off x="5852160" y="2286000"/>
+            <a:ext cx="2560320" cy="914400"/>
+          </a:xfrm>
+          <a:prstGeom prst="rect">
+            <a:avLst/>
+          </a:prstGeom>
+          <a:solidFill>
+            <a:srgbClr val="F5F5F5"/>
+          </a:solidFill>
+          <a:ln>
+            <a:solidFill>
+              <a:srgbClr val="DDDDDD"/>
+            </a:solidFill>
+          </a:ln>
+        </p:spPr>
+        <p:style>
+          <a:lnRef idx="1">
+            <a:schemeClr val="accent1"/>
+          </a:lnRef>
+          <a:fillRef idx="3">
+            <a:schemeClr val="accent1"/>
+          </a:fillRef>
+          <a:effectRef idx="2">
+            <a:schemeClr val="accent1"/>
+          </a:effectRef>
+          <a:fontRef idx="minor">
+            <a:schemeClr val="lt1"/>
+          </a:fontRef>
+        </p:style>
+        <p:txBody>
+          <a:bodyPr rtlCol="0" anchor="ctr"/>
+          <a:lstStyle/>
+          <a:p>
+            <a:pPr algn="ctr"/>
+          </a:p>
+        </p:txBody>
+      </p:sp>
+      <p:sp>
+        <p:nvSpPr>
+          <p:cNvPr id="18" name="TextBox 17"/>
+          <p:cNvSpPr txBox="1"/>
+          <p:nvPr/>
+        </p:nvSpPr>
+        <p:spPr>
+          <a:xfrm>
+            <a:off x="5961888" y="2359152"/>
+            <a:ext cx="2340864" cy="768096"/>
+          </a:xfrm>
+          <a:prstGeom prst="rect">
+            <a:avLst/>
+          </a:prstGeom>
+          <a:noFill/>
+        </p:spPr>
+        <p:txBody>
+          <a:bodyPr wrap="square">
+            <a:spAutoFit/>
+          </a:bodyPr>
+          <a:lstStyle/>
+          <a:p>
+            <a:pPr>
+              <a:defRPr sz="1000">
+                <a:solidFill>
+                  <a:srgbClr val="666666"/>
+                </a:solidFill>
+              </a:defRPr>
+            </a:pPr>
+            <a:r>
+              <a:t>≥90% Watched</a:t>
+            </a:r>
+          </a:p>
+          <a:p>
+            <a:pPr>
+              <a:defRPr sz="1600" b="1">
+                <a:solidFill>
+                  <a:srgbClr val="1A2B4A"/>
+                </a:solidFill>
+              </a:defRPr>
+            </a:pPr>
+            <a:r>
+              <a:t>[TBD]</a:t>
             </a:r>
           </a:p>
         </p:txBody>
       </p:sp>
       <p:graphicFrame>
         <p:nvGraphicFramePr>
-          <p:cNvPr id="5" name="Table 4"/>
+          <p:cNvPr id="19" name="Table 18"/>
           <p:cNvGraphicFramePr>
             <a:graphicFrameLocks noGrp="1"/>
           </p:cNvGraphicFramePr>
           <p:nvPr/>
         </p:nvGraphicFramePr>
         <p:xfrm>
-          <a:off x="365760" y="1371600"/>
-          <a:ext cx="8046720" cy="960119"/>
+          <a:off x="365760" y="3474720"/>
+          <a:ext cx="4572000" cy="1170432"/>
         </p:xfrm>
         <a:graphic>
           <a:graphicData uri="http://schemas.openxmlformats.org/drawingml/2006/table">
@@ -5939,28 +6354,24 @@
                 <a:tableStyleId>{5C22544A-7EE6-4342-B048-85BDC9FD1C3A}</a:tableStyleId>
               </a:tblPr>
               <a:tblGrid>
-                <a:gridCol w="2286000"/>
-                <a:gridCol w="1097280"/>
-                <a:gridCol w="1097280"/>
+                <a:gridCol w="3200400"/>
                 <a:gridCol w="1371600"/>
-                <a:gridCol w="1097280"/>
-                <a:gridCol w="1097280"/>
               </a:tblGrid>
-              <a:tr h="320039">
+              <a:tr h="292608">
                 <a:tc>
                   <a:txBody>
                     <a:bodyPr/>
                     <a:lstStyle/>
                     <a:p>
                       <a:pPr>
-                        <a:defRPr sz="1000" b="1">
+                        <a:defRPr sz="900" b="1">
                           <a:solidFill>
                             <a:srgbClr val="FFFFFF"/>
                           </a:solidFill>
                         </a:defRPr>
                       </a:pPr>
                       <a:r>
-                        <a:t>Account</a:t>
+                        <a:t>Retention Threshold</a:t>
                       </a:r>
                     </a:p>
                   </a:txBody>
@@ -5976,106 +6387,14 @@
                     <a:lstStyle/>
                     <a:p>
                       <a:pPr>
-                        <a:defRPr sz="1000" b="1">
+                        <a:defRPr sz="900" b="1">
                           <a:solidFill>
                             <a:srgbClr val="FFFFFF"/>
                           </a:solidFill>
                         </a:defRPr>
                       </a:pPr>
                       <a:r>
-                        <a:t>Reactions</a:t>
-                      </a:r>
-                    </a:p>
-                  </a:txBody>
-                  <a:tcPr>
-                    <a:solidFill>
-                      <a:srgbClr val="1A2B4A"/>
-                    </a:solidFill>
-                  </a:tcPr>
-                </a:tc>
-                <a:tc>
-                  <a:txBody>
-                    <a:bodyPr/>
-                    <a:lstStyle/>
-                    <a:p>
-                      <a:pPr>
-                        <a:defRPr sz="1000" b="1">
-                          <a:solidFill>
-                            <a:srgbClr val="FFFFFF"/>
-                          </a:solidFill>
-                        </a:defRPr>
-                      </a:pPr>
-                      <a:r>
-                        <a:t>Comments</a:t>
-                      </a:r>
-                    </a:p>
-                  </a:txBody>
-                  <a:tcPr>
-                    <a:solidFill>
-                      <a:srgbClr val="1A2B4A"/>
-                    </a:solidFill>
-                  </a:tcPr>
-                </a:tc>
-                <a:tc>
-                  <a:txBody>
-                    <a:bodyPr/>
-                    <a:lstStyle/>
-                    <a:p>
-                      <a:pPr>
-                        <a:defRPr sz="1000" b="1">
-                          <a:solidFill>
-                            <a:srgbClr val="FFFFFF"/>
-                          </a:solidFill>
-                        </a:defRPr>
-                      </a:pPr>
-                      <a:r>
-                        <a:t>Impressions</a:t>
-                      </a:r>
-                    </a:p>
-                  </a:txBody>
-                  <a:tcPr>
-                    <a:solidFill>
-                      <a:srgbClr val="1A2B4A"/>
-                    </a:solidFill>
-                  </a:tcPr>
-                </a:tc>
-                <a:tc>
-                  <a:txBody>
-                    <a:bodyPr/>
-                    <a:lstStyle/>
-                    <a:p>
-                      <a:pPr>
-                        <a:defRPr sz="1000" b="1">
-                          <a:solidFill>
-                            <a:srgbClr val="FFFFFF"/>
-                          </a:solidFill>
-                        </a:defRPr>
-                      </a:pPr>
-                      <a:r>
-                        <a:t>Clicks</a:t>
-                      </a:r>
-                    </a:p>
-                  </a:txBody>
-                  <a:tcPr>
-                    <a:solidFill>
-                      <a:srgbClr val="1A2B4A"/>
-                    </a:solidFill>
-                  </a:tcPr>
-                </a:tc>
-                <a:tc>
-                  <a:txBody>
-                    <a:bodyPr/>
-                    <a:lstStyle/>
-                    <a:p>
-                      <a:pPr>
-                        <a:defRPr sz="1000" b="1">
-                          <a:solidFill>
-                            <a:srgbClr val="FFFFFF"/>
-                          </a:solidFill>
-                        </a:defRPr>
-                      </a:pPr>
-                      <a:r>
-                        <a:t>Reposts</a:t>
+                        <a:t>Value</a:t>
                       </a:r>
                     </a:p>
                   </a:txBody>
@@ -6086,21 +6405,21 @@
                   </a:tcPr>
                 </a:tc>
               </a:tr>
-              <a:tr h="320039">
+              <a:tr h="292608">
                 <a:tc>
                   <a:txBody>
                     <a:bodyPr/>
                     <a:lstStyle/>
                     <a:p>
                       <a:pPr>
-                        <a:defRPr sz="1000">
+                        <a:defRPr sz="900">
                           <a:solidFill>
                             <a:srgbClr val="333333"/>
                           </a:solidFill>
                         </a:defRPr>
                       </a:pPr>
                       <a:r>
-                        <a:t>Crownsmen Partners</a:t>
+                        <a:t>25% or more of video</a:t>
                       </a:r>
                     </a:p>
                   </a:txBody>
@@ -6112,83 +6431,7 @@
                     <a:lstStyle/>
                     <a:p>
                       <a:pPr>
-                        <a:defRPr sz="1000">
-                          <a:solidFill>
-                            <a:srgbClr val="333333"/>
-                          </a:solidFill>
-                        </a:defRPr>
-                      </a:pPr>
-                      <a:r>
-                        <a:t>7</a:t>
-                      </a:r>
-                    </a:p>
-                  </a:txBody>
-                  <a:tcPr/>
-                </a:tc>
-                <a:tc>
-                  <a:txBody>
-                    <a:bodyPr/>
-                    <a:lstStyle/>
-                    <a:p>
-                      <a:pPr>
-                        <a:defRPr sz="1000">
-                          <a:solidFill>
-                            <a:srgbClr val="333333"/>
-                          </a:solidFill>
-                        </a:defRPr>
-                      </a:pPr>
-                      <a:r>
-                        <a:t>1</a:t>
-                      </a:r>
-                    </a:p>
-                  </a:txBody>
-                  <a:tcPr/>
-                </a:tc>
-                <a:tc>
-                  <a:txBody>
-                    <a:bodyPr/>
-                    <a:lstStyle/>
-                    <a:p>
-                      <a:pPr>
-                        <a:defRPr sz="1000">
-                          <a:solidFill>
-                            <a:srgbClr val="333333"/>
-                          </a:solidFill>
-                        </a:defRPr>
-                      </a:pPr>
-                      <a:r>
-                        <a:t>[TBD]</a:t>
-                      </a:r>
-                    </a:p>
-                  </a:txBody>
-                  <a:tcPr/>
-                </a:tc>
-                <a:tc>
-                  <a:txBody>
-                    <a:bodyPr/>
-                    <a:lstStyle/>
-                    <a:p>
-                      <a:pPr>
-                        <a:defRPr sz="1000">
-                          <a:solidFill>
-                            <a:srgbClr val="333333"/>
-                          </a:solidFill>
-                        </a:defRPr>
-                      </a:pPr>
-                      <a:r>
-                        <a:t>[TBD]</a:t>
-                      </a:r>
-                    </a:p>
-                  </a:txBody>
-                  <a:tcPr/>
-                </a:tc>
-                <a:tc>
-                  <a:txBody>
-                    <a:bodyPr/>
-                    <a:lstStyle/>
-                    <a:p>
-                      <a:pPr>
-                        <a:defRPr sz="1000">
+                        <a:defRPr sz="900">
                           <a:solidFill>
                             <a:srgbClr val="333333"/>
                           </a:solidFill>
@@ -6202,21 +6445,21 @@
                   <a:tcPr/>
                 </a:tc>
               </a:tr>
-              <a:tr h="320041">
+              <a:tr h="292608">
                 <a:tc>
                   <a:txBody>
                     <a:bodyPr/>
                     <a:lstStyle/>
                     <a:p>
                       <a:pPr>
-                        <a:defRPr sz="1000">
+                        <a:defRPr sz="900">
                           <a:solidFill>
                             <a:srgbClr val="333333"/>
                           </a:solidFill>
                         </a:defRPr>
                       </a:pPr>
                       <a:r>
-                        <a:t>The Construction Show</a:t>
+                        <a:t>50% or more of video</a:t>
                       </a:r>
                     </a:p>
                   </a:txBody>
@@ -6232,99 +6475,7 @@
                     <a:lstStyle/>
                     <a:p>
                       <a:pPr>
-                        <a:defRPr sz="1000">
-                          <a:solidFill>
-                            <a:srgbClr val="333333"/>
-                          </a:solidFill>
-                        </a:defRPr>
-                      </a:pPr>
-                      <a:r>
-                        <a:t>19</a:t>
-                      </a:r>
-                    </a:p>
-                  </a:txBody>
-                  <a:tcPr>
-                    <a:solidFill>
-                      <a:srgbClr val="F5F5F5"/>
-                    </a:solidFill>
-                  </a:tcPr>
-                </a:tc>
-                <a:tc>
-                  <a:txBody>
-                    <a:bodyPr/>
-                    <a:lstStyle/>
-                    <a:p>
-                      <a:pPr>
-                        <a:defRPr sz="1000">
-                          <a:solidFill>
-                            <a:srgbClr val="333333"/>
-                          </a:solidFill>
-                        </a:defRPr>
-                      </a:pPr>
-                      <a:r>
-                        <a:t>0</a:t>
-                      </a:r>
-                    </a:p>
-                  </a:txBody>
-                  <a:tcPr>
-                    <a:solidFill>
-                      <a:srgbClr val="F5F5F5"/>
-                    </a:solidFill>
-                  </a:tcPr>
-                </a:tc>
-                <a:tc>
-                  <a:txBody>
-                    <a:bodyPr/>
-                    <a:lstStyle/>
-                    <a:p>
-                      <a:pPr>
-                        <a:defRPr sz="1000">
-                          <a:solidFill>
-                            <a:srgbClr val="333333"/>
-                          </a:solidFill>
-                        </a:defRPr>
-                      </a:pPr>
-                      <a:r>
-                        <a:t>[TBD]</a:t>
-                      </a:r>
-                    </a:p>
-                  </a:txBody>
-                  <a:tcPr>
-                    <a:solidFill>
-                      <a:srgbClr val="F5F5F5"/>
-                    </a:solidFill>
-                  </a:tcPr>
-                </a:tc>
-                <a:tc>
-                  <a:txBody>
-                    <a:bodyPr/>
-                    <a:lstStyle/>
-                    <a:p>
-                      <a:pPr>
-                        <a:defRPr sz="1000">
-                          <a:solidFill>
-                            <a:srgbClr val="333333"/>
-                          </a:solidFill>
-                        </a:defRPr>
-                      </a:pPr>
-                      <a:r>
-                        <a:t>[TBD]</a:t>
-                      </a:r>
-                    </a:p>
-                  </a:txBody>
-                  <a:tcPr>
-                    <a:solidFill>
-                      <a:srgbClr val="F5F5F5"/>
-                    </a:solidFill>
-                  </a:tcPr>
-                </a:tc>
-                <a:tc>
-                  <a:txBody>
-                    <a:bodyPr/>
-                    <a:lstStyle/>
-                    <a:p>
-                      <a:pPr>
-                        <a:defRPr sz="1000">
+                        <a:defRPr sz="900">
                           <a:solidFill>
                             <a:srgbClr val="333333"/>
                           </a:solidFill>
@@ -6342,72 +6493,53 @@
                   </a:tcPr>
                 </a:tc>
               </a:tr>
+              <a:tr h="292608">
+                <a:tc>
+                  <a:txBody>
+                    <a:bodyPr/>
+                    <a:lstStyle/>
+                    <a:p>
+                      <a:pPr>
+                        <a:defRPr sz="900">
+                          <a:solidFill>
+                            <a:srgbClr val="333333"/>
+                          </a:solidFill>
+                        </a:defRPr>
+                      </a:pPr>
+                      <a:r>
+                        <a:t>90% or more of video</a:t>
+                      </a:r>
+                    </a:p>
+                  </a:txBody>
+                  <a:tcPr/>
+                </a:tc>
+                <a:tc>
+                  <a:txBody>
+                    <a:bodyPr/>
+                    <a:lstStyle/>
+                    <a:p>
+                      <a:pPr>
+                        <a:defRPr sz="900">
+                          <a:solidFill>
+                            <a:srgbClr val="333333"/>
+                          </a:solidFill>
+                        </a:defRPr>
+                      </a:pPr>
+                      <a:r>
+                        <a:t>[TBD]</a:t>
+                      </a:r>
+                    </a:p>
+                  </a:txBody>
+                  <a:tcPr/>
+                </a:tc>
+              </a:tr>
             </a:tbl>
           </a:graphicData>
         </a:graphic>
       </p:graphicFrame>
       <p:sp>
         <p:nvSpPr>
-          <p:cNvPr id="6" name="TextBox 5"/>
-          <p:cNvSpPr txBox="1"/>
-          <p:nvPr/>
-        </p:nvSpPr>
-        <p:spPr>
-          <a:xfrm>
-            <a:off x="457200" y="3657600"/>
-            <a:ext cx="8229600" cy="2286000"/>
-          </a:xfrm>
-          <a:prstGeom prst="rect">
-            <a:avLst/>
-          </a:prstGeom>
-          <a:noFill/>
-        </p:spPr>
-        <p:txBody>
-          <a:bodyPr wrap="none">
-            <a:spAutoFit/>
-          </a:bodyPr>
-          <a:lstStyle/>
-          <a:p>
-            <a:pPr>
-              <a:defRPr sz="1400" b="1">
-                <a:solidFill>
-                  <a:srgbClr val="1A2B4A"/>
-                </a:solidFill>
-              </a:defRPr>
-            </a:pPr>
-            <a:r>
-              <a:t>Post Details</a:t>
-            </a:r>
-          </a:p>
-          <a:p>
-            <a:pPr>
-              <a:defRPr sz="1000">
-                <a:solidFill>
-                  <a:srgbClr val="2E6BA4"/>
-                </a:solidFill>
-              </a:defRPr>
-            </a:pPr>
-            <a:r>
-              <a:t>• Crownsmen Partners: https://www.linkedin.com/posts/crownsmen-partners_construction-financing-videoproduction-activity-7465509214887620608-0KPJ</a:t>
-            </a:r>
-          </a:p>
-          <a:p>
-            <a:pPr>
-              <a:defRPr sz="1000">
-                <a:solidFill>
-                  <a:srgbClr val="2E6BA4"/>
-                </a:solidFill>
-              </a:defRPr>
-            </a:pPr>
-            <a:r>
-              <a:t>• The Construction Show: https://www.linkedin.com/posts/the-construction-show_construction-financing-videoproduction-activity-7465509590617567233-kFXM</a:t>
-            </a:r>
-          </a:p>
-        </p:txBody>
-      </p:sp>
-      <p:sp>
-        <p:nvSpPr>
-          <p:cNvPr id="7" name="TextBox 6"/>
+          <p:cNvPr id="20" name="TextBox 19"/>
           <p:cNvSpPr txBox="1"/>
           <p:nvPr/>
         </p:nvSpPr>
@@ -6539,7 +6671,7 @@
               </a:defRPr>
             </a:pPr>
             <a:r>
-              <a:t>Social Media — Other Platforms</a:t>
+              <a:t>YouTube Geography</a:t>
             </a:r>
           </a:p>
         </p:txBody>
@@ -6574,7 +6706,7 @@
               </a:defRPr>
             </a:pPr>
             <a:r>
-              <a:t>Facebook | Instagram | Threads | X</a:t>
+              <a:t>Views by Country</a:t>
             </a:r>
           </a:p>
         </p:txBody>
@@ -6588,8 +6720,8 @@
           <p:nvPr/>
         </p:nvGraphicFramePr>
         <p:xfrm>
-          <a:off x="365760" y="1371600"/>
-          <a:ext cx="8138160" cy="1600200"/>
+          <a:off x="365760" y="1188720"/>
+          <a:ext cx="7315200" cy="822959"/>
         </p:xfrm>
         <a:graphic>
           <a:graphicData uri="http://schemas.openxmlformats.org/drawingml/2006/table">
@@ -6598,28 +6730,26 @@
                 <a:tableStyleId>{5C22544A-7EE6-4342-B048-85BDC9FD1C3A}</a:tableStyleId>
               </a:tblPr>
               <a:tblGrid>
-                <a:gridCol w="1371600"/>
                 <a:gridCol w="1828800"/>
                 <a:gridCol w="1371600"/>
-                <a:gridCol w="1097280"/>
-                <a:gridCol w="1097280"/>
-                <a:gridCol w="1371600"/>
+                <a:gridCol w="2286000"/>
+                <a:gridCol w="1828800"/>
               </a:tblGrid>
-              <a:tr h="320040">
+              <a:tr h="274319">
                 <a:tc>
                   <a:txBody>
                     <a:bodyPr/>
                     <a:lstStyle/>
                     <a:p>
                       <a:pPr>
-                        <a:defRPr sz="1000" b="1">
+                        <a:defRPr sz="900" b="1">
                           <a:solidFill>
                             <a:srgbClr val="FFFFFF"/>
                           </a:solidFill>
                         </a:defRPr>
                       </a:pPr>
                       <a:r>
-                        <a:t>Platform</a:t>
+                        <a:t>Country</a:t>
                       </a:r>
                     </a:p>
                   </a:txBody>
@@ -6635,14 +6765,14 @@
                     <a:lstStyle/>
                     <a:p>
                       <a:pPr>
-                        <a:defRPr sz="1000" b="1">
+                        <a:defRPr sz="900" b="1">
                           <a:solidFill>
                             <a:srgbClr val="FFFFFF"/>
                           </a:solidFill>
                         </a:defRPr>
                       </a:pPr>
                       <a:r>
-                        <a:t>Account</a:t>
+                        <a:t>Views</a:t>
                       </a:r>
                     </a:p>
                   </a:txBody>
@@ -6658,14 +6788,14 @@
                     <a:lstStyle/>
                     <a:p>
                       <a:pPr>
-                        <a:defRPr sz="1000" b="1">
+                        <a:defRPr sz="900" b="1">
                           <a:solidFill>
                             <a:srgbClr val="FFFFFF"/>
                           </a:solidFill>
                         </a:defRPr>
                       </a:pPr>
                       <a:r>
-                        <a:t>Likes/Reactions</a:t>
+                        <a:t>Avg View Duration</a:t>
                       </a:r>
                     </a:p>
                   </a:txBody>
@@ -6681,60 +6811,14 @@
                     <a:lstStyle/>
                     <a:p>
                       <a:pPr>
-                        <a:defRPr sz="1000" b="1">
+                        <a:defRPr sz="900" b="1">
                           <a:solidFill>
                             <a:srgbClr val="FFFFFF"/>
                           </a:solidFill>
                         </a:defRPr>
                       </a:pPr>
                       <a:r>
-                        <a:t>Comments</a:t>
-                      </a:r>
-                    </a:p>
-                  </a:txBody>
-                  <a:tcPr>
-                    <a:solidFill>
-                      <a:srgbClr val="1A2B4A"/>
-                    </a:solidFill>
-                  </a:tcPr>
-                </a:tc>
-                <a:tc>
-                  <a:txBody>
-                    <a:bodyPr/>
-                    <a:lstStyle/>
-                    <a:p>
-                      <a:pPr>
-                        <a:defRPr sz="1000" b="1">
-                          <a:solidFill>
-                            <a:srgbClr val="FFFFFF"/>
-                          </a:solidFill>
-                        </a:defRPr>
-                      </a:pPr>
-                      <a:r>
-                        <a:t>Shares</a:t>
-                      </a:r>
-                    </a:p>
-                  </a:txBody>
-                  <a:tcPr>
-                    <a:solidFill>
-                      <a:srgbClr val="1A2B4A"/>
-                    </a:solidFill>
-                  </a:tcPr>
-                </a:tc>
-                <a:tc>
-                  <a:txBody>
-                    <a:bodyPr/>
-                    <a:lstStyle/>
-                    <a:p>
-                      <a:pPr>
-                        <a:defRPr sz="1000" b="1">
-                          <a:solidFill>
-                            <a:srgbClr val="FFFFFF"/>
-                          </a:solidFill>
-                        </a:defRPr>
-                      </a:pPr>
-                      <a:r>
-                        <a:t>Views/Reach</a:t>
+                        <a:t>Watch Time (hrs)</a:t>
                       </a:r>
                     </a:p>
                   </a:txBody>
@@ -6745,52 +6829,14 @@
                   </a:tcPr>
                 </a:tc>
               </a:tr>
-              <a:tr h="320040">
+              <a:tr h="274319">
                 <a:tc>
                   <a:txBody>
                     <a:bodyPr/>
                     <a:lstStyle/>
                     <a:p>
                       <a:pPr>
-                        <a:defRPr sz="1000">
-                          <a:solidFill>
-                            <a:srgbClr val="333333"/>
-                          </a:solidFill>
-                        </a:defRPr>
-                      </a:pPr>
-                      <a:r>
-                        <a:t>Facebook</a:t>
-                      </a:r>
-                    </a:p>
-                  </a:txBody>
-                  <a:tcPr/>
-                </a:tc>
-                <a:tc>
-                  <a:txBody>
-                    <a:bodyPr/>
-                    <a:lstStyle/>
-                    <a:p>
-                      <a:pPr>
-                        <a:defRPr sz="1000">
-                          <a:solidFill>
-                            <a:srgbClr val="333333"/>
-                          </a:solidFill>
-                        </a:defRPr>
-                      </a:pPr>
-                      <a:r>
-                        <a:t>Crownsmen Partners</a:t>
-                      </a:r>
-                    </a:p>
-                  </a:txBody>
-                  <a:tcPr/>
-                </a:tc>
-                <a:tc>
-                  <a:txBody>
-                    <a:bodyPr/>
-                    <a:lstStyle/>
-                    <a:p>
-                      <a:pPr>
-                        <a:defRPr sz="1000">
+                        <a:defRPr sz="900">
                           <a:solidFill>
                             <a:srgbClr val="333333"/>
                           </a:solidFill>
@@ -6809,7 +6855,7 @@
                     <a:lstStyle/>
                     <a:p>
                       <a:pPr>
-                        <a:defRPr sz="1000">
+                        <a:defRPr sz="900">
                           <a:solidFill>
                             <a:srgbClr val="333333"/>
                           </a:solidFill>
@@ -6828,7 +6874,7 @@
                     <a:lstStyle/>
                     <a:p>
                       <a:pPr>
-                        <a:defRPr sz="1000">
+                        <a:defRPr sz="900">
                           <a:solidFill>
                             <a:srgbClr val="333333"/>
                           </a:solidFill>
@@ -6847,7 +6893,7 @@
                     <a:lstStyle/>
                     <a:p>
                       <a:pPr>
-                        <a:defRPr sz="1000">
+                        <a:defRPr sz="900">
                           <a:solidFill>
                             <a:srgbClr val="333333"/>
                           </a:solidFill>
@@ -6861,21 +6907,21 @@
                   <a:tcPr/>
                 </a:tc>
               </a:tr>
-              <a:tr h="320040">
+              <a:tr h="274321">
                 <a:tc>
                   <a:txBody>
                     <a:bodyPr/>
                     <a:lstStyle/>
                     <a:p>
                       <a:pPr>
-                        <a:defRPr sz="1000">
+                        <a:defRPr sz="900">
                           <a:solidFill>
                             <a:srgbClr val="333333"/>
                           </a:solidFill>
                         </a:defRPr>
                       </a:pPr>
                       <a:r>
-                        <a:t>Instagram</a:t>
+                        <a:t>TOTAL</a:t>
                       </a:r>
                     </a:p>
                   </a:txBody>
@@ -6891,30 +6937,7 @@
                     <a:lstStyle/>
                     <a:p>
                       <a:pPr>
-                        <a:defRPr sz="1000">
-                          <a:solidFill>
-                            <a:srgbClr val="333333"/>
-                          </a:solidFill>
-                        </a:defRPr>
-                      </a:pPr>
-                      <a:r>
-                        <a:t>@crownsmenp</a:t>
-                      </a:r>
-                    </a:p>
-                  </a:txBody>
-                  <a:tcPr>
-                    <a:solidFill>
-                      <a:srgbClr val="F5F5F5"/>
-                    </a:solidFill>
-                  </a:tcPr>
-                </a:tc>
-                <a:tc>
-                  <a:txBody>
-                    <a:bodyPr/>
-                    <a:lstStyle/>
-                    <a:p>
-                      <a:pPr>
-                        <a:defRPr sz="1000">
+                        <a:defRPr sz="900">
                           <a:solidFill>
                             <a:srgbClr val="333333"/>
                           </a:solidFill>
@@ -6937,7 +6960,7 @@
                     <a:lstStyle/>
                     <a:p>
                       <a:pPr>
-                        <a:defRPr sz="1000">
+                        <a:defRPr sz="900">
                           <a:solidFill>
                             <a:srgbClr val="333333"/>
                           </a:solidFill>
@@ -6960,286 +6983,7 @@
                     <a:lstStyle/>
                     <a:p>
                       <a:pPr>
-                        <a:defRPr sz="1000">
-                          <a:solidFill>
-                            <a:srgbClr val="333333"/>
-                          </a:solidFill>
-                        </a:defRPr>
-                      </a:pPr>
-                      <a:r>
-                        <a:t>[TBD]</a:t>
-                      </a:r>
-                    </a:p>
-                  </a:txBody>
-                  <a:tcPr>
-                    <a:solidFill>
-                      <a:srgbClr val="F5F5F5"/>
-                    </a:solidFill>
-                  </a:tcPr>
-                </a:tc>
-                <a:tc>
-                  <a:txBody>
-                    <a:bodyPr/>
-                    <a:lstStyle/>
-                    <a:p>
-                      <a:pPr>
-                        <a:defRPr sz="1000">
-                          <a:solidFill>
-                            <a:srgbClr val="333333"/>
-                          </a:solidFill>
-                        </a:defRPr>
-                      </a:pPr>
-                      <a:r>
-                        <a:t>[TBD]</a:t>
-                      </a:r>
-                    </a:p>
-                  </a:txBody>
-                  <a:tcPr>
-                    <a:solidFill>
-                      <a:srgbClr val="F5F5F5"/>
-                    </a:solidFill>
-                  </a:tcPr>
-                </a:tc>
-              </a:tr>
-              <a:tr h="320040">
-                <a:tc>
-                  <a:txBody>
-                    <a:bodyPr/>
-                    <a:lstStyle/>
-                    <a:p>
-                      <a:pPr>
-                        <a:defRPr sz="1000">
-                          <a:solidFill>
-                            <a:srgbClr val="333333"/>
-                          </a:solidFill>
-                        </a:defRPr>
-                      </a:pPr>
-                      <a:r>
-                        <a:t>Threads</a:t>
-                      </a:r>
-                    </a:p>
-                  </a:txBody>
-                  <a:tcPr/>
-                </a:tc>
-                <a:tc>
-                  <a:txBody>
-                    <a:bodyPr/>
-                    <a:lstStyle/>
-                    <a:p>
-                      <a:pPr>
-                        <a:defRPr sz="1000">
-                          <a:solidFill>
-                            <a:srgbClr val="333333"/>
-                          </a:solidFill>
-                        </a:defRPr>
-                      </a:pPr>
-                      <a:r>
-                        <a:t>@crownsmenp</a:t>
-                      </a:r>
-                    </a:p>
-                  </a:txBody>
-                  <a:tcPr/>
-                </a:tc>
-                <a:tc>
-                  <a:txBody>
-                    <a:bodyPr/>
-                    <a:lstStyle/>
-                    <a:p>
-                      <a:pPr>
-                        <a:defRPr sz="1000">
-                          <a:solidFill>
-                            <a:srgbClr val="333333"/>
-                          </a:solidFill>
-                        </a:defRPr>
-                      </a:pPr>
-                      <a:r>
-                        <a:t>[TBD]</a:t>
-                      </a:r>
-                    </a:p>
-                  </a:txBody>
-                  <a:tcPr/>
-                </a:tc>
-                <a:tc>
-                  <a:txBody>
-                    <a:bodyPr/>
-                    <a:lstStyle/>
-                    <a:p>
-                      <a:pPr>
-                        <a:defRPr sz="1000">
-                          <a:solidFill>
-                            <a:srgbClr val="333333"/>
-                          </a:solidFill>
-                        </a:defRPr>
-                      </a:pPr>
-                      <a:r>
-                        <a:t>[TBD]</a:t>
-                      </a:r>
-                    </a:p>
-                  </a:txBody>
-                  <a:tcPr/>
-                </a:tc>
-                <a:tc>
-                  <a:txBody>
-                    <a:bodyPr/>
-                    <a:lstStyle/>
-                    <a:p>
-                      <a:pPr>
-                        <a:defRPr sz="1000">
-                          <a:solidFill>
-                            <a:srgbClr val="333333"/>
-                          </a:solidFill>
-                        </a:defRPr>
-                      </a:pPr>
-                      <a:r>
-                        <a:t>[TBD]</a:t>
-                      </a:r>
-                    </a:p>
-                  </a:txBody>
-                  <a:tcPr/>
-                </a:tc>
-                <a:tc>
-                  <a:txBody>
-                    <a:bodyPr/>
-                    <a:lstStyle/>
-                    <a:p>
-                      <a:pPr>
-                        <a:defRPr sz="1000">
-                          <a:solidFill>
-                            <a:srgbClr val="333333"/>
-                          </a:solidFill>
-                        </a:defRPr>
-                      </a:pPr>
-                      <a:r>
-                        <a:t>[TBD]</a:t>
-                      </a:r>
-                    </a:p>
-                  </a:txBody>
-                  <a:tcPr/>
-                </a:tc>
-              </a:tr>
-              <a:tr h="320040">
-                <a:tc>
-                  <a:txBody>
-                    <a:bodyPr/>
-                    <a:lstStyle/>
-                    <a:p>
-                      <a:pPr>
-                        <a:defRPr sz="1000">
-                          <a:solidFill>
-                            <a:srgbClr val="333333"/>
-                          </a:solidFill>
-                        </a:defRPr>
-                      </a:pPr>
-                      <a:r>
-                        <a:t>X (Twitter)</a:t>
-                      </a:r>
-                    </a:p>
-                  </a:txBody>
-                  <a:tcPr>
-                    <a:solidFill>
-                      <a:srgbClr val="F5F5F5"/>
-                    </a:solidFill>
-                  </a:tcPr>
-                </a:tc>
-                <a:tc>
-                  <a:txBody>
-                    <a:bodyPr/>
-                    <a:lstStyle/>
-                    <a:p>
-                      <a:pPr>
-                        <a:defRPr sz="1000">
-                          <a:solidFill>
-                            <a:srgbClr val="333333"/>
-                          </a:solidFill>
-                        </a:defRPr>
-                      </a:pPr>
-                      <a:r>
-                        <a:t>@CrownsmenP</a:t>
-                      </a:r>
-                    </a:p>
-                  </a:txBody>
-                  <a:tcPr>
-                    <a:solidFill>
-                      <a:srgbClr val="F5F5F5"/>
-                    </a:solidFill>
-                  </a:tcPr>
-                </a:tc>
-                <a:tc>
-                  <a:txBody>
-                    <a:bodyPr/>
-                    <a:lstStyle/>
-                    <a:p>
-                      <a:pPr>
-                        <a:defRPr sz="1000">
-                          <a:solidFill>
-                            <a:srgbClr val="333333"/>
-                          </a:solidFill>
-                        </a:defRPr>
-                      </a:pPr>
-                      <a:r>
-                        <a:t>[TBD]</a:t>
-                      </a:r>
-                    </a:p>
-                  </a:txBody>
-                  <a:tcPr>
-                    <a:solidFill>
-                      <a:srgbClr val="F5F5F5"/>
-                    </a:solidFill>
-                  </a:tcPr>
-                </a:tc>
-                <a:tc>
-                  <a:txBody>
-                    <a:bodyPr/>
-                    <a:lstStyle/>
-                    <a:p>
-                      <a:pPr>
-                        <a:defRPr sz="1000">
-                          <a:solidFill>
-                            <a:srgbClr val="333333"/>
-                          </a:solidFill>
-                        </a:defRPr>
-                      </a:pPr>
-                      <a:r>
-                        <a:t>[TBD]</a:t>
-                      </a:r>
-                    </a:p>
-                  </a:txBody>
-                  <a:tcPr>
-                    <a:solidFill>
-                      <a:srgbClr val="F5F5F5"/>
-                    </a:solidFill>
-                  </a:tcPr>
-                </a:tc>
-                <a:tc>
-                  <a:txBody>
-                    <a:bodyPr/>
-                    <a:lstStyle/>
-                    <a:p>
-                      <a:pPr>
-                        <a:defRPr sz="1000">
-                          <a:solidFill>
-                            <a:srgbClr val="333333"/>
-                          </a:solidFill>
-                        </a:defRPr>
-                      </a:pPr>
-                      <a:r>
-                        <a:t>[TBD]</a:t>
-                      </a:r>
-                    </a:p>
-                  </a:txBody>
-                  <a:tcPr>
-                    <a:solidFill>
-                      <a:srgbClr val="F5F5F5"/>
-                    </a:solidFill>
-                  </a:tcPr>
-                </a:tc>
-                <a:tc>
-                  <a:txBody>
-                    <a:bodyPr/>
-                    <a:lstStyle/>
-                    <a:p>
-                      <a:pPr>
-                        <a:defRPr sz="1000">
+                        <a:defRPr sz="900">
                           <a:solidFill>
                             <a:srgbClr val="333333"/>
                           </a:solidFill>
@@ -7395,7 +7139,7 @@
               </a:defRPr>
             </a:pPr>
             <a:r>
-              <a:t>Podcast &amp; Audio Distribution</a:t>
+              <a:t>Social Media — LinkedIn</a:t>
             </a:r>
           </a:p>
         </p:txBody>
@@ -7430,7 +7174,7 @@
               </a:defRPr>
             </a:pPr>
             <a:r>
-              <a:t>The Construction Show</a:t>
+              <a:t>Organic Posts</a:t>
             </a:r>
           </a:p>
         </p:txBody>
@@ -7445,7 +7189,7 @@
         </p:nvGraphicFramePr>
         <p:xfrm>
           <a:off x="365760" y="1371600"/>
-          <a:ext cx="7132320" cy="1600200"/>
+          <a:ext cx="7955280" cy="877824"/>
         </p:xfrm>
         <a:graphic>
           <a:graphicData uri="http://schemas.openxmlformats.org/drawingml/2006/table">
@@ -7454,26 +7198,27 @@
                 <a:tableStyleId>{5C22544A-7EE6-4342-B048-85BDC9FD1C3A}</a:tableStyleId>
               </a:tblPr>
               <a:tblGrid>
-                <a:gridCol w="1645920"/>
-                <a:gridCol w="3200400"/>
+                <a:gridCol w="2743200"/>
                 <a:gridCol w="1371600"/>
-                <a:gridCol w="914400"/>
+                <a:gridCol w="1371600"/>
+                <a:gridCol w="1371600"/>
+                <a:gridCol w="1097280"/>
               </a:tblGrid>
-              <a:tr h="320040">
+              <a:tr h="292608">
                 <a:tc>
                   <a:txBody>
                     <a:bodyPr/>
                     <a:lstStyle/>
                     <a:p>
                       <a:pPr>
-                        <a:defRPr sz="1000" b="1">
+                        <a:defRPr sz="900" b="1">
                           <a:solidFill>
                             <a:srgbClr val="FFFFFF"/>
                           </a:solidFill>
                         </a:defRPr>
                       </a:pPr>
                       <a:r>
-                        <a:t>Platform</a:t>
+                        <a:t>Account</a:t>
                       </a:r>
                     </a:p>
                   </a:txBody>
@@ -7489,14 +7234,14 @@
                     <a:lstStyle/>
                     <a:p>
                       <a:pPr>
-                        <a:defRPr sz="1000" b="1">
+                        <a:defRPr sz="900" b="1">
                           <a:solidFill>
                             <a:srgbClr val="FFFFFF"/>
                           </a:solidFill>
                         </a:defRPr>
                       </a:pPr>
                       <a:r>
-                        <a:t>Episode Title</a:t>
+                        <a:t>Reactions</a:t>
                       </a:r>
                     </a:p>
                   </a:txBody>
@@ -7512,14 +7257,14 @@
                     <a:lstStyle/>
                     <a:p>
                       <a:pPr>
-                        <a:defRPr sz="1000" b="1">
+                        <a:defRPr sz="900" b="1">
                           <a:solidFill>
                             <a:srgbClr val="FFFFFF"/>
                           </a:solidFill>
                         </a:defRPr>
                       </a:pPr>
                       <a:r>
-                        <a:t>Plays/Downloads</a:t>
+                        <a:t>Comments</a:t>
                       </a:r>
                     </a:p>
                   </a:txBody>
@@ -7535,14 +7280,37 @@
                     <a:lstStyle/>
                     <a:p>
                       <a:pPr>
-                        <a:defRPr sz="1000" b="1">
+                        <a:defRPr sz="900" b="1">
                           <a:solidFill>
                             <a:srgbClr val="FFFFFF"/>
                           </a:solidFill>
                         </a:defRPr>
                       </a:pPr>
                       <a:r>
-                        <a:t>Duration</a:t>
+                        <a:t>Impressions</a:t>
+                      </a:r>
+                    </a:p>
+                  </a:txBody>
+                  <a:tcPr>
+                    <a:solidFill>
+                      <a:srgbClr val="1A2B4A"/>
+                    </a:solidFill>
+                  </a:tcPr>
+                </a:tc>
+                <a:tc>
+                  <a:txBody>
+                    <a:bodyPr/>
+                    <a:lstStyle/>
+                    <a:p>
+                      <a:pPr>
+                        <a:defRPr sz="900" b="1">
+                          <a:solidFill>
+                            <a:srgbClr val="FFFFFF"/>
+                          </a:solidFill>
+                        </a:defRPr>
+                      </a:pPr>
+                      <a:r>
+                        <a:t>Clicks</a:t>
                       </a:r>
                     </a:p>
                   </a:txBody>
@@ -7553,21 +7321,21 @@
                   </a:tcPr>
                 </a:tc>
               </a:tr>
-              <a:tr h="320040">
+              <a:tr h="292608">
                 <a:tc>
                   <a:txBody>
                     <a:bodyPr/>
                     <a:lstStyle/>
                     <a:p>
                       <a:pPr>
-                        <a:defRPr sz="1000">
+                        <a:defRPr sz="900">
                           <a:solidFill>
                             <a:srgbClr val="333333"/>
                           </a:solidFill>
                         </a:defRPr>
                       </a:pPr>
                       <a:r>
-                        <a:t>Spotify</a:t>
+                        <a:t>Crownsmen Partners</a:t>
                       </a:r>
                     </a:p>
                   </a:txBody>
@@ -7579,14 +7347,14 @@
                     <a:lstStyle/>
                     <a:p>
                       <a:pPr>
-                        <a:defRPr sz="1000">
+                        <a:defRPr sz="900">
                           <a:solidFill>
                             <a:srgbClr val="333333"/>
                           </a:solidFill>
                         </a:defRPr>
                       </a:pPr>
                       <a:r>
-                        <a:t>CS 67. Equify Financial: The Hidden Cash</a:t>
+                        <a:t>7</a:t>
                       </a:r>
                     </a:p>
                   </a:txBody>
@@ -7598,7 +7366,26 @@
                     <a:lstStyle/>
                     <a:p>
                       <a:pPr>
-                        <a:defRPr sz="1000">
+                        <a:defRPr sz="900">
+                          <a:solidFill>
+                            <a:srgbClr val="333333"/>
+                          </a:solidFill>
+                        </a:defRPr>
+                      </a:pPr>
+                      <a:r>
+                        <a:t>1</a:t>
+                      </a:r>
+                    </a:p>
+                  </a:txBody>
+                  <a:tcPr/>
+                </a:tc>
+                <a:tc>
+                  <a:txBody>
+                    <a:bodyPr/>
+                    <a:lstStyle/>
+                    <a:p>
+                      <a:pPr>
+                        <a:defRPr sz="900">
                           <a:solidFill>
                             <a:srgbClr val="333333"/>
                           </a:solidFill>
@@ -7617,7 +7404,7 @@
                     <a:lstStyle/>
                     <a:p>
                       <a:pPr>
-                        <a:defRPr sz="1000">
+                        <a:defRPr sz="900">
                           <a:solidFill>
                             <a:srgbClr val="333333"/>
                           </a:solidFill>
@@ -7631,21 +7418,21 @@
                   <a:tcPr/>
                 </a:tc>
               </a:tr>
-              <a:tr h="320040">
+              <a:tr h="292608">
                 <a:tc>
                   <a:txBody>
                     <a:bodyPr/>
                     <a:lstStyle/>
                     <a:p>
                       <a:pPr>
-                        <a:defRPr sz="1000">
+                        <a:defRPr sz="900">
                           <a:solidFill>
                             <a:srgbClr val="333333"/>
                           </a:solidFill>
                         </a:defRPr>
                       </a:pPr>
                       <a:r>
-                        <a:t>Apple Podcasts</a:t>
+                        <a:t>The Construction Show</a:t>
                       </a:r>
                     </a:p>
                   </a:txBody>
@@ -7661,14 +7448,14 @@
                     <a:lstStyle/>
                     <a:p>
                       <a:pPr>
-                        <a:defRPr sz="1000">
+                        <a:defRPr sz="900">
                           <a:solidFill>
                             <a:srgbClr val="333333"/>
                           </a:solidFill>
                         </a:defRPr>
                       </a:pPr>
                       <a:r>
-                        <a:t>CS 67. Equify Financial: The Hidden Cash</a:t>
+                        <a:t>19</a:t>
                       </a:r>
                     </a:p>
                   </a:txBody>
@@ -7684,7 +7471,30 @@
                     <a:lstStyle/>
                     <a:p>
                       <a:pPr>
-                        <a:defRPr sz="1000">
+                        <a:defRPr sz="900">
+                          <a:solidFill>
+                            <a:srgbClr val="333333"/>
+                          </a:solidFill>
+                        </a:defRPr>
+                      </a:pPr>
+                      <a:r>
+                        <a:t>0</a:t>
+                      </a:r>
+                    </a:p>
+                  </a:txBody>
+                  <a:tcPr>
+                    <a:solidFill>
+                      <a:srgbClr val="F5F5F5"/>
+                    </a:solidFill>
+                  </a:tcPr>
+                </a:tc>
+                <a:tc>
+                  <a:txBody>
+                    <a:bodyPr/>
+                    <a:lstStyle/>
+                    <a:p>
+                      <a:pPr>
+                        <a:defRPr sz="900">
                           <a:solidFill>
                             <a:srgbClr val="333333"/>
                           </a:solidFill>
@@ -7707,179 +7517,7 @@
                     <a:lstStyle/>
                     <a:p>
                       <a:pPr>
-                        <a:defRPr sz="1000">
-                          <a:solidFill>
-                            <a:srgbClr val="333333"/>
-                          </a:solidFill>
-                        </a:defRPr>
-                      </a:pPr>
-                      <a:r>
-                        <a:t>59m</a:t>
-                      </a:r>
-                    </a:p>
-                  </a:txBody>
-                  <a:tcPr>
-                    <a:solidFill>
-                      <a:srgbClr val="F5F5F5"/>
-                    </a:solidFill>
-                  </a:tcPr>
-                </a:tc>
-              </a:tr>
-              <a:tr h="320040">
-                <a:tc>
-                  <a:txBody>
-                    <a:bodyPr/>
-                    <a:lstStyle/>
-                    <a:p>
-                      <a:pPr>
-                        <a:defRPr sz="1000">
-                          <a:solidFill>
-                            <a:srgbClr val="333333"/>
-                          </a:solidFill>
-                        </a:defRPr>
-                      </a:pPr>
-                      <a:r>
-                        <a:t>Amazon Music</a:t>
-                      </a:r>
-                    </a:p>
-                  </a:txBody>
-                  <a:tcPr/>
-                </a:tc>
-                <a:tc>
-                  <a:txBody>
-                    <a:bodyPr/>
-                    <a:lstStyle/>
-                    <a:p>
-                      <a:pPr>
-                        <a:defRPr sz="1000">
-                          <a:solidFill>
-                            <a:srgbClr val="333333"/>
-                          </a:solidFill>
-                        </a:defRPr>
-                      </a:pPr>
-                      <a:r>
-                        <a:t>CS 67 — Equify Financial</a:t>
-                      </a:r>
-                    </a:p>
-                  </a:txBody>
-                  <a:tcPr/>
-                </a:tc>
-                <a:tc>
-                  <a:txBody>
-                    <a:bodyPr/>
-                    <a:lstStyle/>
-                    <a:p>
-                      <a:pPr>
-                        <a:defRPr sz="1000">
-                          <a:solidFill>
-                            <a:srgbClr val="333333"/>
-                          </a:solidFill>
-                        </a:defRPr>
-                      </a:pPr>
-                      <a:r>
-                        <a:t>[TBD]</a:t>
-                      </a:r>
-                    </a:p>
-                  </a:txBody>
-                  <a:tcPr/>
-                </a:tc>
-                <a:tc>
-                  <a:txBody>
-                    <a:bodyPr/>
-                    <a:lstStyle/>
-                    <a:p>
-                      <a:pPr>
-                        <a:defRPr sz="1000">
-                          <a:solidFill>
-                            <a:srgbClr val="333333"/>
-                          </a:solidFill>
-                        </a:defRPr>
-                      </a:pPr>
-                      <a:r>
-                        <a:t>[TBD]</a:t>
-                      </a:r>
-                    </a:p>
-                  </a:txBody>
-                  <a:tcPr/>
-                </a:tc>
-              </a:tr>
-              <a:tr h="320040">
-                <a:tc>
-                  <a:txBody>
-                    <a:bodyPr/>
-                    <a:lstStyle/>
-                    <a:p>
-                      <a:pPr>
-                        <a:defRPr sz="1000">
-                          <a:solidFill>
-                            <a:srgbClr val="333333"/>
-                          </a:solidFill>
-                        </a:defRPr>
-                      </a:pPr>
-                      <a:r>
-                        <a:t>Rumble</a:t>
-                      </a:r>
-                    </a:p>
-                  </a:txBody>
-                  <a:tcPr>
-                    <a:solidFill>
-                      <a:srgbClr val="F5F5F5"/>
-                    </a:solidFill>
-                  </a:tcPr>
-                </a:tc>
-                <a:tc>
-                  <a:txBody>
-                    <a:bodyPr/>
-                    <a:lstStyle/>
-                    <a:p>
-                      <a:pPr>
-                        <a:defRPr sz="1000">
-                          <a:solidFill>
-                            <a:srgbClr val="333333"/>
-                          </a:solidFill>
-                        </a:defRPr>
-                      </a:pPr>
-                      <a:r>
-                        <a:t>CS 67 — Equify Financial</a:t>
-                      </a:r>
-                    </a:p>
-                  </a:txBody>
-                  <a:tcPr>
-                    <a:solidFill>
-                      <a:srgbClr val="F5F5F5"/>
-                    </a:solidFill>
-                  </a:tcPr>
-                </a:tc>
-                <a:tc>
-                  <a:txBody>
-                    <a:bodyPr/>
-                    <a:lstStyle/>
-                    <a:p>
-                      <a:pPr>
-                        <a:defRPr sz="1000">
-                          <a:solidFill>
-                            <a:srgbClr val="333333"/>
-                          </a:solidFill>
-                        </a:defRPr>
-                      </a:pPr>
-                      <a:r>
-                        <a:t>[TBD]</a:t>
-                      </a:r>
-                    </a:p>
-                  </a:txBody>
-                  <a:tcPr>
-                    <a:solidFill>
-                      <a:srgbClr val="F5F5F5"/>
-                    </a:solidFill>
-                  </a:tcPr>
-                </a:tc>
-                <a:tc>
-                  <a:txBody>
-                    <a:bodyPr/>
-                    <a:lstStyle/>
-                    <a:p>
-                      <a:pPr>
-                        <a:defRPr sz="1000">
+                        <a:defRPr sz="900">
                           <a:solidFill>
                             <a:srgbClr val="333333"/>
                           </a:solidFill>
@@ -7904,65 +7542,6 @@
       <p:sp>
         <p:nvSpPr>
           <p:cNvPr id="6" name="TextBox 5"/>
-          <p:cNvSpPr txBox="1"/>
-          <p:nvPr/>
-        </p:nvSpPr>
-        <p:spPr>
-          <a:xfrm>
-            <a:off x="457200" y="4114800"/>
-            <a:ext cx="8229600" cy="1828800"/>
-          </a:xfrm>
-          <a:prstGeom prst="rect">
-            <a:avLst/>
-          </a:prstGeom>
-          <a:noFill/>
-        </p:spPr>
-        <p:txBody>
-          <a:bodyPr wrap="none">
-            <a:spAutoFit/>
-          </a:bodyPr>
-          <a:lstStyle/>
-          <a:p>
-            <a:pPr>
-              <a:defRPr sz="1400" b="1">
-                <a:solidFill>
-                  <a:srgbClr val="1A2B4A"/>
-                </a:solidFill>
-              </a:defRPr>
-            </a:pPr>
-            <a:r>
-              <a:t>Distribution Notes</a:t>
-            </a:r>
-          </a:p>
-          <a:p>
-            <a:pPr>
-              <a:defRPr sz="1200">
-                <a:solidFill>
-                  <a:srgbClr val="333333"/>
-                </a:solidFill>
-              </a:defRPr>
-            </a:pPr>
-            <a:r>
-              <a:t>• Episode syndicated to Spotify, Apple Podcasts, Amazon Music, and Rumble</a:t>
-            </a:r>
-          </a:p>
-          <a:p>
-            <a:pPr>
-              <a:defRPr sz="1200">
-                <a:solidFill>
-                  <a:srgbClr val="333333"/>
-                </a:solidFill>
-              </a:defRPr>
-            </a:pPr>
-            <a:r>
-              <a:t>• Full video also available on YouTube and Crownsmen.com landing page</a:t>
-            </a:r>
-          </a:p>
-        </p:txBody>
-      </p:sp>
-      <p:sp>
-        <p:nvSpPr>
-          <p:cNvPr id="7" name="TextBox 6"/>
           <p:cNvSpPr txBox="1"/>
           <p:nvPr/>
         </p:nvSpPr>
@@ -8094,7 +7673,7 @@
               </a:defRPr>
             </a:pPr>
             <a:r>
-              <a:t>Email Marketing</a:t>
+              <a:t>Social &amp; Podcast Distribution</a:t>
             </a:r>
           </a:p>
         </p:txBody>
@@ -8129,758 +7708,22 @@
               </a:defRPr>
             </a:pPr>
             <a:r>
-              <a:t>Constant Contact</a:t>
-            </a:r>
-          </a:p>
-        </p:txBody>
-      </p:sp>
-      <p:sp>
-        <p:nvSpPr>
-          <p:cNvPr id="5" name="Rectangle 4"/>
-          <p:cNvSpPr/>
-          <p:nvPr/>
-        </p:nvSpPr>
-        <p:spPr>
-          <a:xfrm>
-            <a:off x="457200" y="1371600"/>
-            <a:ext cx="1920240" cy="1097280"/>
-          </a:xfrm>
-          <a:prstGeom prst="rect">
-            <a:avLst/>
-          </a:prstGeom>
-          <a:solidFill>
-            <a:srgbClr val="C9A227"/>
-          </a:solidFill>
-          <a:ln>
-            <a:solidFill>
-              <a:srgbClr val="C9A227"/>
-            </a:solidFill>
-          </a:ln>
-        </p:spPr>
-        <p:style>
-          <a:lnRef idx="1">
-            <a:schemeClr val="accent1"/>
-          </a:lnRef>
-          <a:fillRef idx="3">
-            <a:schemeClr val="accent1"/>
-          </a:fillRef>
-          <a:effectRef idx="2">
-            <a:schemeClr val="accent1"/>
-          </a:effectRef>
-          <a:fontRef idx="minor">
-            <a:schemeClr val="lt1"/>
-          </a:fontRef>
-        </p:style>
-        <p:txBody>
-          <a:bodyPr rtlCol="0" anchor="ctr"/>
-          <a:lstStyle/>
-          <a:p>
-            <a:pPr algn="ctr"/>
-          </a:p>
-        </p:txBody>
-      </p:sp>
-      <p:sp>
-        <p:nvSpPr>
-          <p:cNvPr id="6" name="TextBox 5"/>
-          <p:cNvSpPr txBox="1"/>
-          <p:nvPr/>
-        </p:nvSpPr>
-        <p:spPr>
-          <a:xfrm>
-            <a:off x="594360" y="1463040"/>
-            <a:ext cx="1645920" cy="914400"/>
-          </a:xfrm>
-          <a:prstGeom prst="rect">
-            <a:avLst/>
-          </a:prstGeom>
-          <a:noFill/>
-        </p:spPr>
-        <p:txBody>
-          <a:bodyPr wrap="square">
-            <a:spAutoFit/>
-          </a:bodyPr>
-          <a:lstStyle/>
-          <a:p>
-            <a:pPr>
-              <a:defRPr sz="1100">
-                <a:solidFill>
-                  <a:srgbClr val="1A2B4A"/>
-                </a:solidFill>
-              </a:defRPr>
-            </a:pPr>
-            <a:r>
-              <a:t>Emails Sent</a:t>
-            </a:r>
-          </a:p>
-          <a:p>
-            <a:pPr>
-              <a:defRPr sz="2200" b="1">
-                <a:solidFill>
-                  <a:srgbClr val="1A2B4A"/>
-                </a:solidFill>
-              </a:defRPr>
-            </a:pPr>
-            <a:r>
-              <a:t>[TBD]</a:t>
-            </a:r>
-          </a:p>
-        </p:txBody>
-      </p:sp>
-      <p:sp>
-        <p:nvSpPr>
-          <p:cNvPr id="7" name="Rectangle 6"/>
-          <p:cNvSpPr/>
-          <p:nvPr/>
-        </p:nvSpPr>
-        <p:spPr>
-          <a:xfrm>
-            <a:off x="2560320" y="1371600"/>
-            <a:ext cx="1920240" cy="1097280"/>
-          </a:xfrm>
-          <a:prstGeom prst="rect">
-            <a:avLst/>
-          </a:prstGeom>
-          <a:solidFill>
-            <a:srgbClr val="F5F5F5"/>
-          </a:solidFill>
-          <a:ln>
-            <a:solidFill>
-              <a:srgbClr val="DDDDDD"/>
-            </a:solidFill>
-          </a:ln>
-        </p:spPr>
-        <p:style>
-          <a:lnRef idx="1">
-            <a:schemeClr val="accent1"/>
-          </a:lnRef>
-          <a:fillRef idx="3">
-            <a:schemeClr val="accent1"/>
-          </a:fillRef>
-          <a:effectRef idx="2">
-            <a:schemeClr val="accent1"/>
-          </a:effectRef>
-          <a:fontRef idx="minor">
-            <a:schemeClr val="lt1"/>
-          </a:fontRef>
-        </p:style>
-        <p:txBody>
-          <a:bodyPr rtlCol="0" anchor="ctr"/>
-          <a:lstStyle/>
-          <a:p>
-            <a:pPr algn="ctr"/>
-          </a:p>
-        </p:txBody>
-      </p:sp>
-      <p:sp>
-        <p:nvSpPr>
-          <p:cNvPr id="8" name="TextBox 7"/>
-          <p:cNvSpPr txBox="1"/>
-          <p:nvPr/>
-        </p:nvSpPr>
-        <p:spPr>
-          <a:xfrm>
-            <a:off x="2697480" y="1463040"/>
-            <a:ext cx="1645920" cy="914400"/>
-          </a:xfrm>
-          <a:prstGeom prst="rect">
-            <a:avLst/>
-          </a:prstGeom>
-          <a:noFill/>
-        </p:spPr>
-        <p:txBody>
-          <a:bodyPr wrap="square">
-            <a:spAutoFit/>
-          </a:bodyPr>
-          <a:lstStyle/>
-          <a:p>
-            <a:pPr>
-              <a:defRPr sz="1100">
-                <a:solidFill>
-                  <a:srgbClr val="666666"/>
-                </a:solidFill>
-              </a:defRPr>
-            </a:pPr>
-            <a:r>
-              <a:t>Delivered</a:t>
-            </a:r>
-          </a:p>
-          <a:p>
-            <a:pPr>
-              <a:defRPr sz="1800" b="1">
-                <a:solidFill>
-                  <a:srgbClr val="1A2B4A"/>
-                </a:solidFill>
-              </a:defRPr>
-            </a:pPr>
-            <a:r>
-              <a:t>[TBD]</a:t>
-            </a:r>
-          </a:p>
-        </p:txBody>
-      </p:sp>
-      <p:sp>
-        <p:nvSpPr>
-          <p:cNvPr id="9" name="Rectangle 8"/>
-          <p:cNvSpPr/>
-          <p:nvPr/>
-        </p:nvSpPr>
-        <p:spPr>
-          <a:xfrm>
-            <a:off x="4663440" y="1371600"/>
-            <a:ext cx="1920240" cy="1097280"/>
-          </a:xfrm>
-          <a:prstGeom prst="rect">
-            <a:avLst/>
-          </a:prstGeom>
-          <a:solidFill>
-            <a:srgbClr val="F5F5F5"/>
-          </a:solidFill>
-          <a:ln>
-            <a:solidFill>
-              <a:srgbClr val="DDDDDD"/>
-            </a:solidFill>
-          </a:ln>
-        </p:spPr>
-        <p:style>
-          <a:lnRef idx="1">
-            <a:schemeClr val="accent1"/>
-          </a:lnRef>
-          <a:fillRef idx="3">
-            <a:schemeClr val="accent1"/>
-          </a:fillRef>
-          <a:effectRef idx="2">
-            <a:schemeClr val="accent1"/>
-          </a:effectRef>
-          <a:fontRef idx="minor">
-            <a:schemeClr val="lt1"/>
-          </a:fontRef>
-        </p:style>
-        <p:txBody>
-          <a:bodyPr rtlCol="0" anchor="ctr"/>
-          <a:lstStyle/>
-          <a:p>
-            <a:pPr algn="ctr"/>
-          </a:p>
-        </p:txBody>
-      </p:sp>
-      <p:sp>
-        <p:nvSpPr>
-          <p:cNvPr id="10" name="TextBox 9"/>
-          <p:cNvSpPr txBox="1"/>
-          <p:nvPr/>
-        </p:nvSpPr>
-        <p:spPr>
-          <a:xfrm>
-            <a:off x="4800600" y="1463040"/>
-            <a:ext cx="1645920" cy="914400"/>
-          </a:xfrm>
-          <a:prstGeom prst="rect">
-            <a:avLst/>
-          </a:prstGeom>
-          <a:noFill/>
-        </p:spPr>
-        <p:txBody>
-          <a:bodyPr wrap="square">
-            <a:spAutoFit/>
-          </a:bodyPr>
-          <a:lstStyle/>
-          <a:p>
-            <a:pPr>
-              <a:defRPr sz="1100">
-                <a:solidFill>
-                  <a:srgbClr val="666666"/>
-                </a:solidFill>
-              </a:defRPr>
-            </a:pPr>
-            <a:r>
-              <a:t>Unique Opens</a:t>
-            </a:r>
-          </a:p>
-          <a:p>
-            <a:pPr>
-              <a:defRPr sz="1800" b="1">
-                <a:solidFill>
-                  <a:srgbClr val="1A2B4A"/>
-                </a:solidFill>
-              </a:defRPr>
-            </a:pPr>
-            <a:r>
-              <a:t>[TBD]</a:t>
-            </a:r>
-          </a:p>
-        </p:txBody>
-      </p:sp>
-      <p:sp>
-        <p:nvSpPr>
-          <p:cNvPr id="11" name="Rectangle 10"/>
-          <p:cNvSpPr/>
-          <p:nvPr/>
-        </p:nvSpPr>
-        <p:spPr>
-          <a:xfrm>
-            <a:off x="6766560" y="1371600"/>
-            <a:ext cx="1920240" cy="1097280"/>
-          </a:xfrm>
-          <a:prstGeom prst="rect">
-            <a:avLst/>
-          </a:prstGeom>
-          <a:solidFill>
-            <a:srgbClr val="F5F5F5"/>
-          </a:solidFill>
-          <a:ln>
-            <a:solidFill>
-              <a:srgbClr val="DDDDDD"/>
-            </a:solidFill>
-          </a:ln>
-        </p:spPr>
-        <p:style>
-          <a:lnRef idx="1">
-            <a:schemeClr val="accent1"/>
-          </a:lnRef>
-          <a:fillRef idx="3">
-            <a:schemeClr val="accent1"/>
-          </a:fillRef>
-          <a:effectRef idx="2">
-            <a:schemeClr val="accent1"/>
-          </a:effectRef>
-          <a:fontRef idx="minor">
-            <a:schemeClr val="lt1"/>
-          </a:fontRef>
-        </p:style>
-        <p:txBody>
-          <a:bodyPr rtlCol="0" anchor="ctr"/>
-          <a:lstStyle/>
-          <a:p>
-            <a:pPr algn="ctr"/>
-          </a:p>
-        </p:txBody>
-      </p:sp>
-      <p:sp>
-        <p:nvSpPr>
-          <p:cNvPr id="12" name="TextBox 11"/>
-          <p:cNvSpPr txBox="1"/>
-          <p:nvPr/>
-        </p:nvSpPr>
-        <p:spPr>
-          <a:xfrm>
-            <a:off x="6903720" y="1463040"/>
-            <a:ext cx="1645920" cy="914400"/>
-          </a:xfrm>
-          <a:prstGeom prst="rect">
-            <a:avLst/>
-          </a:prstGeom>
-          <a:noFill/>
-        </p:spPr>
-        <p:txBody>
-          <a:bodyPr wrap="square">
-            <a:spAutoFit/>
-          </a:bodyPr>
-          <a:lstStyle/>
-          <a:p>
-            <a:pPr>
-              <a:defRPr sz="1100">
-                <a:solidFill>
-                  <a:srgbClr val="666666"/>
-                </a:solidFill>
-              </a:defRPr>
-            </a:pPr>
-            <a:r>
-              <a:t>Open Rate</a:t>
-            </a:r>
-          </a:p>
-          <a:p>
-            <a:pPr>
-              <a:defRPr sz="1800" b="1">
-                <a:solidFill>
-                  <a:srgbClr val="1A2B4A"/>
-                </a:solidFill>
-              </a:defRPr>
-            </a:pPr>
-            <a:r>
-              <a:t>[TBD]</a:t>
-            </a:r>
-          </a:p>
-        </p:txBody>
-      </p:sp>
-      <p:sp>
-        <p:nvSpPr>
-          <p:cNvPr id="13" name="Rectangle 12"/>
-          <p:cNvSpPr/>
-          <p:nvPr/>
-        </p:nvSpPr>
-        <p:spPr>
-          <a:xfrm>
-            <a:off x="457200" y="2743200"/>
-            <a:ext cx="1920240" cy="1097280"/>
-          </a:xfrm>
-          <a:prstGeom prst="rect">
-            <a:avLst/>
-          </a:prstGeom>
-          <a:solidFill>
-            <a:srgbClr val="F5F5F5"/>
-          </a:solidFill>
-          <a:ln>
-            <a:solidFill>
-              <a:srgbClr val="DDDDDD"/>
-            </a:solidFill>
-          </a:ln>
-        </p:spPr>
-        <p:style>
-          <a:lnRef idx="1">
-            <a:schemeClr val="accent1"/>
-          </a:lnRef>
-          <a:fillRef idx="3">
-            <a:schemeClr val="accent1"/>
-          </a:fillRef>
-          <a:effectRef idx="2">
-            <a:schemeClr val="accent1"/>
-          </a:effectRef>
-          <a:fontRef idx="minor">
-            <a:schemeClr val="lt1"/>
-          </a:fontRef>
-        </p:style>
-        <p:txBody>
-          <a:bodyPr rtlCol="0" anchor="ctr"/>
-          <a:lstStyle/>
-          <a:p>
-            <a:pPr algn="ctr"/>
-          </a:p>
-        </p:txBody>
-      </p:sp>
-      <p:sp>
-        <p:nvSpPr>
-          <p:cNvPr id="14" name="TextBox 13"/>
-          <p:cNvSpPr txBox="1"/>
-          <p:nvPr/>
-        </p:nvSpPr>
-        <p:spPr>
-          <a:xfrm>
-            <a:off x="594360" y="2834640"/>
-            <a:ext cx="1645920" cy="914400"/>
-          </a:xfrm>
-          <a:prstGeom prst="rect">
-            <a:avLst/>
-          </a:prstGeom>
-          <a:noFill/>
-        </p:spPr>
-        <p:txBody>
-          <a:bodyPr wrap="square">
-            <a:spAutoFit/>
-          </a:bodyPr>
-          <a:lstStyle/>
-          <a:p>
-            <a:pPr>
-              <a:defRPr sz="1100">
-                <a:solidFill>
-                  <a:srgbClr val="666666"/>
-                </a:solidFill>
-              </a:defRPr>
-            </a:pPr>
-            <a:r>
-              <a:t>Unique Clicks</a:t>
-            </a:r>
-          </a:p>
-          <a:p>
-            <a:pPr>
-              <a:defRPr sz="1800" b="1">
-                <a:solidFill>
-                  <a:srgbClr val="1A2B4A"/>
-                </a:solidFill>
-              </a:defRPr>
-            </a:pPr>
-            <a:r>
-              <a:t>[TBD]</a:t>
-            </a:r>
-          </a:p>
-        </p:txBody>
-      </p:sp>
-      <p:sp>
-        <p:nvSpPr>
-          <p:cNvPr id="15" name="Rectangle 14"/>
-          <p:cNvSpPr/>
-          <p:nvPr/>
-        </p:nvSpPr>
-        <p:spPr>
-          <a:xfrm>
-            <a:off x="2560320" y="2743200"/>
-            <a:ext cx="1920240" cy="1097280"/>
-          </a:xfrm>
-          <a:prstGeom prst="rect">
-            <a:avLst/>
-          </a:prstGeom>
-          <a:solidFill>
-            <a:srgbClr val="F5F5F5"/>
-          </a:solidFill>
-          <a:ln>
-            <a:solidFill>
-              <a:srgbClr val="DDDDDD"/>
-            </a:solidFill>
-          </a:ln>
-        </p:spPr>
-        <p:style>
-          <a:lnRef idx="1">
-            <a:schemeClr val="accent1"/>
-          </a:lnRef>
-          <a:fillRef idx="3">
-            <a:schemeClr val="accent1"/>
-          </a:fillRef>
-          <a:effectRef idx="2">
-            <a:schemeClr val="accent1"/>
-          </a:effectRef>
-          <a:fontRef idx="minor">
-            <a:schemeClr val="lt1"/>
-          </a:fontRef>
-        </p:style>
-        <p:txBody>
-          <a:bodyPr rtlCol="0" anchor="ctr"/>
-          <a:lstStyle/>
-          <a:p>
-            <a:pPr algn="ctr"/>
-          </a:p>
-        </p:txBody>
-      </p:sp>
-      <p:sp>
-        <p:nvSpPr>
-          <p:cNvPr id="16" name="TextBox 15"/>
-          <p:cNvSpPr txBox="1"/>
-          <p:nvPr/>
-        </p:nvSpPr>
-        <p:spPr>
-          <a:xfrm>
-            <a:off x="2697480" y="2834640"/>
-            <a:ext cx="1645920" cy="914400"/>
-          </a:xfrm>
-          <a:prstGeom prst="rect">
-            <a:avLst/>
-          </a:prstGeom>
-          <a:noFill/>
-        </p:spPr>
-        <p:txBody>
-          <a:bodyPr wrap="square">
-            <a:spAutoFit/>
-          </a:bodyPr>
-          <a:lstStyle/>
-          <a:p>
-            <a:pPr>
-              <a:defRPr sz="1100">
-                <a:solidFill>
-                  <a:srgbClr val="666666"/>
-                </a:solidFill>
-              </a:defRPr>
-            </a:pPr>
-            <a:r>
-              <a:t>Click Rate</a:t>
-            </a:r>
-          </a:p>
-          <a:p>
-            <a:pPr>
-              <a:defRPr sz="1800" b="1">
-                <a:solidFill>
-                  <a:srgbClr val="1A2B4A"/>
-                </a:solidFill>
-              </a:defRPr>
-            </a:pPr>
-            <a:r>
-              <a:t>[TBD]</a:t>
-            </a:r>
-          </a:p>
-        </p:txBody>
-      </p:sp>
-      <p:sp>
-        <p:nvSpPr>
-          <p:cNvPr id="17" name="Rectangle 16"/>
-          <p:cNvSpPr/>
-          <p:nvPr/>
-        </p:nvSpPr>
-        <p:spPr>
-          <a:xfrm>
-            <a:off x="4663440" y="2743200"/>
-            <a:ext cx="1920240" cy="1097280"/>
-          </a:xfrm>
-          <a:prstGeom prst="rect">
-            <a:avLst/>
-          </a:prstGeom>
-          <a:solidFill>
-            <a:srgbClr val="F5F5F5"/>
-          </a:solidFill>
-          <a:ln>
-            <a:solidFill>
-              <a:srgbClr val="DDDDDD"/>
-            </a:solidFill>
-          </a:ln>
-        </p:spPr>
-        <p:style>
-          <a:lnRef idx="1">
-            <a:schemeClr val="accent1"/>
-          </a:lnRef>
-          <a:fillRef idx="3">
-            <a:schemeClr val="accent1"/>
-          </a:fillRef>
-          <a:effectRef idx="2">
-            <a:schemeClr val="accent1"/>
-          </a:effectRef>
-          <a:fontRef idx="minor">
-            <a:schemeClr val="lt1"/>
-          </a:fontRef>
-        </p:style>
-        <p:txBody>
-          <a:bodyPr rtlCol="0" anchor="ctr"/>
-          <a:lstStyle/>
-          <a:p>
-            <a:pPr algn="ctr"/>
-          </a:p>
-        </p:txBody>
-      </p:sp>
-      <p:sp>
-        <p:nvSpPr>
-          <p:cNvPr id="18" name="TextBox 17"/>
-          <p:cNvSpPr txBox="1"/>
-          <p:nvPr/>
-        </p:nvSpPr>
-        <p:spPr>
-          <a:xfrm>
-            <a:off x="4800600" y="2834640"/>
-            <a:ext cx="1645920" cy="914400"/>
-          </a:xfrm>
-          <a:prstGeom prst="rect">
-            <a:avLst/>
-          </a:prstGeom>
-          <a:noFill/>
-        </p:spPr>
-        <p:txBody>
-          <a:bodyPr wrap="square">
-            <a:spAutoFit/>
-          </a:bodyPr>
-          <a:lstStyle/>
-          <a:p>
-            <a:pPr>
-              <a:defRPr sz="1100">
-                <a:solidFill>
-                  <a:srgbClr val="666666"/>
-                </a:solidFill>
-              </a:defRPr>
-            </a:pPr>
-            <a:r>
-              <a:t>Bounces</a:t>
-            </a:r>
-          </a:p>
-          <a:p>
-            <a:pPr>
-              <a:defRPr sz="1800" b="1">
-                <a:solidFill>
-                  <a:srgbClr val="1A2B4A"/>
-                </a:solidFill>
-              </a:defRPr>
-            </a:pPr>
-            <a:r>
-              <a:t>[TBD]</a:t>
-            </a:r>
-          </a:p>
-        </p:txBody>
-      </p:sp>
-      <p:sp>
-        <p:nvSpPr>
-          <p:cNvPr id="19" name="Rectangle 18"/>
-          <p:cNvSpPr/>
-          <p:nvPr/>
-        </p:nvSpPr>
-        <p:spPr>
-          <a:xfrm>
-            <a:off x="6766560" y="2743200"/>
-            <a:ext cx="1920240" cy="1097280"/>
-          </a:xfrm>
-          <a:prstGeom prst="rect">
-            <a:avLst/>
-          </a:prstGeom>
-          <a:solidFill>
-            <a:srgbClr val="F5F5F5"/>
-          </a:solidFill>
-          <a:ln>
-            <a:solidFill>
-              <a:srgbClr val="DDDDDD"/>
-            </a:solidFill>
-          </a:ln>
-        </p:spPr>
-        <p:style>
-          <a:lnRef idx="1">
-            <a:schemeClr val="accent1"/>
-          </a:lnRef>
-          <a:fillRef idx="3">
-            <a:schemeClr val="accent1"/>
-          </a:fillRef>
-          <a:effectRef idx="2">
-            <a:schemeClr val="accent1"/>
-          </a:effectRef>
-          <a:fontRef idx="minor">
-            <a:schemeClr val="lt1"/>
-          </a:fontRef>
-        </p:style>
-        <p:txBody>
-          <a:bodyPr rtlCol="0" anchor="ctr"/>
-          <a:lstStyle/>
-          <a:p>
-            <a:pPr algn="ctr"/>
-          </a:p>
-        </p:txBody>
-      </p:sp>
-      <p:sp>
-        <p:nvSpPr>
-          <p:cNvPr id="20" name="TextBox 19"/>
-          <p:cNvSpPr txBox="1"/>
-          <p:nvPr/>
-        </p:nvSpPr>
-        <p:spPr>
-          <a:xfrm>
-            <a:off x="6903720" y="2834640"/>
-            <a:ext cx="1645920" cy="914400"/>
-          </a:xfrm>
-          <a:prstGeom prst="rect">
-            <a:avLst/>
-          </a:prstGeom>
-          <a:noFill/>
-        </p:spPr>
-        <p:txBody>
-          <a:bodyPr wrap="square">
-            <a:spAutoFit/>
-          </a:bodyPr>
-          <a:lstStyle/>
-          <a:p>
-            <a:pPr>
-              <a:defRPr sz="1100">
-                <a:solidFill>
-                  <a:srgbClr val="666666"/>
-                </a:solidFill>
-              </a:defRPr>
-            </a:pPr>
-            <a:r>
-              <a:t>Unsubscribes</a:t>
-            </a:r>
-          </a:p>
-          <a:p>
-            <a:pPr>
-              <a:defRPr sz="1800" b="1">
-                <a:solidFill>
-                  <a:srgbClr val="1A2B4A"/>
-                </a:solidFill>
-              </a:defRPr>
-            </a:pPr>
-            <a:r>
-              <a:t>[TBD]</a:t>
+              <a:t>Facebook | Instagram | Threads | X | Podcast</a:t>
             </a:r>
           </a:p>
         </p:txBody>
       </p:sp>
       <p:graphicFrame>
         <p:nvGraphicFramePr>
-          <p:cNvPr id="21" name="Table 20"/>
+          <p:cNvPr id="5" name="Table 4"/>
           <p:cNvGraphicFramePr>
             <a:graphicFrameLocks noGrp="1"/>
           </p:cNvGraphicFramePr>
           <p:nvPr/>
         </p:nvGraphicFramePr>
         <p:xfrm>
-          <a:off x="457200" y="4114800"/>
-          <a:ext cx="4572000" cy="1280160"/>
+          <a:off x="365760" y="1188720"/>
+          <a:ext cx="3840480" cy="1280160"/>
         </p:xfrm>
         <a:graphic>
           <a:graphicData uri="http://schemas.openxmlformats.org/drawingml/2006/table">
@@ -8889,24 +7732,26 @@
                 <a:tableStyleId>{5C22544A-7EE6-4342-B048-85BDC9FD1C3A}</a:tableStyleId>
               </a:tblPr>
               <a:tblGrid>
-                <a:gridCol w="1828800"/>
-                <a:gridCol w="2743200"/>
+                <a:gridCol w="1097280"/>
+                <a:gridCol w="1097280"/>
+                <a:gridCol w="914400"/>
+                <a:gridCol w="731520"/>
               </a:tblGrid>
-              <a:tr h="320040">
+              <a:tr h="256032">
                 <a:tc>
                   <a:txBody>
                     <a:bodyPr/>
                     <a:lstStyle/>
                     <a:p>
                       <a:pPr>
-                        <a:defRPr sz="1000" b="1">
+                        <a:defRPr sz="900" b="1">
                           <a:solidFill>
                             <a:srgbClr val="FFFFFF"/>
                           </a:solidFill>
                         </a:defRPr>
                       </a:pPr>
                       <a:r>
-                        <a:t>Metric</a:t>
+                        <a:t>Platform</a:t>
                       </a:r>
                     </a:p>
                   </a:txBody>
@@ -8922,14 +7767,60 @@
                     <a:lstStyle/>
                     <a:p>
                       <a:pPr>
-                        <a:defRPr sz="1000" b="1">
+                        <a:defRPr sz="900" b="1">
                           <a:solidFill>
                             <a:srgbClr val="FFFFFF"/>
                           </a:solidFill>
                         </a:defRPr>
                       </a:pPr>
                       <a:r>
-                        <a:t>Value</a:t>
+                        <a:t>Account</a:t>
+                      </a:r>
+                    </a:p>
+                  </a:txBody>
+                  <a:tcPr>
+                    <a:solidFill>
+                      <a:srgbClr val="1A2B4A"/>
+                    </a:solidFill>
+                  </a:tcPr>
+                </a:tc>
+                <a:tc>
+                  <a:txBody>
+                    <a:bodyPr/>
+                    <a:lstStyle/>
+                    <a:p>
+                      <a:pPr>
+                        <a:defRPr sz="900" b="1">
+                          <a:solidFill>
+                            <a:srgbClr val="FFFFFF"/>
+                          </a:solidFill>
+                        </a:defRPr>
+                      </a:pPr>
+                      <a:r>
+                        <a:t>Engagement</a:t>
+                      </a:r>
+                    </a:p>
+                  </a:txBody>
+                  <a:tcPr>
+                    <a:solidFill>
+                      <a:srgbClr val="1A2B4A"/>
+                    </a:solidFill>
+                  </a:tcPr>
+                </a:tc>
+                <a:tc>
+                  <a:txBody>
+                    <a:bodyPr/>
+                    <a:lstStyle/>
+                    <a:p>
+                      <a:pPr>
+                        <a:defRPr sz="900" b="1">
+                          <a:solidFill>
+                            <a:srgbClr val="FFFFFF"/>
+                          </a:solidFill>
+                        </a:defRPr>
+                      </a:pPr>
+                      <a:r>
+                        <a:t>Comments</a:t>
                       </a:r>
                     </a:p>
                   </a:txBody>
@@ -8940,21 +7831,21 @@
                   </a:tcPr>
                 </a:tc>
               </a:tr>
-              <a:tr h="320040">
+              <a:tr h="256032">
                 <a:tc>
                   <a:txBody>
                     <a:bodyPr/>
                     <a:lstStyle/>
                     <a:p>
                       <a:pPr>
-                        <a:defRPr sz="1000">
+                        <a:defRPr sz="900">
                           <a:solidFill>
                             <a:srgbClr val="333333"/>
                           </a:solidFill>
                         </a:defRPr>
                       </a:pPr>
                       <a:r>
-                        <a:t>Campaign Name</a:t>
+                        <a:t>Facebook</a:t>
                       </a:r>
                     </a:p>
                   </a:txBody>
@@ -8966,7 +7857,45 @@
                     <a:lstStyle/>
                     <a:p>
                       <a:pPr>
-                        <a:defRPr sz="1000">
+                        <a:defRPr sz="900">
+                          <a:solidFill>
+                            <a:srgbClr val="333333"/>
+                          </a:solidFill>
+                        </a:defRPr>
+                      </a:pPr>
+                      <a:r>
+                        <a:t>Crownsmen Partners</a:t>
+                      </a:r>
+                    </a:p>
+                  </a:txBody>
+                  <a:tcPr/>
+                </a:tc>
+                <a:tc>
+                  <a:txBody>
+                    <a:bodyPr/>
+                    <a:lstStyle/>
+                    <a:p>
+                      <a:pPr>
+                        <a:defRPr sz="900">
+                          <a:solidFill>
+                            <a:srgbClr val="333333"/>
+                          </a:solidFill>
+                        </a:defRPr>
+                      </a:pPr>
+                      <a:r>
+                        <a:t>[TBD]</a:t>
+                      </a:r>
+                    </a:p>
+                  </a:txBody>
+                  <a:tcPr/>
+                </a:tc>
+                <a:tc>
+                  <a:txBody>
+                    <a:bodyPr/>
+                    <a:lstStyle/>
+                    <a:p>
+                      <a:pPr>
+                        <a:defRPr sz="900">
                           <a:solidFill>
                             <a:srgbClr val="333333"/>
                           </a:solidFill>
@@ -8980,21 +7909,21 @@
                   <a:tcPr/>
                 </a:tc>
               </a:tr>
-              <a:tr h="320040">
+              <a:tr h="256032">
                 <a:tc>
                   <a:txBody>
                     <a:bodyPr/>
                     <a:lstStyle/>
                     <a:p>
                       <a:pPr>
-                        <a:defRPr sz="1000">
+                        <a:defRPr sz="900">
                           <a:solidFill>
                             <a:srgbClr val="333333"/>
                           </a:solidFill>
                         </a:defRPr>
                       </a:pPr>
                       <a:r>
-                        <a:t>Subject Line</a:t>
+                        <a:t>Instagram</a:t>
                       </a:r>
                     </a:p>
                   </a:txBody>
@@ -9010,7 +7939,53 @@
                     <a:lstStyle/>
                     <a:p>
                       <a:pPr>
-                        <a:defRPr sz="1000">
+                        <a:defRPr sz="900">
+                          <a:solidFill>
+                            <a:srgbClr val="333333"/>
+                          </a:solidFill>
+                        </a:defRPr>
+                      </a:pPr>
+                      <a:r>
+                        <a:t>@crownsmenp</a:t>
+                      </a:r>
+                    </a:p>
+                  </a:txBody>
+                  <a:tcPr>
+                    <a:solidFill>
+                      <a:srgbClr val="F5F5F5"/>
+                    </a:solidFill>
+                  </a:tcPr>
+                </a:tc>
+                <a:tc>
+                  <a:txBody>
+                    <a:bodyPr/>
+                    <a:lstStyle/>
+                    <a:p>
+                      <a:pPr>
+                        <a:defRPr sz="900">
+                          <a:solidFill>
+                            <a:srgbClr val="333333"/>
+                          </a:solidFill>
+                        </a:defRPr>
+                      </a:pPr>
+                      <a:r>
+                        <a:t>[TBD]</a:t>
+                      </a:r>
+                    </a:p>
+                  </a:txBody>
+                  <a:tcPr>
+                    <a:solidFill>
+                      <a:srgbClr val="F5F5F5"/>
+                    </a:solidFill>
+                  </a:tcPr>
+                </a:tc>
+                <a:tc>
+                  <a:txBody>
+                    <a:bodyPr/>
+                    <a:lstStyle/>
+                    <a:p>
+                      <a:pPr>
+                        <a:defRPr sz="900">
                           <a:solidFill>
                             <a:srgbClr val="333333"/>
                           </a:solidFill>
@@ -9028,21 +8003,21 @@
                   </a:tcPr>
                 </a:tc>
               </a:tr>
-              <a:tr h="320040">
+              <a:tr h="256032">
                 <a:tc>
                   <a:txBody>
                     <a:bodyPr/>
                     <a:lstStyle/>
                     <a:p>
                       <a:pPr>
-                        <a:defRPr sz="1000">
+                        <a:defRPr sz="900">
                           <a:solidFill>
                             <a:srgbClr val="333333"/>
                           </a:solidFill>
                         </a:defRPr>
                       </a:pPr>
                       <a:r>
-                        <a:t>Send Date</a:t>
+                        <a:t>Threads</a:t>
                       </a:r>
                     </a:p>
                   </a:txBody>
@@ -9054,7 +8029,45 @@
                     <a:lstStyle/>
                     <a:p>
                       <a:pPr>
-                        <a:defRPr sz="1000">
+                        <a:defRPr sz="900">
+                          <a:solidFill>
+                            <a:srgbClr val="333333"/>
+                          </a:solidFill>
+                        </a:defRPr>
+                      </a:pPr>
+                      <a:r>
+                        <a:t>@crownsmenp</a:t>
+                      </a:r>
+                    </a:p>
+                  </a:txBody>
+                  <a:tcPr/>
+                </a:tc>
+                <a:tc>
+                  <a:txBody>
+                    <a:bodyPr/>
+                    <a:lstStyle/>
+                    <a:p>
+                      <a:pPr>
+                        <a:defRPr sz="900">
+                          <a:solidFill>
+                            <a:srgbClr val="333333"/>
+                          </a:solidFill>
+                        </a:defRPr>
+                      </a:pPr>
+                      <a:r>
+                        <a:t>[TBD]</a:t>
+                      </a:r>
+                    </a:p>
+                  </a:txBody>
+                  <a:tcPr/>
+                </a:tc>
+                <a:tc>
+                  <a:txBody>
+                    <a:bodyPr/>
+                    <a:lstStyle/>
+                    <a:p>
+                      <a:pPr>
+                        <a:defRPr sz="900">
                           <a:solidFill>
                             <a:srgbClr val="333333"/>
                           </a:solidFill>
@@ -9068,13 +8081,465 @@
                   <a:tcPr/>
                 </a:tc>
               </a:tr>
+              <a:tr h="256032">
+                <a:tc>
+                  <a:txBody>
+                    <a:bodyPr/>
+                    <a:lstStyle/>
+                    <a:p>
+                      <a:pPr>
+                        <a:defRPr sz="900">
+                          <a:solidFill>
+                            <a:srgbClr val="333333"/>
+                          </a:solidFill>
+                        </a:defRPr>
+                      </a:pPr>
+                      <a:r>
+                        <a:t>X (Twitter)</a:t>
+                      </a:r>
+                    </a:p>
+                  </a:txBody>
+                  <a:tcPr>
+                    <a:solidFill>
+                      <a:srgbClr val="F5F5F5"/>
+                    </a:solidFill>
+                  </a:tcPr>
+                </a:tc>
+                <a:tc>
+                  <a:txBody>
+                    <a:bodyPr/>
+                    <a:lstStyle/>
+                    <a:p>
+                      <a:pPr>
+                        <a:defRPr sz="900">
+                          <a:solidFill>
+                            <a:srgbClr val="333333"/>
+                          </a:solidFill>
+                        </a:defRPr>
+                      </a:pPr>
+                      <a:r>
+                        <a:t>@CrownsmenP</a:t>
+                      </a:r>
+                    </a:p>
+                  </a:txBody>
+                  <a:tcPr>
+                    <a:solidFill>
+                      <a:srgbClr val="F5F5F5"/>
+                    </a:solidFill>
+                  </a:tcPr>
+                </a:tc>
+                <a:tc>
+                  <a:txBody>
+                    <a:bodyPr/>
+                    <a:lstStyle/>
+                    <a:p>
+                      <a:pPr>
+                        <a:defRPr sz="900">
+                          <a:solidFill>
+                            <a:srgbClr val="333333"/>
+                          </a:solidFill>
+                        </a:defRPr>
+                      </a:pPr>
+                      <a:r>
+                        <a:t>[TBD]</a:t>
+                      </a:r>
+                    </a:p>
+                  </a:txBody>
+                  <a:tcPr>
+                    <a:solidFill>
+                      <a:srgbClr val="F5F5F5"/>
+                    </a:solidFill>
+                  </a:tcPr>
+                </a:tc>
+                <a:tc>
+                  <a:txBody>
+                    <a:bodyPr/>
+                    <a:lstStyle/>
+                    <a:p>
+                      <a:pPr>
+                        <a:defRPr sz="900">
+                          <a:solidFill>
+                            <a:srgbClr val="333333"/>
+                          </a:solidFill>
+                        </a:defRPr>
+                      </a:pPr>
+                      <a:r>
+                        <a:t>[TBD]</a:t>
+                      </a:r>
+                    </a:p>
+                  </a:txBody>
+                  <a:tcPr>
+                    <a:solidFill>
+                      <a:srgbClr val="F5F5F5"/>
+                    </a:solidFill>
+                  </a:tcPr>
+                </a:tc>
+              </a:tr>
             </a:tbl>
           </a:graphicData>
         </a:graphic>
       </p:graphicFrame>
-      <p:sp>
-        <p:nvSpPr>
-          <p:cNvPr id="22" name="TextBox 21"/>
+      <p:graphicFrame>
+        <p:nvGraphicFramePr>
+          <p:cNvPr id="6" name="Table 5"/>
+          <p:cNvGraphicFramePr>
+            <a:graphicFrameLocks noGrp="1"/>
+          </p:cNvGraphicFramePr>
+          <p:nvPr/>
+        </p:nvGraphicFramePr>
+        <p:xfrm>
+          <a:off x="4572000" y="1188720"/>
+          <a:ext cx="3657600" cy="1280160"/>
+        </p:xfrm>
+        <a:graphic>
+          <a:graphicData uri="http://schemas.openxmlformats.org/drawingml/2006/table">
+            <a:tbl>
+              <a:tblPr firstRow="1" bandRow="1">
+                <a:tableStyleId>{5C22544A-7EE6-4342-B048-85BDC9FD1C3A}</a:tableStyleId>
+              </a:tblPr>
+              <a:tblGrid>
+                <a:gridCol w="1097280"/>
+                <a:gridCol w="1828800"/>
+                <a:gridCol w="731520"/>
+              </a:tblGrid>
+              <a:tr h="256032">
+                <a:tc>
+                  <a:txBody>
+                    <a:bodyPr/>
+                    <a:lstStyle/>
+                    <a:p>
+                      <a:pPr>
+                        <a:defRPr sz="900" b="1">
+                          <a:solidFill>
+                            <a:srgbClr val="FFFFFF"/>
+                          </a:solidFill>
+                        </a:defRPr>
+                      </a:pPr>
+                      <a:r>
+                        <a:t>Platform</a:t>
+                      </a:r>
+                    </a:p>
+                  </a:txBody>
+                  <a:tcPr>
+                    <a:solidFill>
+                      <a:srgbClr val="1A2B4A"/>
+                    </a:solidFill>
+                  </a:tcPr>
+                </a:tc>
+                <a:tc>
+                  <a:txBody>
+                    <a:bodyPr/>
+                    <a:lstStyle/>
+                    <a:p>
+                      <a:pPr>
+                        <a:defRPr sz="900" b="1">
+                          <a:solidFill>
+                            <a:srgbClr val="FFFFFF"/>
+                          </a:solidFill>
+                        </a:defRPr>
+                      </a:pPr>
+                      <a:r>
+                        <a:t>Episode</a:t>
+                      </a:r>
+                    </a:p>
+                  </a:txBody>
+                  <a:tcPr>
+                    <a:solidFill>
+                      <a:srgbClr val="1A2B4A"/>
+                    </a:solidFill>
+                  </a:tcPr>
+                </a:tc>
+                <a:tc>
+                  <a:txBody>
+                    <a:bodyPr/>
+                    <a:lstStyle/>
+                    <a:p>
+                      <a:pPr>
+                        <a:defRPr sz="900" b="1">
+                          <a:solidFill>
+                            <a:srgbClr val="FFFFFF"/>
+                          </a:solidFill>
+                        </a:defRPr>
+                      </a:pPr>
+                      <a:r>
+                        <a:t>Plays</a:t>
+                      </a:r>
+                    </a:p>
+                  </a:txBody>
+                  <a:tcPr>
+                    <a:solidFill>
+                      <a:srgbClr val="1A2B4A"/>
+                    </a:solidFill>
+                  </a:tcPr>
+                </a:tc>
+              </a:tr>
+              <a:tr h="256032">
+                <a:tc>
+                  <a:txBody>
+                    <a:bodyPr/>
+                    <a:lstStyle/>
+                    <a:p>
+                      <a:pPr>
+                        <a:defRPr sz="900">
+                          <a:solidFill>
+                            <a:srgbClr val="333333"/>
+                          </a:solidFill>
+                        </a:defRPr>
+                      </a:pPr>
+                      <a:r>
+                        <a:t>Spotify</a:t>
+                      </a:r>
+                    </a:p>
+                  </a:txBody>
+                  <a:tcPr/>
+                </a:tc>
+                <a:tc>
+                  <a:txBody>
+                    <a:bodyPr/>
+                    <a:lstStyle/>
+                    <a:p>
+                      <a:pPr>
+                        <a:defRPr sz="900">
+                          <a:solidFill>
+                            <a:srgbClr val="333333"/>
+                          </a:solidFill>
+                        </a:defRPr>
+                      </a:pPr>
+                      <a:r>
+                        <a:t>CS 67. Equify Financial: The</a:t>
+                      </a:r>
+                    </a:p>
+                  </a:txBody>
+                  <a:tcPr/>
+                </a:tc>
+                <a:tc>
+                  <a:txBody>
+                    <a:bodyPr/>
+                    <a:lstStyle/>
+                    <a:p>
+                      <a:pPr>
+                        <a:defRPr sz="900">
+                          <a:solidFill>
+                            <a:srgbClr val="333333"/>
+                          </a:solidFill>
+                        </a:defRPr>
+                      </a:pPr>
+                      <a:r>
+                        <a:t>[TBD]</a:t>
+                      </a:r>
+                    </a:p>
+                  </a:txBody>
+                  <a:tcPr/>
+                </a:tc>
+              </a:tr>
+              <a:tr h="256032">
+                <a:tc>
+                  <a:txBody>
+                    <a:bodyPr/>
+                    <a:lstStyle/>
+                    <a:p>
+                      <a:pPr>
+                        <a:defRPr sz="900">
+                          <a:solidFill>
+                            <a:srgbClr val="333333"/>
+                          </a:solidFill>
+                        </a:defRPr>
+                      </a:pPr>
+                      <a:r>
+                        <a:t>Apple Podcasts</a:t>
+                      </a:r>
+                    </a:p>
+                  </a:txBody>
+                  <a:tcPr>
+                    <a:solidFill>
+                      <a:srgbClr val="F5F5F5"/>
+                    </a:solidFill>
+                  </a:tcPr>
+                </a:tc>
+                <a:tc>
+                  <a:txBody>
+                    <a:bodyPr/>
+                    <a:lstStyle/>
+                    <a:p>
+                      <a:pPr>
+                        <a:defRPr sz="900">
+                          <a:solidFill>
+                            <a:srgbClr val="333333"/>
+                          </a:solidFill>
+                        </a:defRPr>
+                      </a:pPr>
+                      <a:r>
+                        <a:t>CS 67. Equify Financial: The</a:t>
+                      </a:r>
+                    </a:p>
+                  </a:txBody>
+                  <a:tcPr>
+                    <a:solidFill>
+                      <a:srgbClr val="F5F5F5"/>
+                    </a:solidFill>
+                  </a:tcPr>
+                </a:tc>
+                <a:tc>
+                  <a:txBody>
+                    <a:bodyPr/>
+                    <a:lstStyle/>
+                    <a:p>
+                      <a:pPr>
+                        <a:defRPr sz="900">
+                          <a:solidFill>
+                            <a:srgbClr val="333333"/>
+                          </a:solidFill>
+                        </a:defRPr>
+                      </a:pPr>
+                      <a:r>
+                        <a:t>[TBD]</a:t>
+                      </a:r>
+                    </a:p>
+                  </a:txBody>
+                  <a:tcPr>
+                    <a:solidFill>
+                      <a:srgbClr val="F5F5F5"/>
+                    </a:solidFill>
+                  </a:tcPr>
+                </a:tc>
+              </a:tr>
+              <a:tr h="256032">
+                <a:tc>
+                  <a:txBody>
+                    <a:bodyPr/>
+                    <a:lstStyle/>
+                    <a:p>
+                      <a:pPr>
+                        <a:defRPr sz="900">
+                          <a:solidFill>
+                            <a:srgbClr val="333333"/>
+                          </a:solidFill>
+                        </a:defRPr>
+                      </a:pPr>
+                      <a:r>
+                        <a:t>Amazon Music</a:t>
+                      </a:r>
+                    </a:p>
+                  </a:txBody>
+                  <a:tcPr/>
+                </a:tc>
+                <a:tc>
+                  <a:txBody>
+                    <a:bodyPr/>
+                    <a:lstStyle/>
+                    <a:p>
+                      <a:pPr>
+                        <a:defRPr sz="900">
+                          <a:solidFill>
+                            <a:srgbClr val="333333"/>
+                          </a:solidFill>
+                        </a:defRPr>
+                      </a:pPr>
+                      <a:r>
+                        <a:t>CS 67</a:t>
+                      </a:r>
+                    </a:p>
+                  </a:txBody>
+                  <a:tcPr/>
+                </a:tc>
+                <a:tc>
+                  <a:txBody>
+                    <a:bodyPr/>
+                    <a:lstStyle/>
+                    <a:p>
+                      <a:pPr>
+                        <a:defRPr sz="900">
+                          <a:solidFill>
+                            <a:srgbClr val="333333"/>
+                          </a:solidFill>
+                        </a:defRPr>
+                      </a:pPr>
+                      <a:r>
+                        <a:t>[TBD]</a:t>
+                      </a:r>
+                    </a:p>
+                  </a:txBody>
+                  <a:tcPr/>
+                </a:tc>
+              </a:tr>
+              <a:tr h="256032">
+                <a:tc>
+                  <a:txBody>
+                    <a:bodyPr/>
+                    <a:lstStyle/>
+                    <a:p>
+                      <a:pPr>
+                        <a:defRPr sz="900">
+                          <a:solidFill>
+                            <a:srgbClr val="333333"/>
+                          </a:solidFill>
+                        </a:defRPr>
+                      </a:pPr>
+                      <a:r>
+                        <a:t>Rumble</a:t>
+                      </a:r>
+                    </a:p>
+                  </a:txBody>
+                  <a:tcPr>
+                    <a:solidFill>
+                      <a:srgbClr val="F5F5F5"/>
+                    </a:solidFill>
+                  </a:tcPr>
+                </a:tc>
+                <a:tc>
+                  <a:txBody>
+                    <a:bodyPr/>
+                    <a:lstStyle/>
+                    <a:p>
+                      <a:pPr>
+                        <a:defRPr sz="900">
+                          <a:solidFill>
+                            <a:srgbClr val="333333"/>
+                          </a:solidFill>
+                        </a:defRPr>
+                      </a:pPr>
+                      <a:r>
+                        <a:t>CS 67</a:t>
+                      </a:r>
+                    </a:p>
+                  </a:txBody>
+                  <a:tcPr>
+                    <a:solidFill>
+                      <a:srgbClr val="F5F5F5"/>
+                    </a:solidFill>
+                  </a:tcPr>
+                </a:tc>
+                <a:tc>
+                  <a:txBody>
+                    <a:bodyPr/>
+                    <a:lstStyle/>
+                    <a:p>
+                      <a:pPr>
+                        <a:defRPr sz="900">
+                          <a:solidFill>
+                            <a:srgbClr val="333333"/>
+                          </a:solidFill>
+                        </a:defRPr>
+                      </a:pPr>
+                      <a:r>
+                        <a:t>[TBD]</a:t>
+                      </a:r>
+                    </a:p>
+                  </a:txBody>
+                  <a:tcPr>
+                    <a:solidFill>
+                      <a:srgbClr val="F5F5F5"/>
+                    </a:solidFill>
+                  </a:tcPr>
+                </a:tc>
+              </a:tr>
+            </a:tbl>
+          </a:graphicData>
+        </a:graphic>
+      </p:graphicFrame>
+      <p:sp>
+        <p:nvSpPr>
+          <p:cNvPr id="7" name="TextBox 6"/>
           <p:cNvSpPr txBox="1"/>
           <p:nvPr/>
         </p:nvSpPr>
@@ -9206,7 +8671,7 @@
               </a:defRPr>
             </a:pPr>
             <a:r>
-              <a:t>Website &amp; Landing Page Analytics</a:t>
+              <a:t>Email Marketing</a:t>
             </a:r>
           </a:p>
         </p:txBody>
@@ -9241,7 +8706,7 @@
               </a:defRPr>
             </a:pPr>
             <a:r>
-              <a:t>crownsmen.com | UTM Tracking</a:t>
+              <a:t>Constant Contact via Zapier</a:t>
             </a:r>
           </a:p>
         </p:txBody>
@@ -9255,7 +8720,7 @@
         <p:spPr>
           <a:xfrm>
             <a:off x="457200" y="1371600"/>
-            <a:ext cx="1920240" cy="1097280"/>
+            <a:ext cx="1920240" cy="1188720"/>
           </a:xfrm>
           <a:prstGeom prst="rect">
             <a:avLst/>
@@ -9299,8 +8764,8 @@
         </p:nvSpPr>
         <p:spPr>
           <a:xfrm>
-            <a:off x="594360" y="1463040"/>
-            <a:ext cx="1645920" cy="914400"/>
+            <a:off x="566928" y="1444752"/>
+            <a:ext cx="1700784" cy="1042416"/>
           </a:xfrm>
           <a:prstGeom prst="rect">
             <a:avLst/>
@@ -9314,19 +8779,19 @@
           <a:lstStyle/>
           <a:p>
             <a:pPr>
-              <a:defRPr sz="1100">
+              <a:defRPr sz="1000">
                 <a:solidFill>
                   <a:srgbClr val="1A2B4A"/>
                 </a:solidFill>
               </a:defRPr>
             </a:pPr>
             <a:r>
-              <a:t>Page Views</a:t>
+              <a:t>Successful Deliveries</a:t>
             </a:r>
           </a:p>
           <a:p>
             <a:pPr>
-              <a:defRPr sz="2200" b="1">
+              <a:defRPr sz="2000" b="1">
                 <a:solidFill>
                   <a:srgbClr val="1A2B4A"/>
                 </a:solidFill>
@@ -9347,7 +8812,7 @@
         <p:spPr>
           <a:xfrm>
             <a:off x="2560320" y="1371600"/>
-            <a:ext cx="1920240" cy="1097280"/>
+            <a:ext cx="1920240" cy="1188720"/>
           </a:xfrm>
           <a:prstGeom prst="rect">
             <a:avLst/>
@@ -9391,8 +8856,8 @@
         </p:nvSpPr>
         <p:spPr>
           <a:xfrm>
-            <a:off x="2697480" y="1463040"/>
-            <a:ext cx="1645920" cy="914400"/>
+            <a:off x="2670048" y="1444752"/>
+            <a:ext cx="1700784" cy="1042416"/>
           </a:xfrm>
           <a:prstGeom prst="rect">
             <a:avLst/>
@@ -9406,19 +8871,19 @@
           <a:lstStyle/>
           <a:p>
             <a:pPr>
-              <a:defRPr sz="1100">
+              <a:defRPr sz="1000">
                 <a:solidFill>
                   <a:srgbClr val="666666"/>
                 </a:solidFill>
               </a:defRPr>
             </a:pPr>
             <a:r>
-              <a:t>Sessions</a:t>
+              <a:t>Opens</a:t>
             </a:r>
           </a:p>
           <a:p>
             <a:pPr>
-              <a:defRPr sz="1800" b="1">
+              <a:defRPr sz="1600" b="1">
                 <a:solidFill>
                   <a:srgbClr val="1A2B4A"/>
                 </a:solidFill>
@@ -9439,7 +8904,7 @@
         <p:spPr>
           <a:xfrm>
             <a:off x="4663440" y="1371600"/>
-            <a:ext cx="1920240" cy="1097280"/>
+            <a:ext cx="1920240" cy="1188720"/>
           </a:xfrm>
           <a:prstGeom prst="rect">
             <a:avLst/>
@@ -9483,8 +8948,8 @@
         </p:nvSpPr>
         <p:spPr>
           <a:xfrm>
-            <a:off x="4800600" y="1463040"/>
-            <a:ext cx="1645920" cy="914400"/>
+            <a:off x="4773168" y="1444752"/>
+            <a:ext cx="1700784" cy="1042416"/>
           </a:xfrm>
           <a:prstGeom prst="rect">
             <a:avLst/>
@@ -9498,19 +8963,19 @@
           <a:lstStyle/>
           <a:p>
             <a:pPr>
-              <a:defRPr sz="1100">
+              <a:defRPr sz="1000">
                 <a:solidFill>
                   <a:srgbClr val="666666"/>
                 </a:solidFill>
               </a:defRPr>
             </a:pPr>
             <a:r>
-              <a:t>Unique Users</a:t>
+              <a:t>Open Rate</a:t>
             </a:r>
           </a:p>
           <a:p>
             <a:pPr>
-              <a:defRPr sz="1800" b="1">
+              <a:defRPr sz="1600" b="1">
                 <a:solidFill>
                   <a:srgbClr val="1A2B4A"/>
                 </a:solidFill>
@@ -9531,7 +8996,7 @@
         <p:spPr>
           <a:xfrm>
             <a:off x="6766560" y="1371600"/>
-            <a:ext cx="1920240" cy="1097280"/>
+            <a:ext cx="1920240" cy="1188720"/>
           </a:xfrm>
           <a:prstGeom prst="rect">
             <a:avLst/>
@@ -9575,8 +9040,8 @@
         </p:nvSpPr>
         <p:spPr>
           <a:xfrm>
-            <a:off x="6903720" y="1463040"/>
-            <a:ext cx="1645920" cy="914400"/>
+            <a:off x="6876288" y="1444752"/>
+            <a:ext cx="1700784" cy="1042416"/>
           </a:xfrm>
           <a:prstGeom prst="rect">
             <a:avLst/>
@@ -9590,387 +9055,19 @@
           <a:lstStyle/>
           <a:p>
             <a:pPr>
-              <a:defRPr sz="1100">
+              <a:defRPr sz="1000">
                 <a:solidFill>
                   <a:srgbClr val="666666"/>
                 </a:solidFill>
               </a:defRPr>
             </a:pPr>
             <a:r>
-              <a:t>Avg. Duration</a:t>
+              <a:t>Clicks</a:t>
             </a:r>
           </a:p>
           <a:p>
             <a:pPr>
-              <a:defRPr sz="1800" b="1">
-                <a:solidFill>
-                  <a:srgbClr val="1A2B4A"/>
-                </a:solidFill>
-              </a:defRPr>
-            </a:pPr>
-            <a:r>
-              <a:t>[TBD]</a:t>
-            </a:r>
-          </a:p>
-        </p:txBody>
-      </p:sp>
-      <p:sp>
-        <p:nvSpPr>
-          <p:cNvPr id="13" name="Rectangle 12"/>
-          <p:cNvSpPr/>
-          <p:nvPr/>
-        </p:nvSpPr>
-        <p:spPr>
-          <a:xfrm>
-            <a:off x="457200" y="2743200"/>
-            <a:ext cx="1920240" cy="1097280"/>
-          </a:xfrm>
-          <a:prstGeom prst="rect">
-            <a:avLst/>
-          </a:prstGeom>
-          <a:solidFill>
-            <a:srgbClr val="F5F5F5"/>
-          </a:solidFill>
-          <a:ln>
-            <a:solidFill>
-              <a:srgbClr val="DDDDDD"/>
-            </a:solidFill>
-          </a:ln>
-        </p:spPr>
-        <p:style>
-          <a:lnRef idx="1">
-            <a:schemeClr val="accent1"/>
-          </a:lnRef>
-          <a:fillRef idx="3">
-            <a:schemeClr val="accent1"/>
-          </a:fillRef>
-          <a:effectRef idx="2">
-            <a:schemeClr val="accent1"/>
-          </a:effectRef>
-          <a:fontRef idx="minor">
-            <a:schemeClr val="lt1"/>
-          </a:fontRef>
-        </p:style>
-        <p:txBody>
-          <a:bodyPr rtlCol="0" anchor="ctr"/>
-          <a:lstStyle/>
-          <a:p>
-            <a:pPr algn="ctr"/>
-          </a:p>
-        </p:txBody>
-      </p:sp>
-      <p:sp>
-        <p:nvSpPr>
-          <p:cNvPr id="14" name="TextBox 13"/>
-          <p:cNvSpPr txBox="1"/>
-          <p:nvPr/>
-        </p:nvSpPr>
-        <p:spPr>
-          <a:xfrm>
-            <a:off x="594360" y="2834640"/>
-            <a:ext cx="1645920" cy="914400"/>
-          </a:xfrm>
-          <a:prstGeom prst="rect">
-            <a:avLst/>
-          </a:prstGeom>
-          <a:noFill/>
-        </p:spPr>
-        <p:txBody>
-          <a:bodyPr wrap="square">
-            <a:spAutoFit/>
-          </a:bodyPr>
-          <a:lstStyle/>
-          <a:p>
-            <a:pPr>
-              <a:defRPr sz="1100">
-                <a:solidFill>
-                  <a:srgbClr val="666666"/>
-                </a:solidFill>
-              </a:defRPr>
-            </a:pPr>
-            <a:r>
-              <a:t>UTM Clicks</a:t>
-            </a:r>
-          </a:p>
-          <a:p>
-            <a:pPr>
-              <a:defRPr sz="1800" b="1">
-                <a:solidFill>
-                  <a:srgbClr val="1A2B4A"/>
-                </a:solidFill>
-              </a:defRPr>
-            </a:pPr>
-            <a:r>
-              <a:t>[TBD]</a:t>
-            </a:r>
-          </a:p>
-        </p:txBody>
-      </p:sp>
-      <p:sp>
-        <p:nvSpPr>
-          <p:cNvPr id="15" name="Rectangle 14"/>
-          <p:cNvSpPr/>
-          <p:nvPr/>
-        </p:nvSpPr>
-        <p:spPr>
-          <a:xfrm>
-            <a:off x="2560320" y="2743200"/>
-            <a:ext cx="1920240" cy="1097280"/>
-          </a:xfrm>
-          <a:prstGeom prst="rect">
-            <a:avLst/>
-          </a:prstGeom>
-          <a:solidFill>
-            <a:srgbClr val="F5F5F5"/>
-          </a:solidFill>
-          <a:ln>
-            <a:solidFill>
-              <a:srgbClr val="DDDDDD"/>
-            </a:solidFill>
-          </a:ln>
-        </p:spPr>
-        <p:style>
-          <a:lnRef idx="1">
-            <a:schemeClr val="accent1"/>
-          </a:lnRef>
-          <a:fillRef idx="3">
-            <a:schemeClr val="accent1"/>
-          </a:fillRef>
-          <a:effectRef idx="2">
-            <a:schemeClr val="accent1"/>
-          </a:effectRef>
-          <a:fontRef idx="minor">
-            <a:schemeClr val="lt1"/>
-          </a:fontRef>
-        </p:style>
-        <p:txBody>
-          <a:bodyPr rtlCol="0" anchor="ctr"/>
-          <a:lstStyle/>
-          <a:p>
-            <a:pPr algn="ctr"/>
-          </a:p>
-        </p:txBody>
-      </p:sp>
-      <p:sp>
-        <p:nvSpPr>
-          <p:cNvPr id="16" name="TextBox 15"/>
-          <p:cNvSpPr txBox="1"/>
-          <p:nvPr/>
-        </p:nvSpPr>
-        <p:spPr>
-          <a:xfrm>
-            <a:off x="2697480" y="2834640"/>
-            <a:ext cx="1645920" cy="914400"/>
-          </a:xfrm>
-          <a:prstGeom prst="rect">
-            <a:avLst/>
-          </a:prstGeom>
-          <a:noFill/>
-        </p:spPr>
-        <p:txBody>
-          <a:bodyPr wrap="square">
-            <a:spAutoFit/>
-          </a:bodyPr>
-          <a:lstStyle/>
-          <a:p>
-            <a:pPr>
-              <a:defRPr sz="1100">
-                <a:solidFill>
-                  <a:srgbClr val="666666"/>
-                </a:solidFill>
-              </a:defRPr>
-            </a:pPr>
-            <a:r>
-              <a:t>Bounce Rate</a:t>
-            </a:r>
-          </a:p>
-          <a:p>
-            <a:pPr>
-              <a:defRPr sz="1800" b="1">
-                <a:solidFill>
-                  <a:srgbClr val="1A2B4A"/>
-                </a:solidFill>
-              </a:defRPr>
-            </a:pPr>
-            <a:r>
-              <a:t>[TBD]</a:t>
-            </a:r>
-          </a:p>
-        </p:txBody>
-      </p:sp>
-      <p:sp>
-        <p:nvSpPr>
-          <p:cNvPr id="17" name="Rectangle 16"/>
-          <p:cNvSpPr/>
-          <p:nvPr/>
-        </p:nvSpPr>
-        <p:spPr>
-          <a:xfrm>
-            <a:off x="4663440" y="2743200"/>
-            <a:ext cx="1920240" cy="1097280"/>
-          </a:xfrm>
-          <a:prstGeom prst="rect">
-            <a:avLst/>
-          </a:prstGeom>
-          <a:solidFill>
-            <a:srgbClr val="F5F5F5"/>
-          </a:solidFill>
-          <a:ln>
-            <a:solidFill>
-              <a:srgbClr val="DDDDDD"/>
-            </a:solidFill>
-          </a:ln>
-        </p:spPr>
-        <p:style>
-          <a:lnRef idx="1">
-            <a:schemeClr val="accent1"/>
-          </a:lnRef>
-          <a:fillRef idx="3">
-            <a:schemeClr val="accent1"/>
-          </a:fillRef>
-          <a:effectRef idx="2">
-            <a:schemeClr val="accent1"/>
-          </a:effectRef>
-          <a:fontRef idx="minor">
-            <a:schemeClr val="lt1"/>
-          </a:fontRef>
-        </p:style>
-        <p:txBody>
-          <a:bodyPr rtlCol="0" anchor="ctr"/>
-          <a:lstStyle/>
-          <a:p>
-            <a:pPr algn="ctr"/>
-          </a:p>
-        </p:txBody>
-      </p:sp>
-      <p:sp>
-        <p:nvSpPr>
-          <p:cNvPr id="18" name="TextBox 17"/>
-          <p:cNvSpPr txBox="1"/>
-          <p:nvPr/>
-        </p:nvSpPr>
-        <p:spPr>
-          <a:xfrm>
-            <a:off x="4800600" y="2834640"/>
-            <a:ext cx="1645920" cy="914400"/>
-          </a:xfrm>
-          <a:prstGeom prst="rect">
-            <a:avLst/>
-          </a:prstGeom>
-          <a:noFill/>
-        </p:spPr>
-        <p:txBody>
-          <a:bodyPr wrap="square">
-            <a:spAutoFit/>
-          </a:bodyPr>
-          <a:lstStyle/>
-          <a:p>
-            <a:pPr>
-              <a:defRPr sz="1100">
-                <a:solidFill>
-                  <a:srgbClr val="666666"/>
-                </a:solidFill>
-              </a:defRPr>
-            </a:pPr>
-            <a:r>
-              <a:t>Client Site Clicks</a:t>
-            </a:r>
-          </a:p>
-          <a:p>
-            <a:pPr>
-              <a:defRPr sz="1800" b="1">
-                <a:solidFill>
-                  <a:srgbClr val="1A2B4A"/>
-                </a:solidFill>
-              </a:defRPr>
-            </a:pPr>
-            <a:r>
-              <a:t>[TBD]</a:t>
-            </a:r>
-          </a:p>
-        </p:txBody>
-      </p:sp>
-      <p:sp>
-        <p:nvSpPr>
-          <p:cNvPr id="19" name="Rectangle 18"/>
-          <p:cNvSpPr/>
-          <p:nvPr/>
-        </p:nvSpPr>
-        <p:spPr>
-          <a:xfrm>
-            <a:off x="6766560" y="2743200"/>
-            <a:ext cx="1920240" cy="1097280"/>
-          </a:xfrm>
-          <a:prstGeom prst="rect">
-            <a:avLst/>
-          </a:prstGeom>
-          <a:solidFill>
-            <a:srgbClr val="F5F5F5"/>
-          </a:solidFill>
-          <a:ln>
-            <a:solidFill>
-              <a:srgbClr val="DDDDDD"/>
-            </a:solidFill>
-          </a:ln>
-        </p:spPr>
-        <p:style>
-          <a:lnRef idx="1">
-            <a:schemeClr val="accent1"/>
-          </a:lnRef>
-          <a:fillRef idx="3">
-            <a:schemeClr val="accent1"/>
-          </a:fillRef>
-          <a:effectRef idx="2">
-            <a:schemeClr val="accent1"/>
-          </a:effectRef>
-          <a:fontRef idx="minor">
-            <a:schemeClr val="lt1"/>
-          </a:fontRef>
-        </p:style>
-        <p:txBody>
-          <a:bodyPr rtlCol="0" anchor="ctr"/>
-          <a:lstStyle/>
-          <a:p>
-            <a:pPr algn="ctr"/>
-          </a:p>
-        </p:txBody>
-      </p:sp>
-      <p:sp>
-        <p:nvSpPr>
-          <p:cNvPr id="20" name="TextBox 19"/>
-          <p:cNvSpPr txBox="1"/>
-          <p:nvPr/>
-        </p:nvSpPr>
-        <p:spPr>
-          <a:xfrm>
-            <a:off x="6903720" y="2834640"/>
-            <a:ext cx="1645920" cy="914400"/>
-          </a:xfrm>
-          <a:prstGeom prst="rect">
-            <a:avLst/>
-          </a:prstGeom>
-          <a:noFill/>
-        </p:spPr>
-        <p:txBody>
-          <a:bodyPr wrap="square">
-            <a:spAutoFit/>
-          </a:bodyPr>
-          <a:lstStyle/>
-          <a:p>
-            <a:pPr>
-              <a:defRPr sz="1100">
-                <a:solidFill>
-                  <a:srgbClr val="666666"/>
-                </a:solidFill>
-              </a:defRPr>
-            </a:pPr>
-            <a:r>
-              <a:t>Conversion Rate</a:t>
-            </a:r>
-          </a:p>
-          <a:p>
-            <a:pPr>
-              <a:defRPr sz="1800" b="1">
+              <a:defRPr sz="1600" b="1">
                 <a:solidFill>
                   <a:srgbClr val="1A2B4A"/>
                 </a:solidFill>
@@ -9984,15 +9081,15 @@
       </p:sp>
       <p:graphicFrame>
         <p:nvGraphicFramePr>
-          <p:cNvPr id="21" name="Table 20"/>
+          <p:cNvPr id="13" name="Table 12"/>
           <p:cNvGraphicFramePr>
             <a:graphicFrameLocks noGrp="1"/>
           </p:cNvGraphicFramePr>
           <p:nvPr/>
         </p:nvGraphicFramePr>
         <p:xfrm>
-          <a:off x="457200" y="4114800"/>
-          <a:ext cx="7315200" cy="640080"/>
+          <a:off x="457200" y="2926080"/>
+          <a:ext cx="5029200" cy="2048256"/>
         </p:xfrm>
         <a:graphic>
           <a:graphicData uri="http://schemas.openxmlformats.org/drawingml/2006/table">
@@ -10001,26 +9098,24 @@
                 <a:tableStyleId>{5C22544A-7EE6-4342-B048-85BDC9FD1C3A}</a:tableStyleId>
               </a:tblPr>
               <a:tblGrid>
-                <a:gridCol w="1828800"/>
-                <a:gridCol w="1828800"/>
                 <a:gridCol w="2286000"/>
-                <a:gridCol w="1371600"/>
+                <a:gridCol w="2743200"/>
               </a:tblGrid>
-              <a:tr h="320040">
+              <a:tr h="292608">
                 <a:tc>
                   <a:txBody>
                     <a:bodyPr/>
                     <a:lstStyle/>
                     <a:p>
                       <a:pPr>
-                        <a:defRPr sz="1000" b="1">
+                        <a:defRPr sz="900" b="1">
                           <a:solidFill>
                             <a:srgbClr val="FFFFFF"/>
                           </a:solidFill>
                         </a:defRPr>
                       </a:pPr>
                       <a:r>
-                        <a:t>UTM Source</a:t>
+                        <a:t>Metric</a:t>
                       </a:r>
                     </a:p>
                   </a:txBody>
@@ -10036,60 +9131,14 @@
                     <a:lstStyle/>
                     <a:p>
                       <a:pPr>
-                        <a:defRPr sz="1000" b="1">
+                        <a:defRPr sz="900" b="1">
                           <a:solidFill>
                             <a:srgbClr val="FFFFFF"/>
                           </a:solidFill>
                         </a:defRPr>
                       </a:pPr>
                       <a:r>
-                        <a:t>UTM Medium</a:t>
-                      </a:r>
-                    </a:p>
-                  </a:txBody>
-                  <a:tcPr>
-                    <a:solidFill>
-                      <a:srgbClr val="1A2B4A"/>
-                    </a:solidFill>
-                  </a:tcPr>
-                </a:tc>
-                <a:tc>
-                  <a:txBody>
-                    <a:bodyPr/>
-                    <a:lstStyle/>
-                    <a:p>
-                      <a:pPr>
-                        <a:defRPr sz="1000" b="1">
-                          <a:solidFill>
-                            <a:srgbClr val="FFFFFF"/>
-                          </a:solidFill>
-                        </a:defRPr>
-                      </a:pPr>
-                      <a:r>
-                        <a:t>UTM Campaign</a:t>
-                      </a:r>
-                    </a:p>
-                  </a:txBody>
-                  <a:tcPr>
-                    <a:solidFill>
-                      <a:srgbClr val="1A2B4A"/>
-                    </a:solidFill>
-                  </a:tcPr>
-                </a:tc>
-                <a:tc>
-                  <a:txBody>
-                    <a:bodyPr/>
-                    <a:lstStyle/>
-                    <a:p>
-                      <a:pPr>
-                        <a:defRPr sz="1000" b="1">
-                          <a:solidFill>
-                            <a:srgbClr val="FFFFFF"/>
-                          </a:solidFill>
-                        </a:defRPr>
-                      </a:pPr>
-                      <a:r>
-                        <a:t>Clicks</a:t>
+                        <a:t>Value</a:t>
                       </a:r>
                     </a:p>
                   </a:txBody>
@@ -10100,21 +9149,21 @@
                   </a:tcPr>
                 </a:tc>
               </a:tr>
-              <a:tr h="320040">
+              <a:tr h="292608">
                 <a:tc>
                   <a:txBody>
                     <a:bodyPr/>
                     <a:lstStyle/>
                     <a:p>
                       <a:pPr>
-                        <a:defRPr sz="1000">
+                        <a:defRPr sz="900">
                           <a:solidFill>
                             <a:srgbClr val="333333"/>
                           </a:solidFill>
                         </a:defRPr>
                       </a:pPr>
                       <a:r>
-                        <a:t>[TBD]</a:t>
+                        <a:t>Successful Deliveries</a:t>
                       </a:r>
                     </a:p>
                   </a:txBody>
@@ -10126,45 +9175,7 @@
                     <a:lstStyle/>
                     <a:p>
                       <a:pPr>
-                        <a:defRPr sz="1000">
-                          <a:solidFill>
-                            <a:srgbClr val="333333"/>
-                          </a:solidFill>
-                        </a:defRPr>
-                      </a:pPr>
-                      <a:r>
-                        <a:t>[TBD]</a:t>
-                      </a:r>
-                    </a:p>
-                  </a:txBody>
-                  <a:tcPr/>
-                </a:tc>
-                <a:tc>
-                  <a:txBody>
-                    <a:bodyPr/>
-                    <a:lstStyle/>
-                    <a:p>
-                      <a:pPr>
-                        <a:defRPr sz="1000">
-                          <a:solidFill>
-                            <a:srgbClr val="333333"/>
-                          </a:solidFill>
-                        </a:defRPr>
-                      </a:pPr>
-                      <a:r>
-                        <a:t>crownsmen</a:t>
-                      </a:r>
-                    </a:p>
-                  </a:txBody>
-                  <a:tcPr/>
-                </a:tc>
-                <a:tc>
-                  <a:txBody>
-                    <a:bodyPr/>
-                    <a:lstStyle/>
-                    <a:p>
-                      <a:pPr>
-                        <a:defRPr sz="1000">
+                        <a:defRPr sz="900">
                           <a:solidFill>
                             <a:srgbClr val="333333"/>
                           </a:solidFill>
@@ -10178,13 +9189,237 @@
                   <a:tcPr/>
                 </a:tc>
               </a:tr>
+              <a:tr h="292608">
+                <a:tc>
+                  <a:txBody>
+                    <a:bodyPr/>
+                    <a:lstStyle/>
+                    <a:p>
+                      <a:pPr>
+                        <a:defRPr sz="900">
+                          <a:solidFill>
+                            <a:srgbClr val="333333"/>
+                          </a:solidFill>
+                        </a:defRPr>
+                      </a:pPr>
+                      <a:r>
+                        <a:t>Opens</a:t>
+                      </a:r>
+                    </a:p>
+                  </a:txBody>
+                  <a:tcPr>
+                    <a:solidFill>
+                      <a:srgbClr val="F5F5F5"/>
+                    </a:solidFill>
+                  </a:tcPr>
+                </a:tc>
+                <a:tc>
+                  <a:txBody>
+                    <a:bodyPr/>
+                    <a:lstStyle/>
+                    <a:p>
+                      <a:pPr>
+                        <a:defRPr sz="900">
+                          <a:solidFill>
+                            <a:srgbClr val="333333"/>
+                          </a:solidFill>
+                        </a:defRPr>
+                      </a:pPr>
+                      <a:r>
+                        <a:t>[TBD]</a:t>
+                      </a:r>
+                    </a:p>
+                  </a:txBody>
+                  <a:tcPr>
+                    <a:solidFill>
+                      <a:srgbClr val="F5F5F5"/>
+                    </a:solidFill>
+                  </a:tcPr>
+                </a:tc>
+              </a:tr>
+              <a:tr h="292608">
+                <a:tc>
+                  <a:txBody>
+                    <a:bodyPr/>
+                    <a:lstStyle/>
+                    <a:p>
+                      <a:pPr>
+                        <a:defRPr sz="900">
+                          <a:solidFill>
+                            <a:srgbClr val="333333"/>
+                          </a:solidFill>
+                        </a:defRPr>
+                      </a:pPr>
+                      <a:r>
+                        <a:t>Open Rate</a:t>
+                      </a:r>
+                    </a:p>
+                  </a:txBody>
+                  <a:tcPr/>
+                </a:tc>
+                <a:tc>
+                  <a:txBody>
+                    <a:bodyPr/>
+                    <a:lstStyle/>
+                    <a:p>
+                      <a:pPr>
+                        <a:defRPr sz="900">
+                          <a:solidFill>
+                            <a:srgbClr val="333333"/>
+                          </a:solidFill>
+                        </a:defRPr>
+                      </a:pPr>
+                      <a:r>
+                        <a:t>[TBD]</a:t>
+                      </a:r>
+                    </a:p>
+                  </a:txBody>
+                  <a:tcPr/>
+                </a:tc>
+              </a:tr>
+              <a:tr h="292608">
+                <a:tc>
+                  <a:txBody>
+                    <a:bodyPr/>
+                    <a:lstStyle/>
+                    <a:p>
+                      <a:pPr>
+                        <a:defRPr sz="900">
+                          <a:solidFill>
+                            <a:srgbClr val="333333"/>
+                          </a:solidFill>
+                        </a:defRPr>
+                      </a:pPr>
+                      <a:r>
+                        <a:t>Clicks</a:t>
+                      </a:r>
+                    </a:p>
+                  </a:txBody>
+                  <a:tcPr>
+                    <a:solidFill>
+                      <a:srgbClr val="F5F5F5"/>
+                    </a:solidFill>
+                  </a:tcPr>
+                </a:tc>
+                <a:tc>
+                  <a:txBody>
+                    <a:bodyPr/>
+                    <a:lstStyle/>
+                    <a:p>
+                      <a:pPr>
+                        <a:defRPr sz="900">
+                          <a:solidFill>
+                            <a:srgbClr val="333333"/>
+                          </a:solidFill>
+                        </a:defRPr>
+                      </a:pPr>
+                      <a:r>
+                        <a:t>[TBD]</a:t>
+                      </a:r>
+                    </a:p>
+                  </a:txBody>
+                  <a:tcPr>
+                    <a:solidFill>
+                      <a:srgbClr val="F5F5F5"/>
+                    </a:solidFill>
+                  </a:tcPr>
+                </a:tc>
+              </a:tr>
+              <a:tr h="292608">
+                <a:tc>
+                  <a:txBody>
+                    <a:bodyPr/>
+                    <a:lstStyle/>
+                    <a:p>
+                      <a:pPr>
+                        <a:defRPr sz="900">
+                          <a:solidFill>
+                            <a:srgbClr val="333333"/>
+                          </a:solidFill>
+                        </a:defRPr>
+                      </a:pPr>
+                      <a:r>
+                        <a:t>Campaign Name</a:t>
+                      </a:r>
+                    </a:p>
+                  </a:txBody>
+                  <a:tcPr/>
+                </a:tc>
+                <a:tc>
+                  <a:txBody>
+                    <a:bodyPr/>
+                    <a:lstStyle/>
+                    <a:p>
+                      <a:pPr>
+                        <a:defRPr sz="900">
+                          <a:solidFill>
+                            <a:srgbClr val="333333"/>
+                          </a:solidFill>
+                        </a:defRPr>
+                      </a:pPr>
+                      <a:r>
+                        <a:t>[TBD]</a:t>
+                      </a:r>
+                    </a:p>
+                  </a:txBody>
+                  <a:tcPr/>
+                </a:tc>
+              </a:tr>
+              <a:tr h="292608">
+                <a:tc>
+                  <a:txBody>
+                    <a:bodyPr/>
+                    <a:lstStyle/>
+                    <a:p>
+                      <a:pPr>
+                        <a:defRPr sz="900">
+                          <a:solidFill>
+                            <a:srgbClr val="333333"/>
+                          </a:solidFill>
+                        </a:defRPr>
+                      </a:pPr>
+                      <a:r>
+                        <a:t>Subject Line</a:t>
+                      </a:r>
+                    </a:p>
+                  </a:txBody>
+                  <a:tcPr>
+                    <a:solidFill>
+                      <a:srgbClr val="F5F5F5"/>
+                    </a:solidFill>
+                  </a:tcPr>
+                </a:tc>
+                <a:tc>
+                  <a:txBody>
+                    <a:bodyPr/>
+                    <a:lstStyle/>
+                    <a:p>
+                      <a:pPr>
+                        <a:defRPr sz="900">
+                          <a:solidFill>
+                            <a:srgbClr val="333333"/>
+                          </a:solidFill>
+                        </a:defRPr>
+                      </a:pPr>
+                      <a:r>
+                        <a:t>[TBD]</a:t>
+                      </a:r>
+                    </a:p>
+                  </a:txBody>
+                  <a:tcPr>
+                    <a:solidFill>
+                      <a:srgbClr val="F5F5F5"/>
+                    </a:solidFill>
+                  </a:tcPr>
+                </a:tc>
+              </a:tr>
             </a:tbl>
           </a:graphicData>
         </a:graphic>
       </p:graphicFrame>
       <p:sp>
         <p:nvSpPr>
-          <p:cNvPr id="22" name="TextBox 21"/>
+          <p:cNvPr id="14" name="TextBox 13"/>
           <p:cNvSpPr txBox="1"/>
           <p:nvPr/>
         </p:nvSpPr>
@@ -10316,7 +9551,7 @@
               </a:defRPr>
             </a:pPr>
             <a:r>
-              <a:t>Google Ads Performance</a:t>
+              <a:t>Google Ads</a:t>
             </a:r>
           </a:p>
         </p:txBody>
@@ -10351,758 +9586,22 @@
               </a:defRPr>
             </a:pPr>
             <a:r>
-              <a:t>Paid Media</a:t>
-            </a:r>
-          </a:p>
-        </p:txBody>
-      </p:sp>
-      <p:sp>
-        <p:nvSpPr>
-          <p:cNvPr id="5" name="Rectangle 4"/>
-          <p:cNvSpPr/>
-          <p:nvPr/>
-        </p:nvSpPr>
-        <p:spPr>
-          <a:xfrm>
-            <a:off x="457200" y="1371600"/>
-            <a:ext cx="1920240" cy="1097280"/>
-          </a:xfrm>
-          <a:prstGeom prst="rect">
-            <a:avLst/>
-          </a:prstGeom>
-          <a:solidFill>
-            <a:srgbClr val="C9A227"/>
-          </a:solidFill>
-          <a:ln>
-            <a:solidFill>
-              <a:srgbClr val="C9A227"/>
-            </a:solidFill>
-          </a:ln>
-        </p:spPr>
-        <p:style>
-          <a:lnRef idx="1">
-            <a:schemeClr val="accent1"/>
-          </a:lnRef>
-          <a:fillRef idx="3">
-            <a:schemeClr val="accent1"/>
-          </a:fillRef>
-          <a:effectRef idx="2">
-            <a:schemeClr val="accent1"/>
-          </a:effectRef>
-          <a:fontRef idx="minor">
-            <a:schemeClr val="lt1"/>
-          </a:fontRef>
-        </p:style>
-        <p:txBody>
-          <a:bodyPr rtlCol="0" anchor="ctr"/>
-          <a:lstStyle/>
-          <a:p>
-            <a:pPr algn="ctr"/>
-          </a:p>
-        </p:txBody>
-      </p:sp>
-      <p:sp>
-        <p:nvSpPr>
-          <p:cNvPr id="6" name="TextBox 5"/>
-          <p:cNvSpPr txBox="1"/>
-          <p:nvPr/>
-        </p:nvSpPr>
-        <p:spPr>
-          <a:xfrm>
-            <a:off x="594360" y="1463040"/>
-            <a:ext cx="1645920" cy="914400"/>
-          </a:xfrm>
-          <a:prstGeom prst="rect">
-            <a:avLst/>
-          </a:prstGeom>
-          <a:noFill/>
-        </p:spPr>
-        <p:txBody>
-          <a:bodyPr wrap="square">
-            <a:spAutoFit/>
-          </a:bodyPr>
-          <a:lstStyle/>
-          <a:p>
-            <a:pPr>
-              <a:defRPr sz="1100">
-                <a:solidFill>
-                  <a:srgbClr val="1A2B4A"/>
-                </a:solidFill>
-              </a:defRPr>
-            </a:pPr>
-            <a:r>
-              <a:t>Impressions</a:t>
-            </a:r>
-          </a:p>
-          <a:p>
-            <a:pPr>
-              <a:defRPr sz="2200" b="1">
-                <a:solidFill>
-                  <a:srgbClr val="1A2B4A"/>
-                </a:solidFill>
-              </a:defRPr>
-            </a:pPr>
-            <a:r>
-              <a:t>[TBD]</a:t>
-            </a:r>
-          </a:p>
-        </p:txBody>
-      </p:sp>
-      <p:sp>
-        <p:nvSpPr>
-          <p:cNvPr id="7" name="Rectangle 6"/>
-          <p:cNvSpPr/>
-          <p:nvPr/>
-        </p:nvSpPr>
-        <p:spPr>
-          <a:xfrm>
-            <a:off x="2560320" y="1371600"/>
-            <a:ext cx="1920240" cy="1097280"/>
-          </a:xfrm>
-          <a:prstGeom prst="rect">
-            <a:avLst/>
-          </a:prstGeom>
-          <a:solidFill>
-            <a:srgbClr val="F5F5F5"/>
-          </a:solidFill>
-          <a:ln>
-            <a:solidFill>
-              <a:srgbClr val="DDDDDD"/>
-            </a:solidFill>
-          </a:ln>
-        </p:spPr>
-        <p:style>
-          <a:lnRef idx="1">
-            <a:schemeClr val="accent1"/>
-          </a:lnRef>
-          <a:fillRef idx="3">
-            <a:schemeClr val="accent1"/>
-          </a:fillRef>
-          <a:effectRef idx="2">
-            <a:schemeClr val="accent1"/>
-          </a:effectRef>
-          <a:fontRef idx="minor">
-            <a:schemeClr val="lt1"/>
-          </a:fontRef>
-        </p:style>
-        <p:txBody>
-          <a:bodyPr rtlCol="0" anchor="ctr"/>
-          <a:lstStyle/>
-          <a:p>
-            <a:pPr algn="ctr"/>
-          </a:p>
-        </p:txBody>
-      </p:sp>
-      <p:sp>
-        <p:nvSpPr>
-          <p:cNvPr id="8" name="TextBox 7"/>
-          <p:cNvSpPr txBox="1"/>
-          <p:nvPr/>
-        </p:nvSpPr>
-        <p:spPr>
-          <a:xfrm>
-            <a:off x="2697480" y="1463040"/>
-            <a:ext cx="1645920" cy="914400"/>
-          </a:xfrm>
-          <a:prstGeom prst="rect">
-            <a:avLst/>
-          </a:prstGeom>
-          <a:noFill/>
-        </p:spPr>
-        <p:txBody>
-          <a:bodyPr wrap="square">
-            <a:spAutoFit/>
-          </a:bodyPr>
-          <a:lstStyle/>
-          <a:p>
-            <a:pPr>
-              <a:defRPr sz="1100">
-                <a:solidFill>
-                  <a:srgbClr val="666666"/>
-                </a:solidFill>
-              </a:defRPr>
-            </a:pPr>
-            <a:r>
-              <a:t>Clicks</a:t>
-            </a:r>
-          </a:p>
-          <a:p>
-            <a:pPr>
-              <a:defRPr sz="1800" b="1">
-                <a:solidFill>
-                  <a:srgbClr val="1A2B4A"/>
-                </a:solidFill>
-              </a:defRPr>
-            </a:pPr>
-            <a:r>
-              <a:t>[TBD]</a:t>
-            </a:r>
-          </a:p>
-        </p:txBody>
-      </p:sp>
-      <p:sp>
-        <p:nvSpPr>
-          <p:cNvPr id="9" name="Rectangle 8"/>
-          <p:cNvSpPr/>
-          <p:nvPr/>
-        </p:nvSpPr>
-        <p:spPr>
-          <a:xfrm>
-            <a:off x="4663440" y="1371600"/>
-            <a:ext cx="1920240" cy="1097280"/>
-          </a:xfrm>
-          <a:prstGeom prst="rect">
-            <a:avLst/>
-          </a:prstGeom>
-          <a:solidFill>
-            <a:srgbClr val="F5F5F5"/>
-          </a:solidFill>
-          <a:ln>
-            <a:solidFill>
-              <a:srgbClr val="DDDDDD"/>
-            </a:solidFill>
-          </a:ln>
-        </p:spPr>
-        <p:style>
-          <a:lnRef idx="1">
-            <a:schemeClr val="accent1"/>
-          </a:lnRef>
-          <a:fillRef idx="3">
-            <a:schemeClr val="accent1"/>
-          </a:fillRef>
-          <a:effectRef idx="2">
-            <a:schemeClr val="accent1"/>
-          </a:effectRef>
-          <a:fontRef idx="minor">
-            <a:schemeClr val="lt1"/>
-          </a:fontRef>
-        </p:style>
-        <p:txBody>
-          <a:bodyPr rtlCol="0" anchor="ctr"/>
-          <a:lstStyle/>
-          <a:p>
-            <a:pPr algn="ctr"/>
-          </a:p>
-        </p:txBody>
-      </p:sp>
-      <p:sp>
-        <p:nvSpPr>
-          <p:cNvPr id="10" name="TextBox 9"/>
-          <p:cNvSpPr txBox="1"/>
-          <p:nvPr/>
-        </p:nvSpPr>
-        <p:spPr>
-          <a:xfrm>
-            <a:off x="4800600" y="1463040"/>
-            <a:ext cx="1645920" cy="914400"/>
-          </a:xfrm>
-          <a:prstGeom prst="rect">
-            <a:avLst/>
-          </a:prstGeom>
-          <a:noFill/>
-        </p:spPr>
-        <p:txBody>
-          <a:bodyPr wrap="square">
-            <a:spAutoFit/>
-          </a:bodyPr>
-          <a:lstStyle/>
-          <a:p>
-            <a:pPr>
-              <a:defRPr sz="1100">
-                <a:solidFill>
-                  <a:srgbClr val="666666"/>
-                </a:solidFill>
-              </a:defRPr>
-            </a:pPr>
-            <a:r>
-              <a:t>CTR</a:t>
-            </a:r>
-          </a:p>
-          <a:p>
-            <a:pPr>
-              <a:defRPr sz="1800" b="1">
-                <a:solidFill>
-                  <a:srgbClr val="1A2B4A"/>
-                </a:solidFill>
-              </a:defRPr>
-            </a:pPr>
-            <a:r>
-              <a:t>[TBD]</a:t>
-            </a:r>
-          </a:p>
-        </p:txBody>
-      </p:sp>
-      <p:sp>
-        <p:nvSpPr>
-          <p:cNvPr id="11" name="Rectangle 10"/>
-          <p:cNvSpPr/>
-          <p:nvPr/>
-        </p:nvSpPr>
-        <p:spPr>
-          <a:xfrm>
-            <a:off x="6766560" y="1371600"/>
-            <a:ext cx="1920240" cy="1097280"/>
-          </a:xfrm>
-          <a:prstGeom prst="rect">
-            <a:avLst/>
-          </a:prstGeom>
-          <a:solidFill>
-            <a:srgbClr val="F5F5F5"/>
-          </a:solidFill>
-          <a:ln>
-            <a:solidFill>
-              <a:srgbClr val="DDDDDD"/>
-            </a:solidFill>
-          </a:ln>
-        </p:spPr>
-        <p:style>
-          <a:lnRef idx="1">
-            <a:schemeClr val="accent1"/>
-          </a:lnRef>
-          <a:fillRef idx="3">
-            <a:schemeClr val="accent1"/>
-          </a:fillRef>
-          <a:effectRef idx="2">
-            <a:schemeClr val="accent1"/>
-          </a:effectRef>
-          <a:fontRef idx="minor">
-            <a:schemeClr val="lt1"/>
-          </a:fontRef>
-        </p:style>
-        <p:txBody>
-          <a:bodyPr rtlCol="0" anchor="ctr"/>
-          <a:lstStyle/>
-          <a:p>
-            <a:pPr algn="ctr"/>
-          </a:p>
-        </p:txBody>
-      </p:sp>
-      <p:sp>
-        <p:nvSpPr>
-          <p:cNvPr id="12" name="TextBox 11"/>
-          <p:cNvSpPr txBox="1"/>
-          <p:nvPr/>
-        </p:nvSpPr>
-        <p:spPr>
-          <a:xfrm>
-            <a:off x="6903720" y="1463040"/>
-            <a:ext cx="1645920" cy="914400"/>
-          </a:xfrm>
-          <a:prstGeom prst="rect">
-            <a:avLst/>
-          </a:prstGeom>
-          <a:noFill/>
-        </p:spPr>
-        <p:txBody>
-          <a:bodyPr wrap="square">
-            <a:spAutoFit/>
-          </a:bodyPr>
-          <a:lstStyle/>
-          <a:p>
-            <a:pPr>
-              <a:defRPr sz="1100">
-                <a:solidFill>
-                  <a:srgbClr val="666666"/>
-                </a:solidFill>
-              </a:defRPr>
-            </a:pPr>
-            <a:r>
-              <a:t>Cost</a:t>
-            </a:r>
-          </a:p>
-          <a:p>
-            <a:pPr>
-              <a:defRPr sz="1800" b="1">
-                <a:solidFill>
-                  <a:srgbClr val="1A2B4A"/>
-                </a:solidFill>
-              </a:defRPr>
-            </a:pPr>
-            <a:r>
-              <a:t>[TBD]</a:t>
-            </a:r>
-          </a:p>
-        </p:txBody>
-      </p:sp>
-      <p:sp>
-        <p:nvSpPr>
-          <p:cNvPr id="13" name="Rectangle 12"/>
-          <p:cNvSpPr/>
-          <p:nvPr/>
-        </p:nvSpPr>
-        <p:spPr>
-          <a:xfrm>
-            <a:off x="457200" y="2743200"/>
-            <a:ext cx="1920240" cy="1097280"/>
-          </a:xfrm>
-          <a:prstGeom prst="rect">
-            <a:avLst/>
-          </a:prstGeom>
-          <a:solidFill>
-            <a:srgbClr val="F5F5F5"/>
-          </a:solidFill>
-          <a:ln>
-            <a:solidFill>
-              <a:srgbClr val="DDDDDD"/>
-            </a:solidFill>
-          </a:ln>
-        </p:spPr>
-        <p:style>
-          <a:lnRef idx="1">
-            <a:schemeClr val="accent1"/>
-          </a:lnRef>
-          <a:fillRef idx="3">
-            <a:schemeClr val="accent1"/>
-          </a:fillRef>
-          <a:effectRef idx="2">
-            <a:schemeClr val="accent1"/>
-          </a:effectRef>
-          <a:fontRef idx="minor">
-            <a:schemeClr val="lt1"/>
-          </a:fontRef>
-        </p:style>
-        <p:txBody>
-          <a:bodyPr rtlCol="0" anchor="ctr"/>
-          <a:lstStyle/>
-          <a:p>
-            <a:pPr algn="ctr"/>
-          </a:p>
-        </p:txBody>
-      </p:sp>
-      <p:sp>
-        <p:nvSpPr>
-          <p:cNvPr id="14" name="TextBox 13"/>
-          <p:cNvSpPr txBox="1"/>
-          <p:nvPr/>
-        </p:nvSpPr>
-        <p:spPr>
-          <a:xfrm>
-            <a:off x="594360" y="2834640"/>
-            <a:ext cx="1645920" cy="914400"/>
-          </a:xfrm>
-          <a:prstGeom prst="rect">
-            <a:avLst/>
-          </a:prstGeom>
-          <a:noFill/>
-        </p:spPr>
-        <p:txBody>
-          <a:bodyPr wrap="square">
-            <a:spAutoFit/>
-          </a:bodyPr>
-          <a:lstStyle/>
-          <a:p>
-            <a:pPr>
-              <a:defRPr sz="1100">
-                <a:solidFill>
-                  <a:srgbClr val="666666"/>
-                </a:solidFill>
-              </a:defRPr>
-            </a:pPr>
-            <a:r>
-              <a:t>Conversions</a:t>
-            </a:r>
-          </a:p>
-          <a:p>
-            <a:pPr>
-              <a:defRPr sz="1800" b="1">
-                <a:solidFill>
-                  <a:srgbClr val="1A2B4A"/>
-                </a:solidFill>
-              </a:defRPr>
-            </a:pPr>
-            <a:r>
-              <a:t>[TBD]</a:t>
-            </a:r>
-          </a:p>
-        </p:txBody>
-      </p:sp>
-      <p:sp>
-        <p:nvSpPr>
-          <p:cNvPr id="15" name="Rectangle 14"/>
-          <p:cNvSpPr/>
-          <p:nvPr/>
-        </p:nvSpPr>
-        <p:spPr>
-          <a:xfrm>
-            <a:off x="2560320" y="2743200"/>
-            <a:ext cx="1920240" cy="1097280"/>
-          </a:xfrm>
-          <a:prstGeom prst="rect">
-            <a:avLst/>
-          </a:prstGeom>
-          <a:solidFill>
-            <a:srgbClr val="F5F5F5"/>
-          </a:solidFill>
-          <a:ln>
-            <a:solidFill>
-              <a:srgbClr val="DDDDDD"/>
-            </a:solidFill>
-          </a:ln>
-        </p:spPr>
-        <p:style>
-          <a:lnRef idx="1">
-            <a:schemeClr val="accent1"/>
-          </a:lnRef>
-          <a:fillRef idx="3">
-            <a:schemeClr val="accent1"/>
-          </a:fillRef>
-          <a:effectRef idx="2">
-            <a:schemeClr val="accent1"/>
-          </a:effectRef>
-          <a:fontRef idx="minor">
-            <a:schemeClr val="lt1"/>
-          </a:fontRef>
-        </p:style>
-        <p:txBody>
-          <a:bodyPr rtlCol="0" anchor="ctr"/>
-          <a:lstStyle/>
-          <a:p>
-            <a:pPr algn="ctr"/>
-          </a:p>
-        </p:txBody>
-      </p:sp>
-      <p:sp>
-        <p:nvSpPr>
-          <p:cNvPr id="16" name="TextBox 15"/>
-          <p:cNvSpPr txBox="1"/>
-          <p:nvPr/>
-        </p:nvSpPr>
-        <p:spPr>
-          <a:xfrm>
-            <a:off x="2697480" y="2834640"/>
-            <a:ext cx="1645920" cy="914400"/>
-          </a:xfrm>
-          <a:prstGeom prst="rect">
-            <a:avLst/>
-          </a:prstGeom>
-          <a:noFill/>
-        </p:spPr>
-        <p:txBody>
-          <a:bodyPr wrap="square">
-            <a:spAutoFit/>
-          </a:bodyPr>
-          <a:lstStyle/>
-          <a:p>
-            <a:pPr>
-              <a:defRPr sz="1100">
-                <a:solidFill>
-                  <a:srgbClr val="666666"/>
-                </a:solidFill>
-              </a:defRPr>
-            </a:pPr>
-            <a:r>
-              <a:t>Cost/Conv.</a:t>
-            </a:r>
-          </a:p>
-          <a:p>
-            <a:pPr>
-              <a:defRPr sz="1800" b="1">
-                <a:solidFill>
-                  <a:srgbClr val="1A2B4A"/>
-                </a:solidFill>
-              </a:defRPr>
-            </a:pPr>
-            <a:r>
-              <a:t>[TBD]</a:t>
-            </a:r>
-          </a:p>
-        </p:txBody>
-      </p:sp>
-      <p:sp>
-        <p:nvSpPr>
-          <p:cNvPr id="17" name="Rectangle 16"/>
-          <p:cNvSpPr/>
-          <p:nvPr/>
-        </p:nvSpPr>
-        <p:spPr>
-          <a:xfrm>
-            <a:off x="4663440" y="2743200"/>
-            <a:ext cx="1920240" cy="1097280"/>
-          </a:xfrm>
-          <a:prstGeom prst="rect">
-            <a:avLst/>
-          </a:prstGeom>
-          <a:solidFill>
-            <a:srgbClr val="F5F5F5"/>
-          </a:solidFill>
-          <a:ln>
-            <a:solidFill>
-              <a:srgbClr val="DDDDDD"/>
-            </a:solidFill>
-          </a:ln>
-        </p:spPr>
-        <p:style>
-          <a:lnRef idx="1">
-            <a:schemeClr val="accent1"/>
-          </a:lnRef>
-          <a:fillRef idx="3">
-            <a:schemeClr val="accent1"/>
-          </a:fillRef>
-          <a:effectRef idx="2">
-            <a:schemeClr val="accent1"/>
-          </a:effectRef>
-          <a:fontRef idx="minor">
-            <a:schemeClr val="lt1"/>
-          </a:fontRef>
-        </p:style>
-        <p:txBody>
-          <a:bodyPr rtlCol="0" anchor="ctr"/>
-          <a:lstStyle/>
-          <a:p>
-            <a:pPr algn="ctr"/>
-          </a:p>
-        </p:txBody>
-      </p:sp>
-      <p:sp>
-        <p:nvSpPr>
-          <p:cNvPr id="18" name="TextBox 17"/>
-          <p:cNvSpPr txBox="1"/>
-          <p:nvPr/>
-        </p:nvSpPr>
-        <p:spPr>
-          <a:xfrm>
-            <a:off x="4800600" y="2834640"/>
-            <a:ext cx="1645920" cy="914400"/>
-          </a:xfrm>
-          <a:prstGeom prst="rect">
-            <a:avLst/>
-          </a:prstGeom>
-          <a:noFill/>
-        </p:spPr>
-        <p:txBody>
-          <a:bodyPr wrap="square">
-            <a:spAutoFit/>
-          </a:bodyPr>
-          <a:lstStyle/>
-          <a:p>
-            <a:pPr>
-              <a:defRPr sz="1100">
-                <a:solidFill>
-                  <a:srgbClr val="666666"/>
-                </a:solidFill>
-              </a:defRPr>
-            </a:pPr>
-            <a:r>
-              <a:t>Avg. CPC</a:t>
-            </a:r>
-          </a:p>
-          <a:p>
-            <a:pPr>
-              <a:defRPr sz="1800" b="1">
-                <a:solidFill>
-                  <a:srgbClr val="1A2B4A"/>
-                </a:solidFill>
-              </a:defRPr>
-            </a:pPr>
-            <a:r>
-              <a:t>[TBD]</a:t>
-            </a:r>
-          </a:p>
-        </p:txBody>
-      </p:sp>
-      <p:sp>
-        <p:nvSpPr>
-          <p:cNvPr id="19" name="Rectangle 18"/>
-          <p:cNvSpPr/>
-          <p:nvPr/>
-        </p:nvSpPr>
-        <p:spPr>
-          <a:xfrm>
-            <a:off x="6766560" y="2743200"/>
-            <a:ext cx="1920240" cy="1097280"/>
-          </a:xfrm>
-          <a:prstGeom prst="rect">
-            <a:avLst/>
-          </a:prstGeom>
-          <a:solidFill>
-            <a:srgbClr val="F5F5F5"/>
-          </a:solidFill>
-          <a:ln>
-            <a:solidFill>
-              <a:srgbClr val="DDDDDD"/>
-            </a:solidFill>
-          </a:ln>
-        </p:spPr>
-        <p:style>
-          <a:lnRef idx="1">
-            <a:schemeClr val="accent1"/>
-          </a:lnRef>
-          <a:fillRef idx="3">
-            <a:schemeClr val="accent1"/>
-          </a:fillRef>
-          <a:effectRef idx="2">
-            <a:schemeClr val="accent1"/>
-          </a:effectRef>
-          <a:fontRef idx="minor">
-            <a:schemeClr val="lt1"/>
-          </a:fontRef>
-        </p:style>
-        <p:txBody>
-          <a:bodyPr rtlCol="0" anchor="ctr"/>
-          <a:lstStyle/>
-          <a:p>
-            <a:pPr algn="ctr"/>
-          </a:p>
-        </p:txBody>
-      </p:sp>
-      <p:sp>
-        <p:nvSpPr>
-          <p:cNvPr id="20" name="TextBox 19"/>
-          <p:cNvSpPr txBox="1"/>
-          <p:nvPr/>
-        </p:nvSpPr>
-        <p:spPr>
-          <a:xfrm>
-            <a:off x="6903720" y="2834640"/>
-            <a:ext cx="1645920" cy="914400"/>
-          </a:xfrm>
-          <a:prstGeom prst="rect">
-            <a:avLst/>
-          </a:prstGeom>
-          <a:noFill/>
-        </p:spPr>
-        <p:txBody>
-          <a:bodyPr wrap="square">
-            <a:spAutoFit/>
-          </a:bodyPr>
-          <a:lstStyle/>
-          <a:p>
-            <a:pPr>
-              <a:defRPr sz="1100">
-                <a:solidFill>
-                  <a:srgbClr val="666666"/>
-                </a:solidFill>
-              </a:defRPr>
-            </a:pPr>
-            <a:r>
-              <a:t>Video Views</a:t>
-            </a:r>
-          </a:p>
-          <a:p>
-            <a:pPr>
-              <a:defRPr sz="1800" b="1">
-                <a:solidFill>
-                  <a:srgbClr val="1A2B4A"/>
-                </a:solidFill>
-              </a:defRPr>
-            </a:pPr>
-            <a:r>
-              <a:t>[TBD]</a:t>
+              <a:t>Paid Media via Zapier</a:t>
             </a:r>
           </a:p>
         </p:txBody>
       </p:sp>
       <p:graphicFrame>
         <p:nvGraphicFramePr>
-          <p:cNvPr id="21" name="Table 20"/>
+          <p:cNvPr id="5" name="Table 4"/>
           <p:cNvGraphicFramePr>
             <a:graphicFrameLocks noGrp="1"/>
           </p:cNvGraphicFramePr>
           <p:nvPr/>
         </p:nvGraphicFramePr>
         <p:xfrm>
-          <a:off x="457200" y="4114800"/>
-          <a:ext cx="7955280" cy="640080"/>
+          <a:off x="365760" y="1280160"/>
+          <a:ext cx="7772400" cy="640080"/>
         </p:xfrm>
         <a:graphic>
           <a:graphicData uri="http://schemas.openxmlformats.org/drawingml/2006/table">
@@ -11112,10 +9611,8 @@
               </a:tblPr>
               <a:tblGrid>
                 <a:gridCol w="2286000"/>
-                <a:gridCol w="1828800"/>
                 <a:gridCol w="1371600"/>
-                <a:gridCol w="1097280"/>
-                <a:gridCol w="1371600"/>
+                <a:gridCol w="4114800"/>
               </a:tblGrid>
               <a:tr h="320040">
                 <a:tc>
@@ -11124,14 +9621,14 @@
                     <a:lstStyle/>
                     <a:p>
                       <a:pPr>
-                        <a:defRPr sz="1000" b="1">
+                        <a:defRPr sz="900" b="1">
                           <a:solidFill>
                             <a:srgbClr val="FFFFFF"/>
                           </a:solidFill>
                         </a:defRPr>
                       </a:pPr>
                       <a:r>
-                        <a:t>Campaign</a:t>
+                        <a:t>Ad / Campaign</a:t>
                       </a:r>
                     </a:p>
                   </a:txBody>
@@ -11147,14 +9644,14 @@
                     <a:lstStyle/>
                     <a:p>
                       <a:pPr>
-                        <a:defRPr sz="1000" b="1">
+                        <a:defRPr sz="900" b="1">
                           <a:solidFill>
                             <a:srgbClr val="FFFFFF"/>
                           </a:solidFill>
                         </a:defRPr>
                       </a:pPr>
                       <a:r>
-                        <a:t>Ad Group</a:t>
+                        <a:t>Clicks to URL</a:t>
                       </a:r>
                     </a:p>
                   </a:txBody>
@@ -11170,60 +9667,14 @@
                     <a:lstStyle/>
                     <a:p>
                       <a:pPr>
-                        <a:defRPr sz="1000" b="1">
+                        <a:defRPr sz="900" b="1">
                           <a:solidFill>
                             <a:srgbClr val="FFFFFF"/>
                           </a:solidFill>
                         </a:defRPr>
                       </a:pPr>
                       <a:r>
-                        <a:t>Impressions</a:t>
-                      </a:r>
-                    </a:p>
-                  </a:txBody>
-                  <a:tcPr>
-                    <a:solidFill>
-                      <a:srgbClr val="1A2B4A"/>
-                    </a:solidFill>
-                  </a:tcPr>
-                </a:tc>
-                <a:tc>
-                  <a:txBody>
-                    <a:bodyPr/>
-                    <a:lstStyle/>
-                    <a:p>
-                      <a:pPr>
-                        <a:defRPr sz="1000" b="1">
-                          <a:solidFill>
-                            <a:srgbClr val="FFFFFF"/>
-                          </a:solidFill>
-                        </a:defRPr>
-                      </a:pPr>
-                      <a:r>
-                        <a:t>Clicks</a:t>
-                      </a:r>
-                    </a:p>
-                  </a:txBody>
-                  <a:tcPr>
-                    <a:solidFill>
-                      <a:srgbClr val="1A2B4A"/>
-                    </a:solidFill>
-                  </a:tcPr>
-                </a:tc>
-                <a:tc>
-                  <a:txBody>
-                    <a:bodyPr/>
-                    <a:lstStyle/>
-                    <a:p>
-                      <a:pPr>
-                        <a:defRPr sz="1000" b="1">
-                          <a:solidFill>
-                            <a:srgbClr val="FFFFFF"/>
-                          </a:solidFill>
-                        </a:defRPr>
-                      </a:pPr>
-                      <a:r>
-                        <a:t>Cost</a:t>
+                        <a:t>Landing Page URL</a:t>
                       </a:r>
                     </a:p>
                   </a:txBody>
@@ -11241,7 +9692,7 @@
                     <a:lstStyle/>
                     <a:p>
                       <a:pPr>
-                        <a:defRPr sz="1000">
+                        <a:defRPr sz="900">
                           <a:solidFill>
                             <a:srgbClr val="333333"/>
                           </a:solidFill>
@@ -11260,7 +9711,7 @@
                     <a:lstStyle/>
                     <a:p>
                       <a:pPr>
-                        <a:defRPr sz="1000">
+                        <a:defRPr sz="900">
                           <a:solidFill>
                             <a:srgbClr val="333333"/>
                           </a:solidFill>
@@ -11279,52 +9730,14 @@
                     <a:lstStyle/>
                     <a:p>
                       <a:pPr>
-                        <a:defRPr sz="1000">
+                        <a:defRPr sz="900">
                           <a:solidFill>
                             <a:srgbClr val="333333"/>
                           </a:solidFill>
                         </a:defRPr>
                       </a:pPr>
                       <a:r>
-                        <a:t>[TBD]</a:t>
-                      </a:r>
-                    </a:p>
-                  </a:txBody>
-                  <a:tcPr/>
-                </a:tc>
-                <a:tc>
-                  <a:txBody>
-                    <a:bodyPr/>
-                    <a:lstStyle/>
-                    <a:p>
-                      <a:pPr>
-                        <a:defRPr sz="1000">
-                          <a:solidFill>
-                            <a:srgbClr val="333333"/>
-                          </a:solidFill>
-                        </a:defRPr>
-                      </a:pPr>
-                      <a:r>
-                        <a:t>[TBD]</a:t>
-                      </a:r>
-                    </a:p>
-                  </a:txBody>
-                  <a:tcPr/>
-                </a:tc>
-                <a:tc>
-                  <a:txBody>
-                    <a:bodyPr/>
-                    <a:lstStyle/>
-                    <a:p>
-                      <a:pPr>
-                        <a:defRPr sz="1000">
-                          <a:solidFill>
-                            <a:srgbClr val="333333"/>
-                          </a:solidFill>
-                        </a:defRPr>
-                      </a:pPr>
-                      <a:r>
-                        <a:t>[TBD]</a:t>
+                        <a:t>https://www.crownsmen.com/equify-financial-co</a:t>
                       </a:r>
                     </a:p>
                   </a:txBody>
@@ -11337,7 +9750,375 @@
       </p:graphicFrame>
       <p:sp>
         <p:nvSpPr>
-          <p:cNvPr id="22" name="TextBox 21"/>
+          <p:cNvPr id="6" name="Rectangle 5"/>
+          <p:cNvSpPr/>
+          <p:nvPr/>
+        </p:nvSpPr>
+        <p:spPr>
+          <a:xfrm>
+            <a:off x="457200" y="4114800"/>
+            <a:ext cx="2011680" cy="914400"/>
+          </a:xfrm>
+          <a:prstGeom prst="rect">
+            <a:avLst/>
+          </a:prstGeom>
+          <a:solidFill>
+            <a:srgbClr val="C9A227"/>
+          </a:solidFill>
+          <a:ln>
+            <a:solidFill>
+              <a:srgbClr val="C9A227"/>
+            </a:solidFill>
+          </a:ln>
+        </p:spPr>
+        <p:style>
+          <a:lnRef idx="1">
+            <a:schemeClr val="accent1"/>
+          </a:lnRef>
+          <a:fillRef idx="3">
+            <a:schemeClr val="accent1"/>
+          </a:fillRef>
+          <a:effectRef idx="2">
+            <a:schemeClr val="accent1"/>
+          </a:effectRef>
+          <a:fontRef idx="minor">
+            <a:schemeClr val="lt1"/>
+          </a:fontRef>
+        </p:style>
+        <p:txBody>
+          <a:bodyPr rtlCol="0" anchor="ctr"/>
+          <a:lstStyle/>
+          <a:p>
+            <a:pPr algn="ctr"/>
+          </a:p>
+        </p:txBody>
+      </p:sp>
+      <p:sp>
+        <p:nvSpPr>
+          <p:cNvPr id="7" name="TextBox 6"/>
+          <p:cNvSpPr txBox="1"/>
+          <p:nvPr/>
+        </p:nvSpPr>
+        <p:spPr>
+          <a:xfrm>
+            <a:off x="566928" y="4187952"/>
+            <a:ext cx="1792224" cy="768096"/>
+          </a:xfrm>
+          <a:prstGeom prst="rect">
+            <a:avLst/>
+          </a:prstGeom>
+          <a:noFill/>
+        </p:spPr>
+        <p:txBody>
+          <a:bodyPr wrap="square">
+            <a:spAutoFit/>
+          </a:bodyPr>
+          <a:lstStyle/>
+          <a:p>
+            <a:pPr>
+              <a:defRPr sz="1000">
+                <a:solidFill>
+                  <a:srgbClr val="1A2B4A"/>
+                </a:solidFill>
+              </a:defRPr>
+            </a:pPr>
+            <a:r>
+              <a:t>Total Clicks</a:t>
+            </a:r>
+          </a:p>
+          <a:p>
+            <a:pPr>
+              <a:defRPr sz="2000" b="1">
+                <a:solidFill>
+                  <a:srgbClr val="1A2B4A"/>
+                </a:solidFill>
+              </a:defRPr>
+            </a:pPr>
+            <a:r>
+              <a:t>[TBD]</a:t>
+            </a:r>
+          </a:p>
+        </p:txBody>
+      </p:sp>
+      <p:sp>
+        <p:nvSpPr>
+          <p:cNvPr id="8" name="Rectangle 7"/>
+          <p:cNvSpPr/>
+          <p:nvPr/>
+        </p:nvSpPr>
+        <p:spPr>
+          <a:xfrm>
+            <a:off x="2651760" y="4114800"/>
+            <a:ext cx="2011680" cy="914400"/>
+          </a:xfrm>
+          <a:prstGeom prst="rect">
+            <a:avLst/>
+          </a:prstGeom>
+          <a:solidFill>
+            <a:srgbClr val="F5F5F5"/>
+          </a:solidFill>
+          <a:ln>
+            <a:solidFill>
+              <a:srgbClr val="DDDDDD"/>
+            </a:solidFill>
+          </a:ln>
+        </p:spPr>
+        <p:style>
+          <a:lnRef idx="1">
+            <a:schemeClr val="accent1"/>
+          </a:lnRef>
+          <a:fillRef idx="3">
+            <a:schemeClr val="accent1"/>
+          </a:fillRef>
+          <a:effectRef idx="2">
+            <a:schemeClr val="accent1"/>
+          </a:effectRef>
+          <a:fontRef idx="minor">
+            <a:schemeClr val="lt1"/>
+          </a:fontRef>
+        </p:style>
+        <p:txBody>
+          <a:bodyPr rtlCol="0" anchor="ctr"/>
+          <a:lstStyle/>
+          <a:p>
+            <a:pPr algn="ctr"/>
+          </a:p>
+        </p:txBody>
+      </p:sp>
+      <p:sp>
+        <p:nvSpPr>
+          <p:cNvPr id="9" name="TextBox 8"/>
+          <p:cNvSpPr txBox="1"/>
+          <p:nvPr/>
+        </p:nvSpPr>
+        <p:spPr>
+          <a:xfrm>
+            <a:off x="2761488" y="4187952"/>
+            <a:ext cx="1792224" cy="768096"/>
+          </a:xfrm>
+          <a:prstGeom prst="rect">
+            <a:avLst/>
+          </a:prstGeom>
+          <a:noFill/>
+        </p:spPr>
+        <p:txBody>
+          <a:bodyPr wrap="square">
+            <a:spAutoFit/>
+          </a:bodyPr>
+          <a:lstStyle/>
+          <a:p>
+            <a:pPr>
+              <a:defRPr sz="1000">
+                <a:solidFill>
+                  <a:srgbClr val="666666"/>
+                </a:solidFill>
+              </a:defRPr>
+            </a:pPr>
+            <a:r>
+              <a:t>Impressions</a:t>
+            </a:r>
+          </a:p>
+          <a:p>
+            <a:pPr>
+              <a:defRPr sz="1600" b="1">
+                <a:solidFill>
+                  <a:srgbClr val="1A2B4A"/>
+                </a:solidFill>
+              </a:defRPr>
+            </a:pPr>
+            <a:r>
+              <a:t>[TBD]</a:t>
+            </a:r>
+          </a:p>
+        </p:txBody>
+      </p:sp>
+      <p:sp>
+        <p:nvSpPr>
+          <p:cNvPr id="10" name="Rectangle 9"/>
+          <p:cNvSpPr/>
+          <p:nvPr/>
+        </p:nvSpPr>
+        <p:spPr>
+          <a:xfrm>
+            <a:off x="4846320" y="4114800"/>
+            <a:ext cx="2011680" cy="914400"/>
+          </a:xfrm>
+          <a:prstGeom prst="rect">
+            <a:avLst/>
+          </a:prstGeom>
+          <a:solidFill>
+            <a:srgbClr val="F5F5F5"/>
+          </a:solidFill>
+          <a:ln>
+            <a:solidFill>
+              <a:srgbClr val="DDDDDD"/>
+            </a:solidFill>
+          </a:ln>
+        </p:spPr>
+        <p:style>
+          <a:lnRef idx="1">
+            <a:schemeClr val="accent1"/>
+          </a:lnRef>
+          <a:fillRef idx="3">
+            <a:schemeClr val="accent1"/>
+          </a:fillRef>
+          <a:effectRef idx="2">
+            <a:schemeClr val="accent1"/>
+          </a:effectRef>
+          <a:fontRef idx="minor">
+            <a:schemeClr val="lt1"/>
+          </a:fontRef>
+        </p:style>
+        <p:txBody>
+          <a:bodyPr rtlCol="0" anchor="ctr"/>
+          <a:lstStyle/>
+          <a:p>
+            <a:pPr algn="ctr"/>
+          </a:p>
+        </p:txBody>
+      </p:sp>
+      <p:sp>
+        <p:nvSpPr>
+          <p:cNvPr id="11" name="TextBox 10"/>
+          <p:cNvSpPr txBox="1"/>
+          <p:nvPr/>
+        </p:nvSpPr>
+        <p:spPr>
+          <a:xfrm>
+            <a:off x="4956048" y="4187952"/>
+            <a:ext cx="1792224" cy="768096"/>
+          </a:xfrm>
+          <a:prstGeom prst="rect">
+            <a:avLst/>
+          </a:prstGeom>
+          <a:noFill/>
+        </p:spPr>
+        <p:txBody>
+          <a:bodyPr wrap="square">
+            <a:spAutoFit/>
+          </a:bodyPr>
+          <a:lstStyle/>
+          <a:p>
+            <a:pPr>
+              <a:defRPr sz="1000">
+                <a:solidFill>
+                  <a:srgbClr val="666666"/>
+                </a:solidFill>
+              </a:defRPr>
+            </a:pPr>
+            <a:r>
+              <a:t>CTR</a:t>
+            </a:r>
+          </a:p>
+          <a:p>
+            <a:pPr>
+              <a:defRPr sz="1600" b="1">
+                <a:solidFill>
+                  <a:srgbClr val="1A2B4A"/>
+                </a:solidFill>
+              </a:defRPr>
+            </a:pPr>
+            <a:r>
+              <a:t>[TBD]</a:t>
+            </a:r>
+          </a:p>
+        </p:txBody>
+      </p:sp>
+      <p:sp>
+        <p:nvSpPr>
+          <p:cNvPr id="12" name="Rectangle 11"/>
+          <p:cNvSpPr/>
+          <p:nvPr/>
+        </p:nvSpPr>
+        <p:spPr>
+          <a:xfrm>
+            <a:off x="7040880" y="4114800"/>
+            <a:ext cx="1645920" cy="914400"/>
+          </a:xfrm>
+          <a:prstGeom prst="rect">
+            <a:avLst/>
+          </a:prstGeom>
+          <a:solidFill>
+            <a:srgbClr val="F5F5F5"/>
+          </a:solidFill>
+          <a:ln>
+            <a:solidFill>
+              <a:srgbClr val="DDDDDD"/>
+            </a:solidFill>
+          </a:ln>
+        </p:spPr>
+        <p:style>
+          <a:lnRef idx="1">
+            <a:schemeClr val="accent1"/>
+          </a:lnRef>
+          <a:fillRef idx="3">
+            <a:schemeClr val="accent1"/>
+          </a:fillRef>
+          <a:effectRef idx="2">
+            <a:schemeClr val="accent1"/>
+          </a:effectRef>
+          <a:fontRef idx="minor">
+            <a:schemeClr val="lt1"/>
+          </a:fontRef>
+        </p:style>
+        <p:txBody>
+          <a:bodyPr rtlCol="0" anchor="ctr"/>
+          <a:lstStyle/>
+          <a:p>
+            <a:pPr algn="ctr"/>
+          </a:p>
+        </p:txBody>
+      </p:sp>
+      <p:sp>
+        <p:nvSpPr>
+          <p:cNvPr id="13" name="TextBox 12"/>
+          <p:cNvSpPr txBox="1"/>
+          <p:nvPr/>
+        </p:nvSpPr>
+        <p:spPr>
+          <a:xfrm>
+            <a:off x="7150608" y="4187952"/>
+            <a:ext cx="1426464" cy="768096"/>
+          </a:xfrm>
+          <a:prstGeom prst="rect">
+            <a:avLst/>
+          </a:prstGeom>
+          <a:noFill/>
+        </p:spPr>
+        <p:txBody>
+          <a:bodyPr wrap="square">
+            <a:spAutoFit/>
+          </a:bodyPr>
+          <a:lstStyle/>
+          <a:p>
+            <a:pPr>
+              <a:defRPr sz="1000">
+                <a:solidFill>
+                  <a:srgbClr val="666666"/>
+                </a:solidFill>
+              </a:defRPr>
+            </a:pPr>
+            <a:r>
+              <a:t>Cost</a:t>
+            </a:r>
+          </a:p>
+          <a:p>
+            <a:pPr>
+              <a:defRPr sz="1600" b="1">
+                <a:solidFill>
+                  <a:srgbClr val="1A2B4A"/>
+                </a:solidFill>
+              </a:defRPr>
+            </a:pPr>
+            <a:r>
+              <a:t>[TBD]</a:t>
+            </a:r>
+          </a:p>
+        </p:txBody>
+      </p:sp>
+      <p:sp>
+        <p:nvSpPr>
+          <p:cNvPr id="14" name="TextBox 13"/>
           <p:cNvSpPr txBox="1"/>
           <p:nvPr/>
         </p:nvSpPr>
